--- a/downloads/presentations/modules/lesson-41-privacy-preserving-ai-and-de-identification.pptx
+++ b/downloads/presentations/modules/lesson-41-privacy-preserving-ai-and-de-identification.pptx
@@ -3177,6 +3177,45 @@
           </a:p>
         </p:txBody>
       </p:sp>
+      <p:sp>
+        <p:nvSpPr>
+          <p:cNvPr id="8" name="Text 5"/>
+          <p:cNvSpPr/>
+          <p:nvPr/>
+        </p:nvSpPr>
+        <p:spPr>
+          <a:xfrm>
+            <a:off x="11137392" y="6510528"/>
+            <a:ext cx="411480" cy="201168"/>
+          </a:xfrm>
+          <a:prstGeom prst="rect">
+            <a:avLst/>
+          </a:prstGeom>
+          <a:noFill/>
+          <a:ln/>
+        </p:spPr>
+        <p:txBody>
+          <a:bodyPr wrap="square" lIns="0" tIns="0" rIns="0" bIns="0" rtlCol="0" anchor="ctr"/>
+          <a:lstStyle/>
+          <a:p>
+            <a:pPr algn="r" indent="0" marL="0">
+              <a:buNone/>
+            </a:pPr>
+            <a:r>
+              <a:rPr lang="en-US" sz="900" dirty="0">
+                <a:solidFill>
+                  <a:srgbClr val="5F7181"/>
+                </a:solidFill>
+                <a:latin typeface="Aptos" pitchFamily="34" charset="0"/>
+                <a:ea typeface="Aptos" pitchFamily="34" charset="-122"/>
+                <a:cs typeface="Aptos" pitchFamily="34" charset="-120"/>
+              </a:rPr>
+              <a:t>1</a:t>
+            </a:r>
+            <a:endParaRPr lang="en-US" sz="900" dirty="0"/>
+          </a:p>
+        </p:txBody>
+      </p:sp>
     </p:spTree>
   </p:cSld>
   <p:clrMapOvr>
@@ -3370,7 +3409,7 @@
                 <a:ea typeface="Aptos" pitchFamily="34" charset="-122"/>
                 <a:cs typeface="Aptos" pitchFamily="34" charset="-120"/>
               </a:rPr>
-              <a:t>© Paula Soper</a:t>
+              <a:t>Â© Paula Soper</a:t>
             </a:r>
             <a:endParaRPr lang="en-US" sz="800" dirty="0"/>
           </a:p>
@@ -3378,7 +3417,46 @@
       </p:sp>
       <p:sp>
         <p:nvSpPr>
-          <p:cNvPr id="7" name="Shape 5"/>
+          <p:cNvPr id="7" name="Text 5"/>
+          <p:cNvSpPr/>
+          <p:nvPr/>
+        </p:nvSpPr>
+        <p:spPr>
+          <a:xfrm>
+            <a:off x="11137392" y="6510528"/>
+            <a:ext cx="411480" cy="201168"/>
+          </a:xfrm>
+          <a:prstGeom prst="rect">
+            <a:avLst/>
+          </a:prstGeom>
+          <a:noFill/>
+          <a:ln/>
+        </p:spPr>
+        <p:txBody>
+          <a:bodyPr wrap="square" lIns="0" tIns="0" rIns="0" bIns="0" rtlCol="0" anchor="ctr"/>
+          <a:lstStyle/>
+          <a:p>
+            <a:pPr algn="r" indent="0" marL="0">
+              <a:buNone/>
+            </a:pPr>
+            <a:r>
+              <a:rPr lang="en-US" sz="900" dirty="0">
+                <a:solidFill>
+                  <a:srgbClr val="5F7181"/>
+                </a:solidFill>
+                <a:latin typeface="Aptos" pitchFamily="34" charset="0"/>
+                <a:ea typeface="Aptos" pitchFamily="34" charset="-122"/>
+                <a:cs typeface="Aptos" pitchFamily="34" charset="-120"/>
+              </a:rPr>
+              <a:t>10</a:t>
+            </a:r>
+            <a:endParaRPr lang="en-US" sz="900" dirty="0"/>
+          </a:p>
+        </p:txBody>
+      </p:sp>
+      <p:sp>
+        <p:nvSpPr>
+          <p:cNvPr id="8" name="Shape 6"/>
           <p:cNvSpPr/>
           <p:nvPr/>
         </p:nvSpPr>
@@ -3403,7 +3481,7 @@
       </p:sp>
       <p:sp>
         <p:nvSpPr>
-          <p:cNvPr id="8" name="Text 6"/>
+          <p:cNvPr id="9" name="Text 7"/>
           <p:cNvSpPr/>
           <p:nvPr/>
         </p:nvSpPr>
@@ -3442,14 +3520,14 @@
       </p:sp>
       <p:sp>
         <p:nvSpPr>
-          <p:cNvPr id="9" name="Text 7"/>
+          <p:cNvPr id="10" name="Text 8"/>
           <p:cNvSpPr/>
           <p:nvPr/>
         </p:nvSpPr>
         <p:spPr>
           <a:xfrm>
             <a:off x="640080" y="621792"/>
-            <a:ext cx="10881360" cy="566928"/>
+            <a:ext cx="10881360" cy="713232"/>
           </a:xfrm>
           <a:prstGeom prst="rect">
             <a:avLst/>
@@ -3467,7 +3545,7 @@
               <a:buNone/>
             </a:pPr>
             <a:r>
-              <a:rPr lang="en-US" sz="2700" b="1" dirty="0">
+              <a:rPr lang="en-US" sz="3400" b="1" dirty="0">
                 <a:solidFill>
                   <a:srgbClr val="003A63"/>
                 </a:solidFill>
@@ -3477,20 +3555,20 @@
               </a:rPr>
               <a:t>Core Concepts</a:t>
             </a:r>
-            <a:endParaRPr lang="en-US" sz="2700" dirty="0"/>
-          </a:p>
-        </p:txBody>
-      </p:sp>
-      <p:sp>
-        <p:nvSpPr>
-          <p:cNvPr id="10" name="Text 8"/>
-          <p:cNvSpPr/>
-          <p:nvPr/>
-        </p:nvSpPr>
-        <p:spPr>
-          <a:xfrm>
-            <a:off x="868680" y="1417320"/>
-            <a:ext cx="6675120" cy="4434840"/>
+            <a:endParaRPr lang="en-US" sz="3400" dirty="0"/>
+          </a:p>
+        </p:txBody>
+      </p:sp>
+      <p:sp>
+        <p:nvSpPr>
+          <p:cNvPr id="11" name="Text 9"/>
+          <p:cNvSpPr/>
+          <p:nvPr/>
+        </p:nvSpPr>
+        <p:spPr>
+          <a:xfrm>
+            <a:off x="868680" y="1508760"/>
+            <a:ext cx="6537960" cy="4160520"/>
           </a:xfrm>
           <a:prstGeom prst="rect">
             <a:avLst/>
@@ -3505,7 +3583,7 @@
           <a:lstStyle/>
           <a:p>
             <a:r>
-              <a:rPr lang="en-US" sz="1700" dirty="0">
+              <a:rPr lang="en-US" sz="2100" dirty="0">
                 <a:solidFill>
                   <a:srgbClr val="17364A"/>
                 </a:solidFill>
@@ -3515,11 +3593,11 @@
               </a:rPr>
               <a:t>De-identification is the process of reducing the risk that data can be connected to a specific person.</a:t>
             </a:r>
-            <a:endParaRPr lang="en-US" sz="1700" dirty="0"/>
-          </a:p>
-          <a:p>
-            <a:r>
-              <a:rPr lang="en-US" sz="1700" dirty="0">
+            <a:endParaRPr lang="en-US" sz="2100" dirty="0"/>
+          </a:p>
+          <a:p>
+            <a:r>
+              <a:rPr lang="en-US" sz="2100" dirty="0">
                 <a:solidFill>
                   <a:srgbClr val="17364A"/>
                 </a:solidFill>
@@ -3527,13 +3605,13 @@
                 <a:ea typeface="Aptos" pitchFamily="34" charset="-122"/>
                 <a:cs typeface="Aptos" pitchFamily="34" charset="-120"/>
               </a:rPr>
-              <a:t>In public health practice, de-identification must be interpreted carefully because rare diseases, small communities,.</a:t>
-            </a:r>
-            <a:endParaRPr lang="en-US" sz="1700" dirty="0"/>
-          </a:p>
-          <a:p>
-            <a:r>
-              <a:rPr lang="en-US" sz="1700" dirty="0">
+              <a:t>In public health practice, de-identification must be interpreted carefully because rare diseases, small.</a:t>
+            </a:r>
+            <a:endParaRPr lang="en-US" sz="2100" dirty="0"/>
+          </a:p>
+          <a:p>
+            <a:r>
+              <a:rPr lang="en-US" sz="2100" dirty="0">
                 <a:solidFill>
                   <a:srgbClr val="17364A"/>
                 </a:solidFill>
@@ -3543,27 +3621,13 @@
               </a:rPr>
               <a:t>A dataset can appear anonymous but still be linkable to individuals when combined with other information.</a:t>
             </a:r>
-            <a:endParaRPr lang="en-US" sz="1700" dirty="0"/>
-          </a:p>
-          <a:p>
-            <a:r>
-              <a:rPr lang="en-US" sz="1700" dirty="0">
-                <a:solidFill>
-                  <a:srgbClr val="17364A"/>
-                </a:solidFill>
-                <a:latin typeface="Aptos" pitchFamily="34" charset="0"/>
-                <a:ea typeface="Aptos" pitchFamily="34" charset="-122"/>
-                <a:cs typeface="Aptos" pitchFamily="34" charset="-120"/>
-              </a:rPr>
-              <a:t>Re-identification risk is the possibility that a person, household, provider, facility, or community can be identified from.</a:t>
-            </a:r>
-            <a:endParaRPr lang="en-US" sz="1700" dirty="0"/>
-          </a:p>
-        </p:txBody>
-      </p:sp>
-      <p:sp>
-        <p:nvSpPr>
-          <p:cNvPr id="11" name="Shape 9"/>
+            <a:endParaRPr lang="en-US" sz="2100" dirty="0"/>
+          </a:p>
+        </p:txBody>
+      </p:sp>
+      <p:sp>
+        <p:nvSpPr>
+          <p:cNvPr id="12" name="Shape 10"/>
           <p:cNvSpPr/>
           <p:nvPr/>
         </p:nvSpPr>
@@ -3590,14 +3654,14 @@
       </p:sp>
       <p:sp>
         <p:nvSpPr>
-          <p:cNvPr id="12" name="Text 10"/>
+          <p:cNvPr id="13" name="Text 11"/>
           <p:cNvSpPr/>
           <p:nvPr/>
         </p:nvSpPr>
         <p:spPr>
           <a:xfrm>
             <a:off x="8074152" y="1563624"/>
-            <a:ext cx="2825496" cy="201168"/>
+            <a:ext cx="2825496" cy="256032"/>
           </a:xfrm>
           <a:prstGeom prst="rect">
             <a:avLst/>
@@ -3613,7 +3677,7 @@
               <a:buNone/>
             </a:pPr>
             <a:r>
-              <a:rPr lang="en-US" sz="950" b="1" dirty="0">
+              <a:rPr lang="en-US" sz="1300" b="1" dirty="0">
                 <a:solidFill>
                   <a:srgbClr val="0068B7"/>
                 </a:solidFill>
@@ -3623,20 +3687,20 @@
               </a:rPr>
               <a:t>Key idea</a:t>
             </a:r>
-            <a:endParaRPr lang="en-US" sz="950" dirty="0"/>
-          </a:p>
-        </p:txBody>
-      </p:sp>
-      <p:sp>
-        <p:nvSpPr>
-          <p:cNvPr id="13" name="Text 11"/>
-          <p:cNvSpPr/>
-          <p:nvPr/>
-        </p:nvSpPr>
-        <p:spPr>
-          <a:xfrm>
-            <a:off x="8074152" y="1856232"/>
-            <a:ext cx="2825496" cy="1261872"/>
+            <a:endParaRPr lang="en-US" sz="1300" dirty="0"/>
+          </a:p>
+        </p:txBody>
+      </p:sp>
+      <p:sp>
+        <p:nvSpPr>
+          <p:cNvPr id="14" name="Text 12"/>
+          <p:cNvSpPr/>
+          <p:nvPr/>
+        </p:nvSpPr>
+        <p:spPr>
+          <a:xfrm>
+            <a:off x="8074152" y="1920240"/>
+            <a:ext cx="2825496" cy="1188720"/>
           </a:xfrm>
           <a:prstGeom prst="rect">
             <a:avLst/>
@@ -3654,7 +3718,7 @@
               <a:buNone/>
             </a:pPr>
             <a:r>
-              <a:rPr lang="en-US" sz="1250" dirty="0">
+              <a:rPr lang="en-US" sz="1550" dirty="0">
                 <a:solidFill>
                   <a:srgbClr val="17364A"/>
                 </a:solidFill>
@@ -3664,13 +3728,13 @@
               </a:rPr>
               <a:t>De-identification is the process of reducing the risk that data can be connected to a specific person.</a:t>
             </a:r>
-            <a:endParaRPr lang="en-US" sz="1250" dirty="0"/>
-          </a:p>
-        </p:txBody>
-      </p:sp>
-      <p:sp>
-        <p:nvSpPr>
-          <p:cNvPr id="14" name="Shape 12"/>
+            <a:endParaRPr lang="en-US" sz="1550" dirty="0"/>
+          </a:p>
+        </p:txBody>
+      </p:sp>
+      <p:sp>
+        <p:nvSpPr>
+          <p:cNvPr id="15" name="Shape 13"/>
           <p:cNvSpPr/>
           <p:nvPr/>
         </p:nvSpPr>
@@ -3697,14 +3761,14 @@
       </p:sp>
       <p:sp>
         <p:nvSpPr>
-          <p:cNvPr id="15" name="Text 13"/>
+          <p:cNvPr id="16" name="Text 14"/>
           <p:cNvSpPr/>
           <p:nvPr/>
         </p:nvSpPr>
         <p:spPr>
           <a:xfrm>
             <a:off x="8074152" y="3666744"/>
-            <a:ext cx="2825496" cy="201168"/>
+            <a:ext cx="2825496" cy="256032"/>
           </a:xfrm>
           <a:prstGeom prst="rect">
             <a:avLst/>
@@ -3720,7 +3784,7 @@
               <a:buNone/>
             </a:pPr>
             <a:r>
-              <a:rPr lang="en-US" sz="950" b="1" dirty="0">
+              <a:rPr lang="en-US" sz="1300" b="1" dirty="0">
                 <a:solidFill>
                   <a:srgbClr val="0068B7"/>
                 </a:solidFill>
@@ -3730,20 +3794,20 @@
               </a:rPr>
               <a:t>Use this for</a:t>
             </a:r>
-            <a:endParaRPr lang="en-US" sz="950" dirty="0"/>
-          </a:p>
-        </p:txBody>
-      </p:sp>
-      <p:sp>
-        <p:nvSpPr>
-          <p:cNvPr id="16" name="Text 14"/>
-          <p:cNvSpPr/>
-          <p:nvPr/>
-        </p:nvSpPr>
-        <p:spPr>
-          <a:xfrm>
-            <a:off x="8074152" y="3959352"/>
-            <a:ext cx="2825496" cy="1170432"/>
+            <a:endParaRPr lang="en-US" sz="1300" dirty="0"/>
+          </a:p>
+        </p:txBody>
+      </p:sp>
+      <p:sp>
+        <p:nvSpPr>
+          <p:cNvPr id="17" name="Text 15"/>
+          <p:cNvSpPr/>
+          <p:nvPr/>
+        </p:nvSpPr>
+        <p:spPr>
+          <a:xfrm>
+            <a:off x="8074152" y="4023360"/>
+            <a:ext cx="2825496" cy="1097280"/>
           </a:xfrm>
           <a:prstGeom prst="rect">
             <a:avLst/>
@@ -3761,7 +3825,7 @@
               <a:buNone/>
             </a:pPr>
             <a:r>
-              <a:rPr lang="en-US" sz="1250" dirty="0">
+              <a:rPr lang="en-US" sz="1550" dirty="0">
                 <a:solidFill>
                   <a:srgbClr val="17364A"/>
                 </a:solidFill>
@@ -3771,7 +3835,7 @@
               </a:rPr>
               <a:t>Connect the concept to public health decisions, safeguards, documentation, or implementation work.</a:t>
             </a:r>
-            <a:endParaRPr lang="en-US" sz="1250" dirty="0"/>
+            <a:endParaRPr lang="en-US" sz="1550" dirty="0"/>
           </a:p>
         </p:txBody>
       </p:sp>
@@ -3968,7 +4032,7 @@
                 <a:ea typeface="Aptos" pitchFamily="34" charset="-122"/>
                 <a:cs typeface="Aptos" pitchFamily="34" charset="-120"/>
               </a:rPr>
-              <a:t>© Paula Soper</a:t>
+              <a:t>Â© Paula Soper</a:t>
             </a:r>
             <a:endParaRPr lang="en-US" sz="800" dirty="0"/>
           </a:p>
@@ -3982,8 +4046,47 @@
         </p:nvSpPr>
         <p:spPr>
           <a:xfrm>
+            <a:off x="11137392" y="6510528"/>
+            <a:ext cx="411480" cy="201168"/>
+          </a:xfrm>
+          <a:prstGeom prst="rect">
+            <a:avLst/>
+          </a:prstGeom>
+          <a:noFill/>
+          <a:ln/>
+        </p:spPr>
+        <p:txBody>
+          <a:bodyPr wrap="square" lIns="0" tIns="0" rIns="0" bIns="0" rtlCol="0" anchor="ctr"/>
+          <a:lstStyle/>
+          <a:p>
+            <a:pPr algn="r" indent="0" marL="0">
+              <a:buNone/>
+            </a:pPr>
+            <a:r>
+              <a:rPr lang="en-US" sz="900" dirty="0">
+                <a:solidFill>
+                  <a:srgbClr val="5F7181"/>
+                </a:solidFill>
+                <a:latin typeface="Aptos" pitchFamily="34" charset="0"/>
+                <a:ea typeface="Aptos" pitchFamily="34" charset="-122"/>
+                <a:cs typeface="Aptos" pitchFamily="34" charset="-120"/>
+              </a:rPr>
+              <a:t>11</a:t>
+            </a:r>
+            <a:endParaRPr lang="en-US" sz="900" dirty="0"/>
+          </a:p>
+        </p:txBody>
+      </p:sp>
+      <p:sp>
+        <p:nvSpPr>
+          <p:cNvPr id="8" name="Text 6"/>
+          <p:cNvSpPr/>
+          <p:nvPr/>
+        </p:nvSpPr>
+        <p:spPr>
+          <a:xfrm>
             <a:off x="640080" y="658368"/>
-            <a:ext cx="10881360" cy="566928"/>
+            <a:ext cx="10881360" cy="713232"/>
           </a:xfrm>
           <a:prstGeom prst="rect">
             <a:avLst/>
@@ -4001,7 +4104,7 @@
               <a:buNone/>
             </a:pPr>
             <a:r>
-              <a:rPr lang="en-US" sz="2700" b="1" dirty="0">
+              <a:rPr lang="en-US" sz="3400" b="1" dirty="0">
                 <a:solidFill>
                   <a:srgbClr val="003A63"/>
                 </a:solidFill>
@@ -4011,20 +4114,20 @@
               </a:rPr>
               <a:t>Core Concepts Continued</a:t>
             </a:r>
-            <a:endParaRPr lang="en-US" sz="2700" dirty="0"/>
-          </a:p>
-        </p:txBody>
-      </p:sp>
-      <p:sp>
-        <p:nvSpPr>
-          <p:cNvPr id="8" name="Text 6"/>
-          <p:cNvSpPr/>
-          <p:nvPr/>
-        </p:nvSpPr>
-        <p:spPr>
-          <a:xfrm>
-            <a:off x="868680" y="1417320"/>
-            <a:ext cx="6675120" cy="4434840"/>
+            <a:endParaRPr lang="en-US" sz="3400" dirty="0"/>
+          </a:p>
+        </p:txBody>
+      </p:sp>
+      <p:sp>
+        <p:nvSpPr>
+          <p:cNvPr id="9" name="Text 7"/>
+          <p:cNvSpPr/>
+          <p:nvPr/>
+        </p:nvSpPr>
+        <p:spPr>
+          <a:xfrm>
+            <a:off x="868680" y="1508760"/>
+            <a:ext cx="6537960" cy="4160520"/>
           </a:xfrm>
           <a:prstGeom prst="rect">
             <a:avLst/>
@@ -4039,7 +4142,7 @@
           <a:lstStyle/>
           <a:p>
             <a:r>
-              <a:rPr lang="en-US" sz="1700" dirty="0">
+              <a:rPr lang="en-US" sz="2100" dirty="0">
                 <a:solidFill>
                   <a:srgbClr val="17364A"/>
                 </a:solidFill>
@@ -4047,13 +4150,13 @@
                 <a:ea typeface="Aptos" pitchFamily="34" charset="-122"/>
                 <a:cs typeface="Aptos" pitchFamily="34" charset="-120"/>
               </a:rPr>
-              <a:t>Differential privacy is a statistical approach that adds carefully calibrated noise to outputs to reduce the risk that.</a:t>
-            </a:r>
-            <a:endParaRPr lang="en-US" sz="1700" dirty="0"/>
-          </a:p>
-          <a:p>
-            <a:r>
-              <a:rPr lang="en-US" sz="1700" dirty="0">
+              <a:t>Differential privacy is a statistical approach that adds carefully calibrated noise to outputs to.</a:t>
+            </a:r>
+            <a:endParaRPr lang="en-US" sz="2100" dirty="0"/>
+          </a:p>
+          <a:p>
+            <a:r>
+              <a:rPr lang="en-US" sz="2100" dirty="0">
                 <a:solidFill>
                   <a:srgbClr val="17364A"/>
                 </a:solidFill>
@@ -4063,11 +4166,11 @@
               </a:rPr>
               <a:t>It can be useful for public reporting or statistical release, but it does not solve all privacy problems.</a:t>
             </a:r>
-            <a:endParaRPr lang="en-US" sz="1700" dirty="0"/>
-          </a:p>
-          <a:p>
-            <a:r>
-              <a:rPr lang="en-US" sz="1700" dirty="0">
+            <a:endParaRPr lang="en-US" sz="2100" dirty="0"/>
+          </a:p>
+          <a:p>
+            <a:r>
+              <a:rPr lang="en-US" sz="2100" dirty="0">
                 <a:solidFill>
                   <a:srgbClr val="17364A"/>
                 </a:solidFill>
@@ -4075,15 +4178,15 @@
                 <a:ea typeface="Aptos" pitchFamily="34" charset="-122"/>
                 <a:cs typeface="Aptos" pitchFamily="34" charset="-120"/>
               </a:rPr>
-              <a:t>Public health staff need to understand that differential privacy involves tradeoffs between privacy protection and analytic.</a:t>
-            </a:r>
-            <a:endParaRPr lang="en-US" sz="1700" dirty="0"/>
-          </a:p>
-        </p:txBody>
-      </p:sp>
-      <p:sp>
-        <p:nvSpPr>
-          <p:cNvPr id="9" name="Shape 7"/>
+              <a:t>Public health staff need to understand that differential privacy involves tradeoffs between privacy.</a:t>
+            </a:r>
+            <a:endParaRPr lang="en-US" sz="2100" dirty="0"/>
+          </a:p>
+        </p:txBody>
+      </p:sp>
+      <p:sp>
+        <p:nvSpPr>
+          <p:cNvPr id="10" name="Shape 8"/>
           <p:cNvSpPr/>
           <p:nvPr/>
         </p:nvSpPr>
@@ -4110,14 +4213,14 @@
       </p:sp>
       <p:sp>
         <p:nvSpPr>
-          <p:cNvPr id="10" name="Text 8"/>
+          <p:cNvPr id="11" name="Text 9"/>
           <p:cNvSpPr/>
           <p:nvPr/>
         </p:nvSpPr>
         <p:spPr>
           <a:xfrm>
             <a:off x="8074152" y="1563624"/>
-            <a:ext cx="2825496" cy="201168"/>
+            <a:ext cx="2825496" cy="256032"/>
           </a:xfrm>
           <a:prstGeom prst="rect">
             <a:avLst/>
@@ -4133,7 +4236,7 @@
               <a:buNone/>
             </a:pPr>
             <a:r>
-              <a:rPr lang="en-US" sz="950" b="1" dirty="0">
+              <a:rPr lang="en-US" sz="1300" b="1" dirty="0">
                 <a:solidFill>
                   <a:srgbClr val="0068B7"/>
                 </a:solidFill>
@@ -4143,20 +4246,20 @@
               </a:rPr>
               <a:t>Key idea</a:t>
             </a:r>
-            <a:endParaRPr lang="en-US" sz="950" dirty="0"/>
-          </a:p>
-        </p:txBody>
-      </p:sp>
-      <p:sp>
-        <p:nvSpPr>
-          <p:cNvPr id="11" name="Text 9"/>
-          <p:cNvSpPr/>
-          <p:nvPr/>
-        </p:nvSpPr>
-        <p:spPr>
-          <a:xfrm>
-            <a:off x="8074152" y="1856232"/>
-            <a:ext cx="2825496" cy="1261872"/>
+            <a:endParaRPr lang="en-US" sz="1300" dirty="0"/>
+          </a:p>
+        </p:txBody>
+      </p:sp>
+      <p:sp>
+        <p:nvSpPr>
+          <p:cNvPr id="12" name="Text 10"/>
+          <p:cNvSpPr/>
+          <p:nvPr/>
+        </p:nvSpPr>
+        <p:spPr>
+          <a:xfrm>
+            <a:off x="8074152" y="1920240"/>
+            <a:ext cx="2825496" cy="1188720"/>
           </a:xfrm>
           <a:prstGeom prst="rect">
             <a:avLst/>
@@ -4174,7 +4277,7 @@
               <a:buNone/>
             </a:pPr>
             <a:r>
-              <a:rPr lang="en-US" sz="1250" dirty="0">
+              <a:rPr lang="en-US" sz="1550" dirty="0">
                 <a:solidFill>
                   <a:srgbClr val="17364A"/>
                 </a:solidFill>
@@ -4182,15 +4285,15 @@
                 <a:ea typeface="Aptos" pitchFamily="34" charset="-122"/>
                 <a:cs typeface="Aptos" pitchFamily="34" charset="-120"/>
               </a:rPr>
-              <a:t>Differential privacy is a statistical approach that adds carefully calibrated noise to outputs to reduce the risk that.</a:t>
-            </a:r>
-            <a:endParaRPr lang="en-US" sz="1250" dirty="0"/>
-          </a:p>
-        </p:txBody>
-      </p:sp>
-      <p:sp>
-        <p:nvSpPr>
-          <p:cNvPr id="12" name="Shape 10"/>
+              <a:t>Differential privacy is a statistical approach that adds carefully calibrated noise to outputs to.</a:t>
+            </a:r>
+            <a:endParaRPr lang="en-US" sz="1550" dirty="0"/>
+          </a:p>
+        </p:txBody>
+      </p:sp>
+      <p:sp>
+        <p:nvSpPr>
+          <p:cNvPr id="13" name="Shape 11"/>
           <p:cNvSpPr/>
           <p:nvPr/>
         </p:nvSpPr>
@@ -4217,14 +4320,14 @@
       </p:sp>
       <p:sp>
         <p:nvSpPr>
-          <p:cNvPr id="13" name="Text 11"/>
+          <p:cNvPr id="14" name="Text 12"/>
           <p:cNvSpPr/>
           <p:nvPr/>
         </p:nvSpPr>
         <p:spPr>
           <a:xfrm>
             <a:off x="8074152" y="3666744"/>
-            <a:ext cx="2825496" cy="201168"/>
+            <a:ext cx="2825496" cy="256032"/>
           </a:xfrm>
           <a:prstGeom prst="rect">
             <a:avLst/>
@@ -4240,7 +4343,7 @@
               <a:buNone/>
             </a:pPr>
             <a:r>
-              <a:rPr lang="en-US" sz="950" b="1" dirty="0">
+              <a:rPr lang="en-US" sz="1300" b="1" dirty="0">
                 <a:solidFill>
                   <a:srgbClr val="0068B7"/>
                 </a:solidFill>
@@ -4250,20 +4353,20 @@
               </a:rPr>
               <a:t>Use this for</a:t>
             </a:r>
-            <a:endParaRPr lang="en-US" sz="950" dirty="0"/>
-          </a:p>
-        </p:txBody>
-      </p:sp>
-      <p:sp>
-        <p:nvSpPr>
-          <p:cNvPr id="14" name="Text 12"/>
-          <p:cNvSpPr/>
-          <p:nvPr/>
-        </p:nvSpPr>
-        <p:spPr>
-          <a:xfrm>
-            <a:off x="8074152" y="3959352"/>
-            <a:ext cx="2825496" cy="1170432"/>
+            <a:endParaRPr lang="en-US" sz="1300" dirty="0"/>
+          </a:p>
+        </p:txBody>
+      </p:sp>
+      <p:sp>
+        <p:nvSpPr>
+          <p:cNvPr id="15" name="Text 13"/>
+          <p:cNvSpPr/>
+          <p:nvPr/>
+        </p:nvSpPr>
+        <p:spPr>
+          <a:xfrm>
+            <a:off x="8074152" y="4023360"/>
+            <a:ext cx="2825496" cy="1097280"/>
           </a:xfrm>
           <a:prstGeom prst="rect">
             <a:avLst/>
@@ -4281,7 +4384,7 @@
               <a:buNone/>
             </a:pPr>
             <a:r>
-              <a:rPr lang="en-US" sz="1250" dirty="0">
+              <a:rPr lang="en-US" sz="1550" dirty="0">
                 <a:solidFill>
                   <a:srgbClr val="17364A"/>
                 </a:solidFill>
@@ -4291,7 +4394,7 @@
               </a:rPr>
               <a:t>Connect the concept to public health decisions, safeguards, documentation, or implementation work.</a:t>
             </a:r>
-            <a:endParaRPr lang="en-US" sz="1250" dirty="0"/>
+            <a:endParaRPr lang="en-US" sz="1550" dirty="0"/>
           </a:p>
         </p:txBody>
       </p:sp>
@@ -4488,7 +4591,7 @@
                 <a:ea typeface="Aptos" pitchFamily="34" charset="-122"/>
                 <a:cs typeface="Aptos" pitchFamily="34" charset="-120"/>
               </a:rPr>
-              <a:t>© Paula Soper</a:t>
+              <a:t>Â© Paula Soper</a:t>
             </a:r>
             <a:endParaRPr lang="en-US" sz="800" dirty="0"/>
           </a:p>
@@ -4496,7 +4599,46 @@
       </p:sp>
       <p:sp>
         <p:nvSpPr>
-          <p:cNvPr id="7" name="Shape 5"/>
+          <p:cNvPr id="7" name="Text 5"/>
+          <p:cNvSpPr/>
+          <p:nvPr/>
+        </p:nvSpPr>
+        <p:spPr>
+          <a:xfrm>
+            <a:off x="11137392" y="6510528"/>
+            <a:ext cx="411480" cy="201168"/>
+          </a:xfrm>
+          <a:prstGeom prst="rect">
+            <a:avLst/>
+          </a:prstGeom>
+          <a:noFill/>
+          <a:ln/>
+        </p:spPr>
+        <p:txBody>
+          <a:bodyPr wrap="square" lIns="0" tIns="0" rIns="0" bIns="0" rtlCol="0" anchor="ctr"/>
+          <a:lstStyle/>
+          <a:p>
+            <a:pPr algn="r" indent="0" marL="0">
+              <a:buNone/>
+            </a:pPr>
+            <a:r>
+              <a:rPr lang="en-US" sz="900" dirty="0">
+                <a:solidFill>
+                  <a:srgbClr val="5F7181"/>
+                </a:solidFill>
+                <a:latin typeface="Aptos" pitchFamily="34" charset="0"/>
+                <a:ea typeface="Aptos" pitchFamily="34" charset="-122"/>
+                <a:cs typeface="Aptos" pitchFamily="34" charset="-120"/>
+              </a:rPr>
+              <a:t>12</a:t>
+            </a:r>
+            <a:endParaRPr lang="en-US" sz="900" dirty="0"/>
+          </a:p>
+        </p:txBody>
+      </p:sp>
+      <p:sp>
+        <p:nvSpPr>
+          <p:cNvPr id="8" name="Shape 6"/>
           <p:cNvSpPr/>
           <p:nvPr/>
         </p:nvSpPr>
@@ -4521,7 +4663,7 @@
       </p:sp>
       <p:sp>
         <p:nvSpPr>
-          <p:cNvPr id="8" name="Text 6"/>
+          <p:cNvPr id="9" name="Text 7"/>
           <p:cNvSpPr/>
           <p:nvPr/>
         </p:nvSpPr>
@@ -4560,14 +4702,14 @@
       </p:sp>
       <p:sp>
         <p:nvSpPr>
-          <p:cNvPr id="9" name="Text 7"/>
+          <p:cNvPr id="10" name="Text 8"/>
           <p:cNvSpPr/>
           <p:nvPr/>
         </p:nvSpPr>
         <p:spPr>
           <a:xfrm>
             <a:off x="640080" y="621792"/>
-            <a:ext cx="10881360" cy="566928"/>
+            <a:ext cx="10881360" cy="713232"/>
           </a:xfrm>
           <a:prstGeom prst="rect">
             <a:avLst/>
@@ -4585,7 +4727,7 @@
               <a:buNone/>
             </a:pPr>
             <a:r>
-              <a:rPr lang="en-US" sz="2700" b="1" dirty="0">
+              <a:rPr lang="en-US" sz="3400" b="1" dirty="0">
                 <a:solidFill>
                   <a:srgbClr val="003A63"/>
                 </a:solidFill>
@@ -4595,20 +4737,20 @@
               </a:rPr>
               <a:t>Public Health Example</a:t>
             </a:r>
-            <a:endParaRPr lang="en-US" sz="2700" dirty="0"/>
-          </a:p>
-        </p:txBody>
-      </p:sp>
-      <p:sp>
-        <p:nvSpPr>
-          <p:cNvPr id="10" name="Text 8"/>
-          <p:cNvSpPr/>
-          <p:nvPr/>
-        </p:nvSpPr>
-        <p:spPr>
-          <a:xfrm>
-            <a:off x="868680" y="1417320"/>
-            <a:ext cx="6675120" cy="4434840"/>
+            <a:endParaRPr lang="en-US" sz="3400" dirty="0"/>
+          </a:p>
+        </p:txBody>
+      </p:sp>
+      <p:sp>
+        <p:nvSpPr>
+          <p:cNvPr id="11" name="Text 9"/>
+          <p:cNvSpPr/>
+          <p:nvPr/>
+        </p:nvSpPr>
+        <p:spPr>
+          <a:xfrm>
+            <a:off x="868680" y="1508760"/>
+            <a:ext cx="6537960" cy="4160520"/>
           </a:xfrm>
           <a:prstGeom prst="rect">
             <a:avLst/>
@@ -4623,7 +4765,7 @@
           <a:lstStyle/>
           <a:p>
             <a:r>
-              <a:rPr lang="en-US" sz="1700" dirty="0">
+              <a:rPr lang="en-US" sz="2100" dirty="0">
                 <a:solidFill>
                   <a:srgbClr val="17364A"/>
                 </a:solidFill>
@@ -4631,13 +4773,13 @@
                 <a:ea typeface="Aptos" pitchFamily="34" charset="-122"/>
                 <a:cs typeface="Aptos" pitchFamily="34" charset="-120"/>
               </a:rPr>
-              <a:t>Consider a health department that wants to use AI to summarize disease investigation notes and identify common exposure.</a:t>
-            </a:r>
-            <a:endParaRPr lang="en-US" sz="1700" dirty="0"/>
-          </a:p>
-          <a:p>
-            <a:r>
-              <a:rPr lang="en-US" sz="1700" dirty="0">
+              <a:t>Consider a health department that wants to use AI to summarize disease investigation notes and identify.</a:t>
+            </a:r>
+            <a:endParaRPr lang="en-US" sz="2100" dirty="0"/>
+          </a:p>
+          <a:p>
+            <a:r>
+              <a:rPr lang="en-US" sz="2100" dirty="0">
                 <a:solidFill>
                   <a:srgbClr val="17364A"/>
                 </a:solidFill>
@@ -4645,13 +4787,13 @@
                 <a:ea typeface="Aptos" pitchFamily="34" charset="-122"/>
                 <a:cs typeface="Aptos" pitchFamily="34" charset="-120"/>
               </a:rPr>
-              <a:t>The notes may include symptoms, dates, employer names, schools, shelters, correctional facilities, household details,.</a:t>
-            </a:r>
-            <a:endParaRPr lang="en-US" sz="1700" dirty="0"/>
-          </a:p>
-          <a:p>
-            <a:r>
-              <a:rPr lang="en-US" sz="1700" dirty="0">
+              <a:t>The notes may include symptoms, dates, employer names, schools, shelters, correctional facilities,.</a:t>
+            </a:r>
+            <a:endParaRPr lang="en-US" sz="2100" dirty="0"/>
+          </a:p>
+          <a:p>
+            <a:r>
+              <a:rPr lang="en-US" sz="2100" dirty="0">
                 <a:solidFill>
                   <a:srgbClr val="17364A"/>
                 </a:solidFill>
@@ -4659,29 +4801,15 @@
                 <a:ea typeface="Aptos" pitchFamily="34" charset="-122"/>
                 <a:cs typeface="Aptos" pitchFamily="34" charset="-120"/>
               </a:rPr>
-              <a:t>Even if the AI system is internal, the agency must define who can access the notes, whether the AI output can include names.</a:t>
-            </a:r>
-            <a:endParaRPr lang="en-US" sz="1700" dirty="0"/>
-          </a:p>
-          <a:p>
-            <a:r>
-              <a:rPr lang="en-US" sz="1700" dirty="0">
-                <a:solidFill>
-                  <a:srgbClr val="17364A"/>
-                </a:solidFill>
-                <a:latin typeface="Aptos" pitchFamily="34" charset="0"/>
-                <a:ea typeface="Aptos" pitchFamily="34" charset="-122"/>
-                <a:cs typeface="Aptos" pitchFamily="34" charset="-120"/>
-              </a:rPr>
-              <a:t>A privacy-preserving design might limit the AI tool to authorized case investigation staff, restrict the tool from using.</a:t>
-            </a:r>
-            <a:endParaRPr lang="en-US" sz="1700" dirty="0"/>
-          </a:p>
-        </p:txBody>
-      </p:sp>
-      <p:sp>
-        <p:nvSpPr>
-          <p:cNvPr id="11" name="Shape 9"/>
+              <a:t>Even if the AI system is internal, the agency must define who can access the notes, whether the AI.</a:t>
+            </a:r>
+            <a:endParaRPr lang="en-US" sz="2100" dirty="0"/>
+          </a:p>
+        </p:txBody>
+      </p:sp>
+      <p:sp>
+        <p:nvSpPr>
+          <p:cNvPr id="12" name="Shape 10"/>
           <p:cNvSpPr/>
           <p:nvPr/>
         </p:nvSpPr>
@@ -4708,14 +4836,14 @@
       </p:sp>
       <p:sp>
         <p:nvSpPr>
-          <p:cNvPr id="12" name="Text 10"/>
+          <p:cNvPr id="13" name="Text 11"/>
           <p:cNvSpPr/>
           <p:nvPr/>
         </p:nvSpPr>
         <p:spPr>
           <a:xfrm>
             <a:off x="8074152" y="1563624"/>
-            <a:ext cx="2825496" cy="201168"/>
+            <a:ext cx="2825496" cy="256032"/>
           </a:xfrm>
           <a:prstGeom prst="rect">
             <a:avLst/>
@@ -4731,7 +4859,7 @@
               <a:buNone/>
             </a:pPr>
             <a:r>
-              <a:rPr lang="en-US" sz="950" b="1" dirty="0">
+              <a:rPr lang="en-US" sz="1300" b="1" dirty="0">
                 <a:solidFill>
                   <a:srgbClr val="0068B7"/>
                 </a:solidFill>
@@ -4741,20 +4869,20 @@
               </a:rPr>
               <a:t>Key idea</a:t>
             </a:r>
-            <a:endParaRPr lang="en-US" sz="950" dirty="0"/>
-          </a:p>
-        </p:txBody>
-      </p:sp>
-      <p:sp>
-        <p:nvSpPr>
-          <p:cNvPr id="13" name="Text 11"/>
-          <p:cNvSpPr/>
-          <p:nvPr/>
-        </p:nvSpPr>
-        <p:spPr>
-          <a:xfrm>
-            <a:off x="8074152" y="1856232"/>
-            <a:ext cx="2825496" cy="1261872"/>
+            <a:endParaRPr lang="en-US" sz="1300" dirty="0"/>
+          </a:p>
+        </p:txBody>
+      </p:sp>
+      <p:sp>
+        <p:nvSpPr>
+          <p:cNvPr id="14" name="Text 12"/>
+          <p:cNvSpPr/>
+          <p:nvPr/>
+        </p:nvSpPr>
+        <p:spPr>
+          <a:xfrm>
+            <a:off x="8074152" y="1920240"/>
+            <a:ext cx="2825496" cy="1188720"/>
           </a:xfrm>
           <a:prstGeom prst="rect">
             <a:avLst/>
@@ -4772,7 +4900,7 @@
               <a:buNone/>
             </a:pPr>
             <a:r>
-              <a:rPr lang="en-US" sz="1250" dirty="0">
+              <a:rPr lang="en-US" sz="1550" dirty="0">
                 <a:solidFill>
                   <a:srgbClr val="17364A"/>
                 </a:solidFill>
@@ -4780,15 +4908,15 @@
                 <a:ea typeface="Aptos" pitchFamily="34" charset="-122"/>
                 <a:cs typeface="Aptos" pitchFamily="34" charset="-120"/>
               </a:rPr>
-              <a:t>Consider a health department that wants to use AI to summarize disease investigation notes and identify common exposure.</a:t>
-            </a:r>
-            <a:endParaRPr lang="en-US" sz="1250" dirty="0"/>
-          </a:p>
-        </p:txBody>
-      </p:sp>
-      <p:sp>
-        <p:nvSpPr>
-          <p:cNvPr id="14" name="Shape 12"/>
+              <a:t>Consider a health department that wants to use AI to summarize disease investigation notes and identify.</a:t>
+            </a:r>
+            <a:endParaRPr lang="en-US" sz="1550" dirty="0"/>
+          </a:p>
+        </p:txBody>
+      </p:sp>
+      <p:sp>
+        <p:nvSpPr>
+          <p:cNvPr id="15" name="Shape 13"/>
           <p:cNvSpPr/>
           <p:nvPr/>
         </p:nvSpPr>
@@ -4815,14 +4943,14 @@
       </p:sp>
       <p:sp>
         <p:nvSpPr>
-          <p:cNvPr id="15" name="Text 13"/>
+          <p:cNvPr id="16" name="Text 14"/>
           <p:cNvSpPr/>
           <p:nvPr/>
         </p:nvSpPr>
         <p:spPr>
           <a:xfrm>
             <a:off x="8074152" y="3666744"/>
-            <a:ext cx="2825496" cy="201168"/>
+            <a:ext cx="2825496" cy="256032"/>
           </a:xfrm>
           <a:prstGeom prst="rect">
             <a:avLst/>
@@ -4838,7 +4966,7 @@
               <a:buNone/>
             </a:pPr>
             <a:r>
-              <a:rPr lang="en-US" sz="950" b="1" dirty="0">
+              <a:rPr lang="en-US" sz="1300" b="1" dirty="0">
                 <a:solidFill>
                   <a:srgbClr val="0068B7"/>
                 </a:solidFill>
@@ -4848,20 +4976,20 @@
               </a:rPr>
               <a:t>Use this for</a:t>
             </a:r>
-            <a:endParaRPr lang="en-US" sz="950" dirty="0"/>
-          </a:p>
-        </p:txBody>
-      </p:sp>
-      <p:sp>
-        <p:nvSpPr>
-          <p:cNvPr id="16" name="Text 14"/>
-          <p:cNvSpPr/>
-          <p:nvPr/>
-        </p:nvSpPr>
-        <p:spPr>
-          <a:xfrm>
-            <a:off x="8074152" y="3959352"/>
-            <a:ext cx="2825496" cy="1170432"/>
+            <a:endParaRPr lang="en-US" sz="1300" dirty="0"/>
+          </a:p>
+        </p:txBody>
+      </p:sp>
+      <p:sp>
+        <p:nvSpPr>
+          <p:cNvPr id="17" name="Text 15"/>
+          <p:cNvSpPr/>
+          <p:nvPr/>
+        </p:nvSpPr>
+        <p:spPr>
+          <a:xfrm>
+            <a:off x="8074152" y="4023360"/>
+            <a:ext cx="2825496" cy="1097280"/>
           </a:xfrm>
           <a:prstGeom prst="rect">
             <a:avLst/>
@@ -4879,7 +5007,7 @@
               <a:buNone/>
             </a:pPr>
             <a:r>
-              <a:rPr lang="en-US" sz="1250" dirty="0">
+              <a:rPr lang="en-US" sz="1550" dirty="0">
                 <a:solidFill>
                   <a:srgbClr val="17364A"/>
                 </a:solidFill>
@@ -4889,7 +5017,7 @@
               </a:rPr>
               <a:t>Connect the concept to public health decisions, safeguards, documentation, or implementation work.</a:t>
             </a:r>
-            <a:endParaRPr lang="en-US" sz="1250" dirty="0"/>
+            <a:endParaRPr lang="en-US" sz="1550" dirty="0"/>
           </a:p>
         </p:txBody>
       </p:sp>
@@ -5086,7 +5214,7 @@
                 <a:ea typeface="Aptos" pitchFamily="34" charset="-122"/>
                 <a:cs typeface="Aptos" pitchFamily="34" charset="-120"/>
               </a:rPr>
-              <a:t>© Paula Soper</a:t>
+              <a:t>Â© Paula Soper</a:t>
             </a:r>
             <a:endParaRPr lang="en-US" sz="800" dirty="0"/>
           </a:p>
@@ -5094,7 +5222,46 @@
       </p:sp>
       <p:sp>
         <p:nvSpPr>
-          <p:cNvPr id="7" name="Shape 5"/>
+          <p:cNvPr id="7" name="Text 5"/>
+          <p:cNvSpPr/>
+          <p:nvPr/>
+        </p:nvSpPr>
+        <p:spPr>
+          <a:xfrm>
+            <a:off x="11137392" y="6510528"/>
+            <a:ext cx="411480" cy="201168"/>
+          </a:xfrm>
+          <a:prstGeom prst="rect">
+            <a:avLst/>
+          </a:prstGeom>
+          <a:noFill/>
+          <a:ln/>
+        </p:spPr>
+        <p:txBody>
+          <a:bodyPr wrap="square" lIns="0" tIns="0" rIns="0" bIns="0" rtlCol="0" anchor="ctr"/>
+          <a:lstStyle/>
+          <a:p>
+            <a:pPr algn="r" indent="0" marL="0">
+              <a:buNone/>
+            </a:pPr>
+            <a:r>
+              <a:rPr lang="en-US" sz="900" dirty="0">
+                <a:solidFill>
+                  <a:srgbClr val="5F7181"/>
+                </a:solidFill>
+                <a:latin typeface="Aptos" pitchFamily="34" charset="0"/>
+                <a:ea typeface="Aptos" pitchFamily="34" charset="-122"/>
+                <a:cs typeface="Aptos" pitchFamily="34" charset="-120"/>
+              </a:rPr>
+              <a:t>13</a:t>
+            </a:r>
+            <a:endParaRPr lang="en-US" sz="900" dirty="0"/>
+          </a:p>
+        </p:txBody>
+      </p:sp>
+      <p:sp>
+        <p:nvSpPr>
+          <p:cNvPr id="8" name="Shape 6"/>
           <p:cNvSpPr/>
           <p:nvPr/>
         </p:nvSpPr>
@@ -5119,7 +5286,7 @@
       </p:sp>
       <p:sp>
         <p:nvSpPr>
-          <p:cNvPr id="8" name="Text 6"/>
+          <p:cNvPr id="9" name="Text 7"/>
           <p:cNvSpPr/>
           <p:nvPr/>
         </p:nvSpPr>
@@ -5158,14 +5325,14 @@
       </p:sp>
       <p:sp>
         <p:nvSpPr>
-          <p:cNvPr id="9" name="Text 7"/>
+          <p:cNvPr id="10" name="Text 8"/>
           <p:cNvSpPr/>
           <p:nvPr/>
         </p:nvSpPr>
         <p:spPr>
           <a:xfrm>
             <a:off x="640080" y="621792"/>
-            <a:ext cx="10881360" cy="566928"/>
+            <a:ext cx="10881360" cy="713232"/>
           </a:xfrm>
           <a:prstGeom prst="rect">
             <a:avLst/>
@@ -5183,7 +5350,7 @@
               <a:buNone/>
             </a:pPr>
             <a:r>
-              <a:rPr lang="en-US" sz="2700" b="1" dirty="0">
+              <a:rPr lang="en-US" sz="3400" b="1" dirty="0">
                 <a:solidFill>
                   <a:srgbClr val="003A63"/>
                 </a:solidFill>
@@ -5193,20 +5360,20 @@
               </a:rPr>
               <a:t>Technical Deep Dive</a:t>
             </a:r>
-            <a:endParaRPr lang="en-US" sz="2700" dirty="0"/>
-          </a:p>
-        </p:txBody>
-      </p:sp>
-      <p:sp>
-        <p:nvSpPr>
-          <p:cNvPr id="10" name="Text 8"/>
-          <p:cNvSpPr/>
-          <p:nvPr/>
-        </p:nvSpPr>
-        <p:spPr>
-          <a:xfrm>
-            <a:off x="868680" y="1417320"/>
-            <a:ext cx="6675120" cy="4434840"/>
+            <a:endParaRPr lang="en-US" sz="3400" dirty="0"/>
+          </a:p>
+        </p:txBody>
+      </p:sp>
+      <p:sp>
+        <p:nvSpPr>
+          <p:cNvPr id="11" name="Text 9"/>
+          <p:cNvSpPr/>
+          <p:nvPr/>
+        </p:nvSpPr>
+        <p:spPr>
+          <a:xfrm>
+            <a:off x="868680" y="1508760"/>
+            <a:ext cx="6537960" cy="4160520"/>
           </a:xfrm>
           <a:prstGeom prst="rect">
             <a:avLst/>
@@ -5221,7 +5388,7 @@
           <a:lstStyle/>
           <a:p>
             <a:r>
-              <a:rPr lang="en-US" sz="1700" dirty="0">
+              <a:rPr lang="en-US" sz="2100" dirty="0">
                 <a:solidFill>
                   <a:srgbClr val="17364A"/>
                 </a:solidFill>
@@ -5231,11 +5398,11 @@
               </a:rPr>
               <a:t>Privacy-preserving AI begins with data classification.</a:t>
             </a:r>
-            <a:endParaRPr lang="en-US" sz="1700" dirty="0"/>
-          </a:p>
-          <a:p>
-            <a:r>
-              <a:rPr lang="en-US" sz="1700" dirty="0">
+            <a:endParaRPr lang="en-US" sz="2100" dirty="0"/>
+          </a:p>
+          <a:p>
+            <a:r>
+              <a:rPr lang="en-US" sz="2100" dirty="0">
                 <a:solidFill>
                   <a:srgbClr val="17364A"/>
                 </a:solidFill>
@@ -5243,13 +5410,13 @@
                 <a:ea typeface="Aptos" pitchFamily="34" charset="-122"/>
                 <a:cs typeface="Aptos" pitchFamily="34" charset="-120"/>
               </a:rPr>
-              <a:t>Staff should identify whether the workflow uses protected health information, personally identifiable information,.</a:t>
-            </a:r>
-            <a:endParaRPr lang="en-US" sz="1700" dirty="0"/>
-          </a:p>
-          <a:p>
-            <a:r>
-              <a:rPr lang="en-US" sz="1700" dirty="0">
+              <a:t>Staff should identify whether the workflow uses protected health information, personally identifiable.</a:t>
+            </a:r>
+            <a:endParaRPr lang="en-US" sz="2100" dirty="0"/>
+          </a:p>
+          <a:p>
+            <a:r>
+              <a:rPr lang="en-US" sz="2100" dirty="0">
                 <a:solidFill>
                   <a:srgbClr val="17364A"/>
                 </a:solidFill>
@@ -5259,27 +5426,13 @@
               </a:rPr>
               <a:t>Classification should be tied to rules for storage, access, sharing, retention, and approved AI tools.</a:t>
             </a:r>
-            <a:endParaRPr lang="en-US" sz="1700" dirty="0"/>
-          </a:p>
-          <a:p>
-            <a:r>
-              <a:rPr lang="en-US" sz="1700" dirty="0">
-                <a:solidFill>
-                  <a:srgbClr val="17364A"/>
-                </a:solidFill>
-                <a:latin typeface="Aptos" pitchFamily="34" charset="0"/>
-                <a:ea typeface="Aptos" pitchFamily="34" charset="-122"/>
-                <a:cs typeface="Aptos" pitchFamily="34" charset="-120"/>
-              </a:rPr>
-              <a:t>A public AI tool may be acceptable for public guidance documents but inappropriate for case narratives or line lists.</a:t>
-            </a:r>
-            <a:endParaRPr lang="en-US" sz="1700" dirty="0"/>
-          </a:p>
-        </p:txBody>
-      </p:sp>
-      <p:sp>
-        <p:nvSpPr>
-          <p:cNvPr id="11" name="Shape 9"/>
+            <a:endParaRPr lang="en-US" sz="2100" dirty="0"/>
+          </a:p>
+        </p:txBody>
+      </p:sp>
+      <p:sp>
+        <p:nvSpPr>
+          <p:cNvPr id="12" name="Shape 10"/>
           <p:cNvSpPr/>
           <p:nvPr/>
         </p:nvSpPr>
@@ -5306,14 +5459,14 @@
       </p:sp>
       <p:sp>
         <p:nvSpPr>
-          <p:cNvPr id="12" name="Text 10"/>
+          <p:cNvPr id="13" name="Text 11"/>
           <p:cNvSpPr/>
           <p:nvPr/>
         </p:nvSpPr>
         <p:spPr>
           <a:xfrm>
             <a:off x="8074152" y="1563624"/>
-            <a:ext cx="2825496" cy="201168"/>
+            <a:ext cx="2825496" cy="256032"/>
           </a:xfrm>
           <a:prstGeom prst="rect">
             <a:avLst/>
@@ -5329,7 +5482,7 @@
               <a:buNone/>
             </a:pPr>
             <a:r>
-              <a:rPr lang="en-US" sz="950" b="1" dirty="0">
+              <a:rPr lang="en-US" sz="1300" b="1" dirty="0">
                 <a:solidFill>
                   <a:srgbClr val="0068B7"/>
                 </a:solidFill>
@@ -5339,20 +5492,20 @@
               </a:rPr>
               <a:t>Key idea</a:t>
             </a:r>
-            <a:endParaRPr lang="en-US" sz="950" dirty="0"/>
-          </a:p>
-        </p:txBody>
-      </p:sp>
-      <p:sp>
-        <p:nvSpPr>
-          <p:cNvPr id="13" name="Text 11"/>
-          <p:cNvSpPr/>
-          <p:nvPr/>
-        </p:nvSpPr>
-        <p:spPr>
-          <a:xfrm>
-            <a:off x="8074152" y="1856232"/>
-            <a:ext cx="2825496" cy="1261872"/>
+            <a:endParaRPr lang="en-US" sz="1300" dirty="0"/>
+          </a:p>
+        </p:txBody>
+      </p:sp>
+      <p:sp>
+        <p:nvSpPr>
+          <p:cNvPr id="14" name="Text 12"/>
+          <p:cNvSpPr/>
+          <p:nvPr/>
+        </p:nvSpPr>
+        <p:spPr>
+          <a:xfrm>
+            <a:off x="8074152" y="1920240"/>
+            <a:ext cx="2825496" cy="1188720"/>
           </a:xfrm>
           <a:prstGeom prst="rect">
             <a:avLst/>
@@ -5370,7 +5523,7 @@
               <a:buNone/>
             </a:pPr>
             <a:r>
-              <a:rPr lang="en-US" sz="1250" dirty="0">
+              <a:rPr lang="en-US" sz="1550" dirty="0">
                 <a:solidFill>
                   <a:srgbClr val="17364A"/>
                 </a:solidFill>
@@ -5380,13 +5533,13 @@
               </a:rPr>
               <a:t>Privacy-preserving AI begins with data classification.</a:t>
             </a:r>
-            <a:endParaRPr lang="en-US" sz="1250" dirty="0"/>
-          </a:p>
-        </p:txBody>
-      </p:sp>
-      <p:sp>
-        <p:nvSpPr>
-          <p:cNvPr id="14" name="Shape 12"/>
+            <a:endParaRPr lang="en-US" sz="1550" dirty="0"/>
+          </a:p>
+        </p:txBody>
+      </p:sp>
+      <p:sp>
+        <p:nvSpPr>
+          <p:cNvPr id="15" name="Shape 13"/>
           <p:cNvSpPr/>
           <p:nvPr/>
         </p:nvSpPr>
@@ -5413,14 +5566,14 @@
       </p:sp>
       <p:sp>
         <p:nvSpPr>
-          <p:cNvPr id="15" name="Text 13"/>
+          <p:cNvPr id="16" name="Text 14"/>
           <p:cNvSpPr/>
           <p:nvPr/>
         </p:nvSpPr>
         <p:spPr>
           <a:xfrm>
             <a:off x="8074152" y="3666744"/>
-            <a:ext cx="2825496" cy="201168"/>
+            <a:ext cx="2825496" cy="256032"/>
           </a:xfrm>
           <a:prstGeom prst="rect">
             <a:avLst/>
@@ -5436,7 +5589,7 @@
               <a:buNone/>
             </a:pPr>
             <a:r>
-              <a:rPr lang="en-US" sz="950" b="1" dirty="0">
+              <a:rPr lang="en-US" sz="1300" b="1" dirty="0">
                 <a:solidFill>
                   <a:srgbClr val="0068B7"/>
                 </a:solidFill>
@@ -5446,20 +5599,20 @@
               </a:rPr>
               <a:t>Use this for</a:t>
             </a:r>
-            <a:endParaRPr lang="en-US" sz="950" dirty="0"/>
-          </a:p>
-        </p:txBody>
-      </p:sp>
-      <p:sp>
-        <p:nvSpPr>
-          <p:cNvPr id="16" name="Text 14"/>
-          <p:cNvSpPr/>
-          <p:nvPr/>
-        </p:nvSpPr>
-        <p:spPr>
-          <a:xfrm>
-            <a:off x="8074152" y="3959352"/>
-            <a:ext cx="2825496" cy="1170432"/>
+            <a:endParaRPr lang="en-US" sz="1300" dirty="0"/>
+          </a:p>
+        </p:txBody>
+      </p:sp>
+      <p:sp>
+        <p:nvSpPr>
+          <p:cNvPr id="17" name="Text 15"/>
+          <p:cNvSpPr/>
+          <p:nvPr/>
+        </p:nvSpPr>
+        <p:spPr>
+          <a:xfrm>
+            <a:off x="8074152" y="4023360"/>
+            <a:ext cx="2825496" cy="1097280"/>
           </a:xfrm>
           <a:prstGeom prst="rect">
             <a:avLst/>
@@ -5477,7 +5630,7 @@
               <a:buNone/>
             </a:pPr>
             <a:r>
-              <a:rPr lang="en-US" sz="1250" dirty="0">
+              <a:rPr lang="en-US" sz="1550" dirty="0">
                 <a:solidFill>
                   <a:srgbClr val="17364A"/>
                 </a:solidFill>
@@ -5487,7 +5640,7 @@
               </a:rPr>
               <a:t>Connect the concept to public health decisions, safeguards, documentation, or implementation work.</a:t>
             </a:r>
-            <a:endParaRPr lang="en-US" sz="1250" dirty="0"/>
+            <a:endParaRPr lang="en-US" sz="1550" dirty="0"/>
           </a:p>
         </p:txBody>
       </p:sp>
@@ -5684,7 +5837,7 @@
                 <a:ea typeface="Aptos" pitchFamily="34" charset="-122"/>
                 <a:cs typeface="Aptos" pitchFamily="34" charset="-120"/>
               </a:rPr>
-              <a:t>© Paula Soper</a:t>
+              <a:t>Â© Paula Soper</a:t>
             </a:r>
             <a:endParaRPr lang="en-US" sz="800" dirty="0"/>
           </a:p>
@@ -5698,8 +5851,47 @@
         </p:nvSpPr>
         <p:spPr>
           <a:xfrm>
+            <a:off x="11137392" y="6510528"/>
+            <a:ext cx="411480" cy="201168"/>
+          </a:xfrm>
+          <a:prstGeom prst="rect">
+            <a:avLst/>
+          </a:prstGeom>
+          <a:noFill/>
+          <a:ln/>
+        </p:spPr>
+        <p:txBody>
+          <a:bodyPr wrap="square" lIns="0" tIns="0" rIns="0" bIns="0" rtlCol="0" anchor="ctr"/>
+          <a:lstStyle/>
+          <a:p>
+            <a:pPr algn="r" indent="0" marL="0">
+              <a:buNone/>
+            </a:pPr>
+            <a:r>
+              <a:rPr lang="en-US" sz="900" dirty="0">
+                <a:solidFill>
+                  <a:srgbClr val="5F7181"/>
+                </a:solidFill>
+                <a:latin typeface="Aptos" pitchFamily="34" charset="0"/>
+                <a:ea typeface="Aptos" pitchFamily="34" charset="-122"/>
+                <a:cs typeface="Aptos" pitchFamily="34" charset="-120"/>
+              </a:rPr>
+              <a:t>14</a:t>
+            </a:r>
+            <a:endParaRPr lang="en-US" sz="900" dirty="0"/>
+          </a:p>
+        </p:txBody>
+      </p:sp>
+      <p:sp>
+        <p:nvSpPr>
+          <p:cNvPr id="8" name="Text 6"/>
+          <p:cNvSpPr/>
+          <p:nvPr/>
+        </p:nvSpPr>
+        <p:spPr>
+          <a:xfrm>
             <a:off x="640080" y="658368"/>
-            <a:ext cx="10881360" cy="566928"/>
+            <a:ext cx="10881360" cy="713232"/>
           </a:xfrm>
           <a:prstGeom prst="rect">
             <a:avLst/>
@@ -5717,7 +5909,7 @@
               <a:buNone/>
             </a:pPr>
             <a:r>
-              <a:rPr lang="en-US" sz="2700" b="1" dirty="0">
+              <a:rPr lang="en-US" sz="3400" b="1" dirty="0">
                 <a:solidFill>
                   <a:srgbClr val="003A63"/>
                 </a:solidFill>
@@ -5727,20 +5919,20 @@
               </a:rPr>
               <a:t>Technical Deep Dive Continued</a:t>
             </a:r>
-            <a:endParaRPr lang="en-US" sz="2700" dirty="0"/>
-          </a:p>
-        </p:txBody>
-      </p:sp>
-      <p:sp>
-        <p:nvSpPr>
-          <p:cNvPr id="8" name="Text 6"/>
-          <p:cNvSpPr/>
-          <p:nvPr/>
-        </p:nvSpPr>
-        <p:spPr>
-          <a:xfrm>
-            <a:off x="868680" y="1417320"/>
-            <a:ext cx="6675120" cy="4434840"/>
+            <a:endParaRPr lang="en-US" sz="3400" dirty="0"/>
+          </a:p>
+        </p:txBody>
+      </p:sp>
+      <p:sp>
+        <p:nvSpPr>
+          <p:cNvPr id="9" name="Text 7"/>
+          <p:cNvSpPr/>
+          <p:nvPr/>
+        </p:nvSpPr>
+        <p:spPr>
+          <a:xfrm>
+            <a:off x="868680" y="1508760"/>
+            <a:ext cx="6537960" cy="4160520"/>
           </a:xfrm>
           <a:prstGeom prst="rect">
             <a:avLst/>
@@ -5755,7 +5947,7 @@
           <a:lstStyle/>
           <a:p>
             <a:r>
-              <a:rPr lang="en-US" sz="1700" dirty="0">
+              <a:rPr lang="en-US" sz="2100" dirty="0">
                 <a:solidFill>
                   <a:srgbClr val="17364A"/>
                 </a:solidFill>
@@ -5765,11 +5957,11 @@
               </a:rPr>
               <a:t>Privacy controls must also apply to outputs.</a:t>
             </a:r>
-            <a:endParaRPr lang="en-US" sz="1700" dirty="0"/>
-          </a:p>
-          <a:p>
-            <a:r>
-              <a:rPr lang="en-US" sz="1700" dirty="0">
+            <a:endParaRPr lang="en-US" sz="2100" dirty="0"/>
+          </a:p>
+          <a:p>
+            <a:r>
+              <a:rPr lang="en-US" sz="2100" dirty="0">
                 <a:solidFill>
                   <a:srgbClr val="17364A"/>
                 </a:solidFill>
@@ -5777,13 +5969,13 @@
                 <a:ea typeface="Aptos" pitchFamily="34" charset="-122"/>
                 <a:cs typeface="Aptos" pitchFamily="34" charset="-120"/>
               </a:rPr>
-              <a:t>An AI-generated summary, risk score, cluster report, or dashboard can reveal sensitive information even if the input data.</a:t>
-            </a:r>
-            <a:endParaRPr lang="en-US" sz="1700" dirty="0"/>
-          </a:p>
-          <a:p>
-            <a:r>
-              <a:rPr lang="en-US" sz="1700" dirty="0">
+              <a:t>An AI-generated summary, risk score, cluster report, or dashboard can reveal sensitive information even.</a:t>
+            </a:r>
+            <a:endParaRPr lang="en-US" sz="2100" dirty="0"/>
+          </a:p>
+          <a:p>
+            <a:r>
+              <a:rPr lang="en-US" sz="2100" dirty="0">
                 <a:solidFill>
                   <a:srgbClr val="17364A"/>
                 </a:solidFill>
@@ -5791,29 +5983,15 @@
                 <a:ea typeface="Aptos" pitchFamily="34" charset="-122"/>
                 <a:cs typeface="Aptos" pitchFamily="34" charset="-120"/>
               </a:rPr>
-              <a:t>Output review should consider small cells, unusual combinations of attributes, identifiable narratives, and unintended.</a:t>
-            </a:r>
-            <a:endParaRPr lang="en-US" sz="1700" dirty="0"/>
-          </a:p>
-          <a:p>
-            <a:r>
-              <a:rPr lang="en-US" sz="1700" dirty="0">
-                <a:solidFill>
-                  <a:srgbClr val="17364A"/>
-                </a:solidFill>
-                <a:latin typeface="Aptos" pitchFamily="34" charset="0"/>
-                <a:ea typeface="Aptos" pitchFamily="34" charset="-122"/>
-                <a:cs typeface="Aptos" pitchFamily="34" charset="-120"/>
-              </a:rPr>
-              <a:t>Logs should document who generated outputs, what data were used, and whether the output was shared, edited, rejected, or.</a:t>
-            </a:r>
-            <a:endParaRPr lang="en-US" sz="1700" dirty="0"/>
-          </a:p>
-        </p:txBody>
-      </p:sp>
-      <p:sp>
-        <p:nvSpPr>
-          <p:cNvPr id="9" name="Shape 7"/>
+              <a:t>Output review should consider small cells, unusual combinations of attributes, identifiable narratives,.</a:t>
+            </a:r>
+            <a:endParaRPr lang="en-US" sz="2100" dirty="0"/>
+          </a:p>
+        </p:txBody>
+      </p:sp>
+      <p:sp>
+        <p:nvSpPr>
+          <p:cNvPr id="10" name="Shape 8"/>
           <p:cNvSpPr/>
           <p:nvPr/>
         </p:nvSpPr>
@@ -5840,14 +6018,14 @@
       </p:sp>
       <p:sp>
         <p:nvSpPr>
-          <p:cNvPr id="10" name="Text 8"/>
+          <p:cNvPr id="11" name="Text 9"/>
           <p:cNvSpPr/>
           <p:nvPr/>
         </p:nvSpPr>
         <p:spPr>
           <a:xfrm>
             <a:off x="8074152" y="1563624"/>
-            <a:ext cx="2825496" cy="201168"/>
+            <a:ext cx="2825496" cy="256032"/>
           </a:xfrm>
           <a:prstGeom prst="rect">
             <a:avLst/>
@@ -5863,7 +6041,7 @@
               <a:buNone/>
             </a:pPr>
             <a:r>
-              <a:rPr lang="en-US" sz="950" b="1" dirty="0">
+              <a:rPr lang="en-US" sz="1300" b="1" dirty="0">
                 <a:solidFill>
                   <a:srgbClr val="0068B7"/>
                 </a:solidFill>
@@ -5873,20 +6051,20 @@
               </a:rPr>
               <a:t>Key idea</a:t>
             </a:r>
-            <a:endParaRPr lang="en-US" sz="950" dirty="0"/>
-          </a:p>
-        </p:txBody>
-      </p:sp>
-      <p:sp>
-        <p:nvSpPr>
-          <p:cNvPr id="11" name="Text 9"/>
-          <p:cNvSpPr/>
-          <p:nvPr/>
-        </p:nvSpPr>
-        <p:spPr>
-          <a:xfrm>
-            <a:off x="8074152" y="1856232"/>
-            <a:ext cx="2825496" cy="1261872"/>
+            <a:endParaRPr lang="en-US" sz="1300" dirty="0"/>
+          </a:p>
+        </p:txBody>
+      </p:sp>
+      <p:sp>
+        <p:nvSpPr>
+          <p:cNvPr id="12" name="Text 10"/>
+          <p:cNvSpPr/>
+          <p:nvPr/>
+        </p:nvSpPr>
+        <p:spPr>
+          <a:xfrm>
+            <a:off x="8074152" y="1920240"/>
+            <a:ext cx="2825496" cy="1188720"/>
           </a:xfrm>
           <a:prstGeom prst="rect">
             <a:avLst/>
@@ -5904,7 +6082,7 @@
               <a:buNone/>
             </a:pPr>
             <a:r>
-              <a:rPr lang="en-US" sz="1250" dirty="0">
+              <a:rPr lang="en-US" sz="1550" dirty="0">
                 <a:solidFill>
                   <a:srgbClr val="17364A"/>
                 </a:solidFill>
@@ -5914,13 +6092,13 @@
               </a:rPr>
               <a:t>Privacy controls must also apply to outputs.</a:t>
             </a:r>
-            <a:endParaRPr lang="en-US" sz="1250" dirty="0"/>
-          </a:p>
-        </p:txBody>
-      </p:sp>
-      <p:sp>
-        <p:nvSpPr>
-          <p:cNvPr id="12" name="Shape 10"/>
+            <a:endParaRPr lang="en-US" sz="1550" dirty="0"/>
+          </a:p>
+        </p:txBody>
+      </p:sp>
+      <p:sp>
+        <p:nvSpPr>
+          <p:cNvPr id="13" name="Shape 11"/>
           <p:cNvSpPr/>
           <p:nvPr/>
         </p:nvSpPr>
@@ -5947,14 +6125,14 @@
       </p:sp>
       <p:sp>
         <p:nvSpPr>
-          <p:cNvPr id="13" name="Text 11"/>
+          <p:cNvPr id="14" name="Text 12"/>
           <p:cNvSpPr/>
           <p:nvPr/>
         </p:nvSpPr>
         <p:spPr>
           <a:xfrm>
             <a:off x="8074152" y="3666744"/>
-            <a:ext cx="2825496" cy="201168"/>
+            <a:ext cx="2825496" cy="256032"/>
           </a:xfrm>
           <a:prstGeom prst="rect">
             <a:avLst/>
@@ -5970,7 +6148,7 @@
               <a:buNone/>
             </a:pPr>
             <a:r>
-              <a:rPr lang="en-US" sz="950" b="1" dirty="0">
+              <a:rPr lang="en-US" sz="1300" b="1" dirty="0">
                 <a:solidFill>
                   <a:srgbClr val="0068B7"/>
                 </a:solidFill>
@@ -5980,20 +6158,20 @@
               </a:rPr>
               <a:t>Use this for</a:t>
             </a:r>
-            <a:endParaRPr lang="en-US" sz="950" dirty="0"/>
-          </a:p>
-        </p:txBody>
-      </p:sp>
-      <p:sp>
-        <p:nvSpPr>
-          <p:cNvPr id="14" name="Text 12"/>
-          <p:cNvSpPr/>
-          <p:nvPr/>
-        </p:nvSpPr>
-        <p:spPr>
-          <a:xfrm>
-            <a:off x="8074152" y="3959352"/>
-            <a:ext cx="2825496" cy="1170432"/>
+            <a:endParaRPr lang="en-US" sz="1300" dirty="0"/>
+          </a:p>
+        </p:txBody>
+      </p:sp>
+      <p:sp>
+        <p:nvSpPr>
+          <p:cNvPr id="15" name="Text 13"/>
+          <p:cNvSpPr/>
+          <p:nvPr/>
+        </p:nvSpPr>
+        <p:spPr>
+          <a:xfrm>
+            <a:off x="8074152" y="4023360"/>
+            <a:ext cx="2825496" cy="1097280"/>
           </a:xfrm>
           <a:prstGeom prst="rect">
             <a:avLst/>
@@ -6011,7 +6189,7 @@
               <a:buNone/>
             </a:pPr>
             <a:r>
-              <a:rPr lang="en-US" sz="1250" dirty="0">
+              <a:rPr lang="en-US" sz="1550" dirty="0">
                 <a:solidFill>
                   <a:srgbClr val="17364A"/>
                 </a:solidFill>
@@ -6021,7 +6199,7 @@
               </a:rPr>
               <a:t>Connect the concept to public health decisions, safeguards, documentation, or implementation work.</a:t>
             </a:r>
-            <a:endParaRPr lang="en-US" sz="1250" dirty="0"/>
+            <a:endParaRPr lang="en-US" sz="1550" dirty="0"/>
           </a:p>
         </p:txBody>
       </p:sp>
@@ -6218,7 +6396,7 @@
                 <a:ea typeface="Aptos" pitchFamily="34" charset="-122"/>
                 <a:cs typeface="Aptos" pitchFamily="34" charset="-120"/>
               </a:rPr>
-              <a:t>© Paula Soper</a:t>
+              <a:t>Â© Paula Soper</a:t>
             </a:r>
             <a:endParaRPr lang="en-US" sz="800" dirty="0"/>
           </a:p>
@@ -6226,7 +6404,46 @@
       </p:sp>
       <p:sp>
         <p:nvSpPr>
-          <p:cNvPr id="7" name="Shape 5"/>
+          <p:cNvPr id="7" name="Text 5"/>
+          <p:cNvSpPr/>
+          <p:nvPr/>
+        </p:nvSpPr>
+        <p:spPr>
+          <a:xfrm>
+            <a:off x="11137392" y="6510528"/>
+            <a:ext cx="411480" cy="201168"/>
+          </a:xfrm>
+          <a:prstGeom prst="rect">
+            <a:avLst/>
+          </a:prstGeom>
+          <a:noFill/>
+          <a:ln/>
+        </p:spPr>
+        <p:txBody>
+          <a:bodyPr wrap="square" lIns="0" tIns="0" rIns="0" bIns="0" rtlCol="0" anchor="ctr"/>
+          <a:lstStyle/>
+          <a:p>
+            <a:pPr algn="r" indent="0" marL="0">
+              <a:buNone/>
+            </a:pPr>
+            <a:r>
+              <a:rPr lang="en-US" sz="900" dirty="0">
+                <a:solidFill>
+                  <a:srgbClr val="5F7181"/>
+                </a:solidFill>
+                <a:latin typeface="Aptos" pitchFamily="34" charset="0"/>
+                <a:ea typeface="Aptos" pitchFamily="34" charset="-122"/>
+                <a:cs typeface="Aptos" pitchFamily="34" charset="-120"/>
+              </a:rPr>
+              <a:t>15</a:t>
+            </a:r>
+            <a:endParaRPr lang="en-US" sz="900" dirty="0"/>
+          </a:p>
+        </p:txBody>
+      </p:sp>
+      <p:sp>
+        <p:nvSpPr>
+          <p:cNvPr id="8" name="Shape 6"/>
           <p:cNvSpPr/>
           <p:nvPr/>
         </p:nvSpPr>
@@ -6251,7 +6468,7 @@
       </p:sp>
       <p:sp>
         <p:nvSpPr>
-          <p:cNvPr id="8" name="Text 6"/>
+          <p:cNvPr id="9" name="Text 7"/>
           <p:cNvSpPr/>
           <p:nvPr/>
         </p:nvSpPr>
@@ -6290,14 +6507,14 @@
       </p:sp>
       <p:sp>
         <p:nvSpPr>
-          <p:cNvPr id="9" name="Text 7"/>
+          <p:cNvPr id="10" name="Text 8"/>
           <p:cNvSpPr/>
           <p:nvPr/>
         </p:nvSpPr>
         <p:spPr>
           <a:xfrm>
             <a:off x="640080" y="621792"/>
-            <a:ext cx="10881360" cy="566928"/>
+            <a:ext cx="10881360" cy="713232"/>
           </a:xfrm>
           <a:prstGeom prst="rect">
             <a:avLst/>
@@ -6315,7 +6532,7 @@
               <a:buNone/>
             </a:pPr>
             <a:r>
-              <a:rPr lang="en-US" sz="2700" b="1" dirty="0">
+              <a:rPr lang="en-US" sz="3400" b="1" dirty="0">
                 <a:solidFill>
                   <a:srgbClr val="003A63"/>
                 </a:solidFill>
@@ -6325,20 +6542,20 @@
               </a:rPr>
               <a:t>Risks, Failure Modes, and Guardrails</a:t>
             </a:r>
-            <a:endParaRPr lang="en-US" sz="2700" dirty="0"/>
-          </a:p>
-        </p:txBody>
-      </p:sp>
-      <p:sp>
-        <p:nvSpPr>
-          <p:cNvPr id="10" name="Text 8"/>
-          <p:cNvSpPr/>
-          <p:nvPr/>
-        </p:nvSpPr>
-        <p:spPr>
-          <a:xfrm>
-            <a:off x="868680" y="1417320"/>
-            <a:ext cx="6675120" cy="4434840"/>
+            <a:endParaRPr lang="en-US" sz="3400" dirty="0"/>
+          </a:p>
+        </p:txBody>
+      </p:sp>
+      <p:sp>
+        <p:nvSpPr>
+          <p:cNvPr id="11" name="Text 9"/>
+          <p:cNvSpPr/>
+          <p:nvPr/>
+        </p:nvSpPr>
+        <p:spPr>
+          <a:xfrm>
+            <a:off x="868680" y="1508760"/>
+            <a:ext cx="6537960" cy="4160520"/>
           </a:xfrm>
           <a:prstGeom prst="rect">
             <a:avLst/>
@@ -6353,7 +6570,7 @@
           <a:lstStyle/>
           <a:p>
             <a:r>
-              <a:rPr lang="en-US" sz="1700" dirty="0">
+              <a:rPr lang="en-US" sz="2100" dirty="0">
                 <a:solidFill>
                   <a:srgbClr val="17364A"/>
                 </a:solidFill>
@@ -6363,11 +6580,11 @@
               </a:rPr>
               <a:t>A major failure mode is assuming that de-identification is permanent.</a:t>
             </a:r>
-            <a:endParaRPr lang="en-US" sz="1700" dirty="0"/>
-          </a:p>
-          <a:p>
-            <a:r>
-              <a:rPr lang="en-US" sz="1700" dirty="0">
+            <a:endParaRPr lang="en-US" sz="2100" dirty="0"/>
+          </a:p>
+          <a:p>
+            <a:r>
+              <a:rPr lang="en-US" sz="2100" dirty="0">
                 <a:solidFill>
                   <a:srgbClr val="17364A"/>
                 </a:solidFill>
@@ -6375,13 +6592,13 @@
                 <a:ea typeface="Aptos" pitchFamily="34" charset="-122"/>
                 <a:cs typeface="Aptos" pitchFamily="34" charset="-120"/>
               </a:rPr>
-              <a:t>Data that are de-identified for one purpose may be re-identifiable in another context, especially when linked with other.</a:t>
-            </a:r>
-            <a:endParaRPr lang="en-US" sz="1700" dirty="0"/>
-          </a:p>
-          <a:p>
-            <a:r>
-              <a:rPr lang="en-US" sz="1700" dirty="0">
+              <a:t>Data that are de-identified for one purpose may be re-identifiable in another context, especially when.</a:t>
+            </a:r>
+            <a:endParaRPr lang="en-US" sz="2100" dirty="0"/>
+          </a:p>
+          <a:p>
+            <a:r>
+              <a:rPr lang="en-US" sz="2100" dirty="0">
                 <a:solidFill>
                   <a:srgbClr val="17364A"/>
                 </a:solidFill>
@@ -6389,29 +6606,15 @@
                 <a:ea typeface="Aptos" pitchFamily="34" charset="-122"/>
                 <a:cs typeface="Aptos" pitchFamily="34" charset="-120"/>
               </a:rPr>
-              <a:t>A guardrail is to perform use-case-specific privacy review and to document assumptions about data linkage, audience,.</a:t>
-            </a:r>
-            <a:endParaRPr lang="en-US" sz="1700" dirty="0"/>
-          </a:p>
-          <a:p>
-            <a:r>
-              <a:rPr lang="en-US" sz="1700" dirty="0">
-                <a:solidFill>
-                  <a:srgbClr val="17364A"/>
-                </a:solidFill>
-                <a:latin typeface="Aptos" pitchFamily="34" charset="0"/>
-                <a:ea typeface="Aptos" pitchFamily="34" charset="-122"/>
-                <a:cs typeface="Aptos" pitchFamily="34" charset="-120"/>
-              </a:rPr>
-              <a:t>Another failure mode is exposing sensitive data to unapproved AI tools.</a:t>
-            </a:r>
-            <a:endParaRPr lang="en-US" sz="1700" dirty="0"/>
-          </a:p>
-        </p:txBody>
-      </p:sp>
-      <p:sp>
-        <p:nvSpPr>
-          <p:cNvPr id="11" name="Shape 9"/>
+              <a:t>A guardrail is to perform use-case-specific privacy review and to document assumptions about data.</a:t>
+            </a:r>
+            <a:endParaRPr lang="en-US" sz="2100" dirty="0"/>
+          </a:p>
+        </p:txBody>
+      </p:sp>
+      <p:sp>
+        <p:nvSpPr>
+          <p:cNvPr id="12" name="Shape 10"/>
           <p:cNvSpPr/>
           <p:nvPr/>
         </p:nvSpPr>
@@ -6438,14 +6641,14 @@
       </p:sp>
       <p:sp>
         <p:nvSpPr>
-          <p:cNvPr id="12" name="Text 10"/>
+          <p:cNvPr id="13" name="Text 11"/>
           <p:cNvSpPr/>
           <p:nvPr/>
         </p:nvSpPr>
         <p:spPr>
           <a:xfrm>
             <a:off x="8074152" y="1563624"/>
-            <a:ext cx="2825496" cy="201168"/>
+            <a:ext cx="2825496" cy="256032"/>
           </a:xfrm>
           <a:prstGeom prst="rect">
             <a:avLst/>
@@ -6461,7 +6664,7 @@
               <a:buNone/>
             </a:pPr>
             <a:r>
-              <a:rPr lang="en-US" sz="950" b="1" dirty="0">
+              <a:rPr lang="en-US" sz="1300" b="1" dirty="0">
                 <a:solidFill>
                   <a:srgbClr val="0068B7"/>
                 </a:solidFill>
@@ -6471,20 +6674,20 @@
               </a:rPr>
               <a:t>Key idea</a:t>
             </a:r>
-            <a:endParaRPr lang="en-US" sz="950" dirty="0"/>
-          </a:p>
-        </p:txBody>
-      </p:sp>
-      <p:sp>
-        <p:nvSpPr>
-          <p:cNvPr id="13" name="Text 11"/>
-          <p:cNvSpPr/>
-          <p:nvPr/>
-        </p:nvSpPr>
-        <p:spPr>
-          <a:xfrm>
-            <a:off x="8074152" y="1856232"/>
-            <a:ext cx="2825496" cy="1261872"/>
+            <a:endParaRPr lang="en-US" sz="1300" dirty="0"/>
+          </a:p>
+        </p:txBody>
+      </p:sp>
+      <p:sp>
+        <p:nvSpPr>
+          <p:cNvPr id="14" name="Text 12"/>
+          <p:cNvSpPr/>
+          <p:nvPr/>
+        </p:nvSpPr>
+        <p:spPr>
+          <a:xfrm>
+            <a:off x="8074152" y="1920240"/>
+            <a:ext cx="2825496" cy="1188720"/>
           </a:xfrm>
           <a:prstGeom prst="rect">
             <a:avLst/>
@@ -6502,7 +6705,7 @@
               <a:buNone/>
             </a:pPr>
             <a:r>
-              <a:rPr lang="en-US" sz="1250" dirty="0">
+              <a:rPr lang="en-US" sz="1550" dirty="0">
                 <a:solidFill>
                   <a:srgbClr val="17364A"/>
                 </a:solidFill>
@@ -6512,13 +6715,13 @@
               </a:rPr>
               <a:t>A major failure mode is assuming that de-identification is permanent.</a:t>
             </a:r>
-            <a:endParaRPr lang="en-US" sz="1250" dirty="0"/>
-          </a:p>
-        </p:txBody>
-      </p:sp>
-      <p:sp>
-        <p:nvSpPr>
-          <p:cNvPr id="14" name="Shape 12"/>
+            <a:endParaRPr lang="en-US" sz="1550" dirty="0"/>
+          </a:p>
+        </p:txBody>
+      </p:sp>
+      <p:sp>
+        <p:nvSpPr>
+          <p:cNvPr id="15" name="Shape 13"/>
           <p:cNvSpPr/>
           <p:nvPr/>
         </p:nvSpPr>
@@ -6545,14 +6748,14 @@
       </p:sp>
       <p:sp>
         <p:nvSpPr>
-          <p:cNvPr id="15" name="Text 13"/>
+          <p:cNvPr id="16" name="Text 14"/>
           <p:cNvSpPr/>
           <p:nvPr/>
         </p:nvSpPr>
         <p:spPr>
           <a:xfrm>
             <a:off x="8074152" y="3666744"/>
-            <a:ext cx="2825496" cy="201168"/>
+            <a:ext cx="2825496" cy="256032"/>
           </a:xfrm>
           <a:prstGeom prst="rect">
             <a:avLst/>
@@ -6568,7 +6771,7 @@
               <a:buNone/>
             </a:pPr>
             <a:r>
-              <a:rPr lang="en-US" sz="950" b="1" dirty="0">
+              <a:rPr lang="en-US" sz="1300" b="1" dirty="0">
                 <a:solidFill>
                   <a:srgbClr val="0068B7"/>
                 </a:solidFill>
@@ -6578,20 +6781,20 @@
               </a:rPr>
               <a:t>Use this for</a:t>
             </a:r>
-            <a:endParaRPr lang="en-US" sz="950" dirty="0"/>
-          </a:p>
-        </p:txBody>
-      </p:sp>
-      <p:sp>
-        <p:nvSpPr>
-          <p:cNvPr id="16" name="Text 14"/>
-          <p:cNvSpPr/>
-          <p:nvPr/>
-        </p:nvSpPr>
-        <p:spPr>
-          <a:xfrm>
-            <a:off x="8074152" y="3959352"/>
-            <a:ext cx="2825496" cy="1170432"/>
+            <a:endParaRPr lang="en-US" sz="1300" dirty="0"/>
+          </a:p>
+        </p:txBody>
+      </p:sp>
+      <p:sp>
+        <p:nvSpPr>
+          <p:cNvPr id="17" name="Text 15"/>
+          <p:cNvSpPr/>
+          <p:nvPr/>
+        </p:nvSpPr>
+        <p:spPr>
+          <a:xfrm>
+            <a:off x="8074152" y="4023360"/>
+            <a:ext cx="2825496" cy="1097280"/>
           </a:xfrm>
           <a:prstGeom prst="rect">
             <a:avLst/>
@@ -6609,7 +6812,7 @@
               <a:buNone/>
             </a:pPr>
             <a:r>
-              <a:rPr lang="en-US" sz="1250" dirty="0">
+              <a:rPr lang="en-US" sz="1550" dirty="0">
                 <a:solidFill>
                   <a:srgbClr val="17364A"/>
                 </a:solidFill>
@@ -6619,7 +6822,7 @@
               </a:rPr>
               <a:t>Connect the concept to public health decisions, safeguards, documentation, or implementation work.</a:t>
             </a:r>
-            <a:endParaRPr lang="en-US" sz="1250" dirty="0"/>
+            <a:endParaRPr lang="en-US" sz="1550" dirty="0"/>
           </a:p>
         </p:txBody>
       </p:sp>
@@ -6816,7 +7019,7 @@
                 <a:ea typeface="Aptos" pitchFamily="34" charset="-122"/>
                 <a:cs typeface="Aptos" pitchFamily="34" charset="-120"/>
               </a:rPr>
-              <a:t>© Paula Soper</a:t>
+              <a:t>Â© Paula Soper</a:t>
             </a:r>
             <a:endParaRPr lang="en-US" sz="800" dirty="0"/>
           </a:p>
@@ -6830,8 +7033,47 @@
         </p:nvSpPr>
         <p:spPr>
           <a:xfrm>
+            <a:off x="11137392" y="6510528"/>
+            <a:ext cx="411480" cy="201168"/>
+          </a:xfrm>
+          <a:prstGeom prst="rect">
+            <a:avLst/>
+          </a:prstGeom>
+          <a:noFill/>
+          <a:ln/>
+        </p:spPr>
+        <p:txBody>
+          <a:bodyPr wrap="square" lIns="0" tIns="0" rIns="0" bIns="0" rtlCol="0" anchor="ctr"/>
+          <a:lstStyle/>
+          <a:p>
+            <a:pPr algn="r" indent="0" marL="0">
+              <a:buNone/>
+            </a:pPr>
+            <a:r>
+              <a:rPr lang="en-US" sz="900" dirty="0">
+                <a:solidFill>
+                  <a:srgbClr val="5F7181"/>
+                </a:solidFill>
+                <a:latin typeface="Aptos" pitchFamily="34" charset="0"/>
+                <a:ea typeface="Aptos" pitchFamily="34" charset="-122"/>
+                <a:cs typeface="Aptos" pitchFamily="34" charset="-120"/>
+              </a:rPr>
+              <a:t>16</a:t>
+            </a:r>
+            <a:endParaRPr lang="en-US" sz="900" dirty="0"/>
+          </a:p>
+        </p:txBody>
+      </p:sp>
+      <p:sp>
+        <p:nvSpPr>
+          <p:cNvPr id="8" name="Text 6"/>
+          <p:cNvSpPr/>
+          <p:nvPr/>
+        </p:nvSpPr>
+        <p:spPr>
+          <a:xfrm>
             <a:off x="640080" y="658368"/>
-            <a:ext cx="10881360" cy="566928"/>
+            <a:ext cx="10881360" cy="713232"/>
           </a:xfrm>
           <a:prstGeom prst="rect">
             <a:avLst/>
@@ -6849,7 +7091,7 @@
               <a:buNone/>
             </a:pPr>
             <a:r>
-              <a:rPr lang="en-US" sz="2700" b="1" dirty="0">
+              <a:rPr lang="en-US" sz="3400" b="1" dirty="0">
                 <a:solidFill>
                   <a:srgbClr val="003A63"/>
                 </a:solidFill>
@@ -6859,20 +7101,20 @@
               </a:rPr>
               <a:t>Risks, Failure Modes, and Guardrails Continued</a:t>
             </a:r>
-            <a:endParaRPr lang="en-US" sz="2700" dirty="0"/>
-          </a:p>
-        </p:txBody>
-      </p:sp>
-      <p:sp>
-        <p:nvSpPr>
-          <p:cNvPr id="8" name="Text 6"/>
-          <p:cNvSpPr/>
-          <p:nvPr/>
-        </p:nvSpPr>
-        <p:spPr>
-          <a:xfrm>
-            <a:off x="868680" y="1417320"/>
-            <a:ext cx="6675120" cy="4434840"/>
+            <a:endParaRPr lang="en-US" sz="3400" dirty="0"/>
+          </a:p>
+        </p:txBody>
+      </p:sp>
+      <p:sp>
+        <p:nvSpPr>
+          <p:cNvPr id="9" name="Text 7"/>
+          <p:cNvSpPr/>
+          <p:nvPr/>
+        </p:nvSpPr>
+        <p:spPr>
+          <a:xfrm>
+            <a:off x="868680" y="1508760"/>
+            <a:ext cx="6537960" cy="4160520"/>
           </a:xfrm>
           <a:prstGeom prst="rect">
             <a:avLst/>
@@ -6887,7 +7129,7 @@
           <a:lstStyle/>
           <a:p>
             <a:r>
-              <a:rPr lang="en-US" sz="1700" dirty="0">
+              <a:rPr lang="en-US" sz="2100" dirty="0">
                 <a:solidFill>
                   <a:srgbClr val="17364A"/>
                 </a:solidFill>
@@ -6897,11 +7139,11 @@
               </a:rPr>
               <a:t>Privacy risk can also arise from vendor relationships.</a:t>
             </a:r>
-            <a:endParaRPr lang="en-US" sz="1700" dirty="0"/>
-          </a:p>
-          <a:p>
-            <a:r>
-              <a:rPr lang="en-US" sz="1700" dirty="0">
+            <a:endParaRPr lang="en-US" sz="2100" dirty="0"/>
+          </a:p>
+          <a:p>
+            <a:r>
+              <a:rPr lang="en-US" sz="2100" dirty="0">
                 <a:solidFill>
                   <a:srgbClr val="17364A"/>
                 </a:solidFill>
@@ -6911,11 +7153,11 @@
               </a:rPr>
               <a:t>Vendors may request sample data for testing or model tuning.</a:t>
             </a:r>
-            <a:endParaRPr lang="en-US" sz="1700" dirty="0"/>
-          </a:p>
-          <a:p>
-            <a:r>
-              <a:rPr lang="en-US" sz="1700" dirty="0">
+            <a:endParaRPr lang="en-US" sz="2100" dirty="0"/>
+          </a:p>
+          <a:p>
+            <a:r>
+              <a:rPr lang="en-US" sz="2100" dirty="0">
                 <a:solidFill>
                   <a:srgbClr val="17364A"/>
                 </a:solidFill>
@@ -6923,15 +7165,15 @@
                 <a:ea typeface="Aptos" pitchFamily="34" charset="-122"/>
                 <a:cs typeface="Aptos" pitchFamily="34" charset="-120"/>
               </a:rPr>
-              <a:t>Agencies should use synthetic, masked, or minimized data whenever possible and should require contractual controls for.</a:t>
-            </a:r>
-            <a:endParaRPr lang="en-US" sz="1700" dirty="0"/>
-          </a:p>
-        </p:txBody>
-      </p:sp>
-      <p:sp>
-        <p:nvSpPr>
-          <p:cNvPr id="9" name="Shape 7"/>
+              <a:t>Agencies should use synthetic, masked, or minimized data whenever possible and should require.</a:t>
+            </a:r>
+            <a:endParaRPr lang="en-US" sz="2100" dirty="0"/>
+          </a:p>
+        </p:txBody>
+      </p:sp>
+      <p:sp>
+        <p:nvSpPr>
+          <p:cNvPr id="10" name="Shape 8"/>
           <p:cNvSpPr/>
           <p:nvPr/>
         </p:nvSpPr>
@@ -6958,14 +7200,14 @@
       </p:sp>
       <p:sp>
         <p:nvSpPr>
-          <p:cNvPr id="10" name="Text 8"/>
+          <p:cNvPr id="11" name="Text 9"/>
           <p:cNvSpPr/>
           <p:nvPr/>
         </p:nvSpPr>
         <p:spPr>
           <a:xfrm>
             <a:off x="8074152" y="1563624"/>
-            <a:ext cx="2825496" cy="201168"/>
+            <a:ext cx="2825496" cy="256032"/>
           </a:xfrm>
           <a:prstGeom prst="rect">
             <a:avLst/>
@@ -6981,7 +7223,7 @@
               <a:buNone/>
             </a:pPr>
             <a:r>
-              <a:rPr lang="en-US" sz="950" b="1" dirty="0">
+              <a:rPr lang="en-US" sz="1300" b="1" dirty="0">
                 <a:solidFill>
                   <a:srgbClr val="0068B7"/>
                 </a:solidFill>
@@ -6991,20 +7233,20 @@
               </a:rPr>
               <a:t>Key idea</a:t>
             </a:r>
-            <a:endParaRPr lang="en-US" sz="950" dirty="0"/>
-          </a:p>
-        </p:txBody>
-      </p:sp>
-      <p:sp>
-        <p:nvSpPr>
-          <p:cNvPr id="11" name="Text 9"/>
-          <p:cNvSpPr/>
-          <p:nvPr/>
-        </p:nvSpPr>
-        <p:spPr>
-          <a:xfrm>
-            <a:off x="8074152" y="1856232"/>
-            <a:ext cx="2825496" cy="1261872"/>
+            <a:endParaRPr lang="en-US" sz="1300" dirty="0"/>
+          </a:p>
+        </p:txBody>
+      </p:sp>
+      <p:sp>
+        <p:nvSpPr>
+          <p:cNvPr id="12" name="Text 10"/>
+          <p:cNvSpPr/>
+          <p:nvPr/>
+        </p:nvSpPr>
+        <p:spPr>
+          <a:xfrm>
+            <a:off x="8074152" y="1920240"/>
+            <a:ext cx="2825496" cy="1188720"/>
           </a:xfrm>
           <a:prstGeom prst="rect">
             <a:avLst/>
@@ -7022,7 +7264,7 @@
               <a:buNone/>
             </a:pPr>
             <a:r>
-              <a:rPr lang="en-US" sz="1250" dirty="0">
+              <a:rPr lang="en-US" sz="1550" dirty="0">
                 <a:solidFill>
                   <a:srgbClr val="17364A"/>
                 </a:solidFill>
@@ -7032,13 +7274,13 @@
               </a:rPr>
               <a:t>Privacy risk can also arise from vendor relationships.</a:t>
             </a:r>
-            <a:endParaRPr lang="en-US" sz="1250" dirty="0"/>
-          </a:p>
-        </p:txBody>
-      </p:sp>
-      <p:sp>
-        <p:nvSpPr>
-          <p:cNvPr id="12" name="Shape 10"/>
+            <a:endParaRPr lang="en-US" sz="1550" dirty="0"/>
+          </a:p>
+        </p:txBody>
+      </p:sp>
+      <p:sp>
+        <p:nvSpPr>
+          <p:cNvPr id="13" name="Shape 11"/>
           <p:cNvSpPr/>
           <p:nvPr/>
         </p:nvSpPr>
@@ -7065,14 +7307,14 @@
       </p:sp>
       <p:sp>
         <p:nvSpPr>
-          <p:cNvPr id="13" name="Text 11"/>
+          <p:cNvPr id="14" name="Text 12"/>
           <p:cNvSpPr/>
           <p:nvPr/>
         </p:nvSpPr>
         <p:spPr>
           <a:xfrm>
             <a:off x="8074152" y="3666744"/>
-            <a:ext cx="2825496" cy="201168"/>
+            <a:ext cx="2825496" cy="256032"/>
           </a:xfrm>
           <a:prstGeom prst="rect">
             <a:avLst/>
@@ -7088,7 +7330,7 @@
               <a:buNone/>
             </a:pPr>
             <a:r>
-              <a:rPr lang="en-US" sz="950" b="1" dirty="0">
+              <a:rPr lang="en-US" sz="1300" b="1" dirty="0">
                 <a:solidFill>
                   <a:srgbClr val="0068B7"/>
                 </a:solidFill>
@@ -7098,20 +7340,20 @@
               </a:rPr>
               <a:t>Use this for</a:t>
             </a:r>
-            <a:endParaRPr lang="en-US" sz="950" dirty="0"/>
-          </a:p>
-        </p:txBody>
-      </p:sp>
-      <p:sp>
-        <p:nvSpPr>
-          <p:cNvPr id="14" name="Text 12"/>
-          <p:cNvSpPr/>
-          <p:nvPr/>
-        </p:nvSpPr>
-        <p:spPr>
-          <a:xfrm>
-            <a:off x="8074152" y="3959352"/>
-            <a:ext cx="2825496" cy="1170432"/>
+            <a:endParaRPr lang="en-US" sz="1300" dirty="0"/>
+          </a:p>
+        </p:txBody>
+      </p:sp>
+      <p:sp>
+        <p:nvSpPr>
+          <p:cNvPr id="15" name="Text 13"/>
+          <p:cNvSpPr/>
+          <p:nvPr/>
+        </p:nvSpPr>
+        <p:spPr>
+          <a:xfrm>
+            <a:off x="8074152" y="4023360"/>
+            <a:ext cx="2825496" cy="1097280"/>
           </a:xfrm>
           <a:prstGeom prst="rect">
             <a:avLst/>
@@ -7129,7 +7371,7 @@
               <a:buNone/>
             </a:pPr>
             <a:r>
-              <a:rPr lang="en-US" sz="1250" dirty="0">
+              <a:rPr lang="en-US" sz="1550" dirty="0">
                 <a:solidFill>
                   <a:srgbClr val="17364A"/>
                 </a:solidFill>
@@ -7139,7 +7381,7 @@
               </a:rPr>
               <a:t>Connect the concept to public health decisions, safeguards, documentation, or implementation work.</a:t>
             </a:r>
-            <a:endParaRPr lang="en-US" sz="1250" dirty="0"/>
+            <a:endParaRPr lang="en-US" sz="1550" dirty="0"/>
           </a:p>
         </p:txBody>
       </p:sp>
@@ -7336,7 +7578,7 @@
                 <a:ea typeface="Aptos" pitchFamily="34" charset="-122"/>
                 <a:cs typeface="Aptos" pitchFamily="34" charset="-120"/>
               </a:rPr>
-              <a:t>© Paula Soper</a:t>
+              <a:t>Â© Paula Soper</a:t>
             </a:r>
             <a:endParaRPr lang="en-US" sz="800" dirty="0"/>
           </a:p>
@@ -7344,7 +7586,46 @@
       </p:sp>
       <p:sp>
         <p:nvSpPr>
-          <p:cNvPr id="7" name="Shape 5"/>
+          <p:cNvPr id="7" name="Text 5"/>
+          <p:cNvSpPr/>
+          <p:nvPr/>
+        </p:nvSpPr>
+        <p:spPr>
+          <a:xfrm>
+            <a:off x="11137392" y="6510528"/>
+            <a:ext cx="411480" cy="201168"/>
+          </a:xfrm>
+          <a:prstGeom prst="rect">
+            <a:avLst/>
+          </a:prstGeom>
+          <a:noFill/>
+          <a:ln/>
+        </p:spPr>
+        <p:txBody>
+          <a:bodyPr wrap="square" lIns="0" tIns="0" rIns="0" bIns="0" rtlCol="0" anchor="ctr"/>
+          <a:lstStyle/>
+          <a:p>
+            <a:pPr algn="r" indent="0" marL="0">
+              <a:buNone/>
+            </a:pPr>
+            <a:r>
+              <a:rPr lang="en-US" sz="900" dirty="0">
+                <a:solidFill>
+                  <a:srgbClr val="5F7181"/>
+                </a:solidFill>
+                <a:latin typeface="Aptos" pitchFamily="34" charset="0"/>
+                <a:ea typeface="Aptos" pitchFamily="34" charset="-122"/>
+                <a:cs typeface="Aptos" pitchFamily="34" charset="-120"/>
+              </a:rPr>
+              <a:t>17</a:t>
+            </a:r>
+            <a:endParaRPr lang="en-US" sz="900" dirty="0"/>
+          </a:p>
+        </p:txBody>
+      </p:sp>
+      <p:sp>
+        <p:nvSpPr>
+          <p:cNvPr id="8" name="Shape 6"/>
           <p:cNvSpPr/>
           <p:nvPr/>
         </p:nvSpPr>
@@ -7369,7 +7650,7 @@
       </p:sp>
       <p:sp>
         <p:nvSpPr>
-          <p:cNvPr id="8" name="Text 6"/>
+          <p:cNvPr id="9" name="Text 7"/>
           <p:cNvSpPr/>
           <p:nvPr/>
         </p:nvSpPr>
@@ -7408,14 +7689,14 @@
       </p:sp>
       <p:sp>
         <p:nvSpPr>
-          <p:cNvPr id="9" name="Text 7"/>
+          <p:cNvPr id="10" name="Text 8"/>
           <p:cNvSpPr/>
           <p:nvPr/>
         </p:nvSpPr>
         <p:spPr>
           <a:xfrm>
             <a:off x="640080" y="621792"/>
-            <a:ext cx="10881360" cy="566928"/>
+            <a:ext cx="10881360" cy="713232"/>
           </a:xfrm>
           <a:prstGeom prst="rect">
             <a:avLst/>
@@ -7433,7 +7714,7 @@
               <a:buNone/>
             </a:pPr>
             <a:r>
-              <a:rPr lang="en-US" sz="2700" b="1" dirty="0">
+              <a:rPr lang="en-US" sz="3400" b="1" dirty="0">
                 <a:solidFill>
                   <a:srgbClr val="003A63"/>
                 </a:solidFill>
@@ -7443,20 +7724,20 @@
               </a:rPr>
               <a:t>Application to AI-Supported Workflows</a:t>
             </a:r>
-            <a:endParaRPr lang="en-US" sz="2700" dirty="0"/>
-          </a:p>
-        </p:txBody>
-      </p:sp>
-      <p:sp>
-        <p:nvSpPr>
-          <p:cNvPr id="10" name="Text 8"/>
-          <p:cNvSpPr/>
-          <p:nvPr/>
-        </p:nvSpPr>
-        <p:spPr>
-          <a:xfrm>
-            <a:off x="868680" y="1417320"/>
-            <a:ext cx="6675120" cy="4434840"/>
+            <a:endParaRPr lang="en-US" sz="3400" dirty="0"/>
+          </a:p>
+        </p:txBody>
+      </p:sp>
+      <p:sp>
+        <p:nvSpPr>
+          <p:cNvPr id="11" name="Text 9"/>
+          <p:cNvSpPr/>
+          <p:nvPr/>
+        </p:nvSpPr>
+        <p:spPr>
+          <a:xfrm>
+            <a:off x="868680" y="1508760"/>
+            <a:ext cx="6537960" cy="4160520"/>
           </a:xfrm>
           <a:prstGeom prst="rect">
             <a:avLst/>
@@ -7471,7 +7752,7 @@
           <a:lstStyle/>
           <a:p>
             <a:r>
-              <a:rPr lang="en-US" sz="1700" dirty="0">
+              <a:rPr lang="en-US" sz="2100" dirty="0">
                 <a:solidFill>
                   <a:srgbClr val="17364A"/>
                 </a:solidFill>
@@ -7479,13 +7760,13 @@
                 <a:ea typeface="Aptos" pitchFamily="34" charset="-122"/>
                 <a:cs typeface="Aptos" pitchFamily="34" charset="-120"/>
               </a:rPr>
-              <a:t>For generative AI, privacy-preserving design means controlling what data can be placed in prompts, what source documents.</a:t>
-            </a:r>
-            <a:endParaRPr lang="en-US" sz="1700" dirty="0"/>
-          </a:p>
-          <a:p>
-            <a:r>
-              <a:rPr lang="en-US" sz="1700" dirty="0">
+              <a:t>For generative AI, privacy-preserving design means controlling what data can be placed in prompts, what.</a:t>
+            </a:r>
+            <a:endParaRPr lang="en-US" sz="2100" dirty="0"/>
+          </a:p>
+          <a:p>
+            <a:r>
+              <a:rPr lang="en-US" sz="2100" dirty="0">
                 <a:solidFill>
                   <a:srgbClr val="17364A"/>
                 </a:solidFill>
@@ -7493,13 +7774,13 @@
                 <a:ea typeface="Aptos" pitchFamily="34" charset="-122"/>
                 <a:cs typeface="Aptos" pitchFamily="34" charset="-120"/>
               </a:rPr>
-              <a:t>Prompt templates should make prohibited content clear and should encourage use of de-identified or aggregated inputs when.</a:t>
-            </a:r>
-            <a:endParaRPr lang="en-US" sz="1700" dirty="0"/>
-          </a:p>
-          <a:p>
-            <a:r>
-              <a:rPr lang="en-US" sz="1700" dirty="0">
+              <a:t>Prompt templates should make prohibited content clear and should encourage use of de-identified or.</a:t>
+            </a:r>
+            <a:endParaRPr lang="en-US" sz="2100" dirty="0"/>
+          </a:p>
+          <a:p>
+            <a:r>
+              <a:rPr lang="en-US" sz="2100" dirty="0">
                 <a:solidFill>
                   <a:srgbClr val="17364A"/>
                 </a:solidFill>
@@ -7507,29 +7788,15 @@
                 <a:ea typeface="Aptos" pitchFamily="34" charset="-122"/>
                 <a:cs typeface="Aptos" pitchFamily="34" charset="-120"/>
               </a:rPr>
-              <a:t>For predictive analytics, privacy concerns include which features are used, whether sensitive attributes are directly.</a:t>
-            </a:r>
-            <a:endParaRPr lang="en-US" sz="1700" dirty="0"/>
-          </a:p>
-          <a:p>
-            <a:r>
-              <a:rPr lang="en-US" sz="1700" dirty="0">
-                <a:solidFill>
-                  <a:srgbClr val="17364A"/>
-                </a:solidFill>
-                <a:latin typeface="Aptos" pitchFamily="34" charset="0"/>
-                <a:ea typeface="Aptos" pitchFamily="34" charset="-122"/>
-                <a:cs typeface="Aptos" pitchFamily="34" charset="-120"/>
-              </a:rPr>
-              <a:t>Model evaluation should include privacy review as well as accuracy and equity review.</a:t>
-            </a:r>
-            <a:endParaRPr lang="en-US" sz="1700" dirty="0"/>
-          </a:p>
-        </p:txBody>
-      </p:sp>
-      <p:sp>
-        <p:nvSpPr>
-          <p:cNvPr id="11" name="Shape 9"/>
+              <a:t>For predictive analytics, privacy concerns include which features are used, whether sensitive.</a:t>
+            </a:r>
+            <a:endParaRPr lang="en-US" sz="2100" dirty="0"/>
+          </a:p>
+        </p:txBody>
+      </p:sp>
+      <p:sp>
+        <p:nvSpPr>
+          <p:cNvPr id="12" name="Shape 10"/>
           <p:cNvSpPr/>
           <p:nvPr/>
         </p:nvSpPr>
@@ -7556,14 +7823,14 @@
       </p:sp>
       <p:sp>
         <p:nvSpPr>
-          <p:cNvPr id="12" name="Text 10"/>
+          <p:cNvPr id="13" name="Text 11"/>
           <p:cNvSpPr/>
           <p:nvPr/>
         </p:nvSpPr>
         <p:spPr>
           <a:xfrm>
             <a:off x="8074152" y="1563624"/>
-            <a:ext cx="2825496" cy="201168"/>
+            <a:ext cx="2825496" cy="256032"/>
           </a:xfrm>
           <a:prstGeom prst="rect">
             <a:avLst/>
@@ -7579,7 +7846,7 @@
               <a:buNone/>
             </a:pPr>
             <a:r>
-              <a:rPr lang="en-US" sz="950" b="1" dirty="0">
+              <a:rPr lang="en-US" sz="1300" b="1" dirty="0">
                 <a:solidFill>
                   <a:srgbClr val="0068B7"/>
                 </a:solidFill>
@@ -7589,20 +7856,20 @@
               </a:rPr>
               <a:t>Key idea</a:t>
             </a:r>
-            <a:endParaRPr lang="en-US" sz="950" dirty="0"/>
-          </a:p>
-        </p:txBody>
-      </p:sp>
-      <p:sp>
-        <p:nvSpPr>
-          <p:cNvPr id="13" name="Text 11"/>
-          <p:cNvSpPr/>
-          <p:nvPr/>
-        </p:nvSpPr>
-        <p:spPr>
-          <a:xfrm>
-            <a:off x="8074152" y="1856232"/>
-            <a:ext cx="2825496" cy="1261872"/>
+            <a:endParaRPr lang="en-US" sz="1300" dirty="0"/>
+          </a:p>
+        </p:txBody>
+      </p:sp>
+      <p:sp>
+        <p:nvSpPr>
+          <p:cNvPr id="14" name="Text 12"/>
+          <p:cNvSpPr/>
+          <p:nvPr/>
+        </p:nvSpPr>
+        <p:spPr>
+          <a:xfrm>
+            <a:off x="8074152" y="1920240"/>
+            <a:ext cx="2825496" cy="1188720"/>
           </a:xfrm>
           <a:prstGeom prst="rect">
             <a:avLst/>
@@ -7620,7 +7887,7 @@
               <a:buNone/>
             </a:pPr>
             <a:r>
-              <a:rPr lang="en-US" sz="1250" dirty="0">
+              <a:rPr lang="en-US" sz="1550" dirty="0">
                 <a:solidFill>
                   <a:srgbClr val="17364A"/>
                 </a:solidFill>
@@ -7628,15 +7895,15 @@
                 <a:ea typeface="Aptos" pitchFamily="34" charset="-122"/>
                 <a:cs typeface="Aptos" pitchFamily="34" charset="-120"/>
               </a:rPr>
-              <a:t>For generative AI, privacy-preserving design means controlling what data can be placed in prompts, what source documents.</a:t>
-            </a:r>
-            <a:endParaRPr lang="en-US" sz="1250" dirty="0"/>
-          </a:p>
-        </p:txBody>
-      </p:sp>
-      <p:sp>
-        <p:nvSpPr>
-          <p:cNvPr id="14" name="Shape 12"/>
+              <a:t>For generative AI, privacy-preserving design means controlling what data can be placed in prompts, what.</a:t>
+            </a:r>
+            <a:endParaRPr lang="en-US" sz="1550" dirty="0"/>
+          </a:p>
+        </p:txBody>
+      </p:sp>
+      <p:sp>
+        <p:nvSpPr>
+          <p:cNvPr id="15" name="Shape 13"/>
           <p:cNvSpPr/>
           <p:nvPr/>
         </p:nvSpPr>
@@ -7663,14 +7930,14 @@
       </p:sp>
       <p:sp>
         <p:nvSpPr>
-          <p:cNvPr id="15" name="Text 13"/>
+          <p:cNvPr id="16" name="Text 14"/>
           <p:cNvSpPr/>
           <p:nvPr/>
         </p:nvSpPr>
         <p:spPr>
           <a:xfrm>
             <a:off x="8074152" y="3666744"/>
-            <a:ext cx="2825496" cy="201168"/>
+            <a:ext cx="2825496" cy="256032"/>
           </a:xfrm>
           <a:prstGeom prst="rect">
             <a:avLst/>
@@ -7686,7 +7953,7 @@
               <a:buNone/>
             </a:pPr>
             <a:r>
-              <a:rPr lang="en-US" sz="950" b="1" dirty="0">
+              <a:rPr lang="en-US" sz="1300" b="1" dirty="0">
                 <a:solidFill>
                   <a:srgbClr val="0068B7"/>
                 </a:solidFill>
@@ -7696,20 +7963,20 @@
               </a:rPr>
               <a:t>Use this for</a:t>
             </a:r>
-            <a:endParaRPr lang="en-US" sz="950" dirty="0"/>
-          </a:p>
-        </p:txBody>
-      </p:sp>
-      <p:sp>
-        <p:nvSpPr>
-          <p:cNvPr id="16" name="Text 14"/>
-          <p:cNvSpPr/>
-          <p:nvPr/>
-        </p:nvSpPr>
-        <p:spPr>
-          <a:xfrm>
-            <a:off x="8074152" y="3959352"/>
-            <a:ext cx="2825496" cy="1170432"/>
+            <a:endParaRPr lang="en-US" sz="1300" dirty="0"/>
+          </a:p>
+        </p:txBody>
+      </p:sp>
+      <p:sp>
+        <p:nvSpPr>
+          <p:cNvPr id="17" name="Text 15"/>
+          <p:cNvSpPr/>
+          <p:nvPr/>
+        </p:nvSpPr>
+        <p:spPr>
+          <a:xfrm>
+            <a:off x="8074152" y="4023360"/>
+            <a:ext cx="2825496" cy="1097280"/>
           </a:xfrm>
           <a:prstGeom prst="rect">
             <a:avLst/>
@@ -7727,7 +7994,7 @@
               <a:buNone/>
             </a:pPr>
             <a:r>
-              <a:rPr lang="en-US" sz="1250" dirty="0">
+              <a:rPr lang="en-US" sz="1550" dirty="0">
                 <a:solidFill>
                   <a:srgbClr val="17364A"/>
                 </a:solidFill>
@@ -7737,7 +8004,7 @@
               </a:rPr>
               <a:t>Connect the concept to public health decisions, safeguards, documentation, or implementation work.</a:t>
             </a:r>
-            <a:endParaRPr lang="en-US" sz="1250" dirty="0"/>
+            <a:endParaRPr lang="en-US" sz="1550" dirty="0"/>
           </a:p>
         </p:txBody>
       </p:sp>
@@ -7934,7 +8201,7 @@
                 <a:ea typeface="Aptos" pitchFamily="34" charset="-122"/>
                 <a:cs typeface="Aptos" pitchFamily="34" charset="-120"/>
               </a:rPr>
-              <a:t>© Paula Soper</a:t>
+              <a:t>Â© Paula Soper</a:t>
             </a:r>
             <a:endParaRPr lang="en-US" sz="800" dirty="0"/>
           </a:p>
@@ -7942,7 +8209,46 @@
       </p:sp>
       <p:sp>
         <p:nvSpPr>
-          <p:cNvPr id="7" name="Shape 5"/>
+          <p:cNvPr id="7" name="Text 5"/>
+          <p:cNvSpPr/>
+          <p:nvPr/>
+        </p:nvSpPr>
+        <p:spPr>
+          <a:xfrm>
+            <a:off x="11137392" y="6510528"/>
+            <a:ext cx="411480" cy="201168"/>
+          </a:xfrm>
+          <a:prstGeom prst="rect">
+            <a:avLst/>
+          </a:prstGeom>
+          <a:noFill/>
+          <a:ln/>
+        </p:spPr>
+        <p:txBody>
+          <a:bodyPr wrap="square" lIns="0" tIns="0" rIns="0" bIns="0" rtlCol="0" anchor="ctr"/>
+          <a:lstStyle/>
+          <a:p>
+            <a:pPr algn="r" indent="0" marL="0">
+              <a:buNone/>
+            </a:pPr>
+            <a:r>
+              <a:rPr lang="en-US" sz="900" dirty="0">
+                <a:solidFill>
+                  <a:srgbClr val="5F7181"/>
+                </a:solidFill>
+                <a:latin typeface="Aptos" pitchFamily="34" charset="0"/>
+                <a:ea typeface="Aptos" pitchFamily="34" charset="-122"/>
+                <a:cs typeface="Aptos" pitchFamily="34" charset="-120"/>
+              </a:rPr>
+              <a:t>18</a:t>
+            </a:r>
+            <a:endParaRPr lang="en-US" sz="900" dirty="0"/>
+          </a:p>
+        </p:txBody>
+      </p:sp>
+      <p:sp>
+        <p:nvSpPr>
+          <p:cNvPr id="8" name="Shape 6"/>
           <p:cNvSpPr/>
           <p:nvPr/>
         </p:nvSpPr>
@@ -7967,7 +8273,7 @@
       </p:sp>
       <p:sp>
         <p:nvSpPr>
-          <p:cNvPr id="8" name="Text 6"/>
+          <p:cNvPr id="9" name="Text 7"/>
           <p:cNvSpPr/>
           <p:nvPr/>
         </p:nvSpPr>
@@ -8006,14 +8312,14 @@
       </p:sp>
       <p:sp>
         <p:nvSpPr>
-          <p:cNvPr id="9" name="Text 7"/>
+          <p:cNvPr id="10" name="Text 8"/>
           <p:cNvSpPr/>
           <p:nvPr/>
         </p:nvSpPr>
         <p:spPr>
           <a:xfrm>
             <a:off x="640080" y="621792"/>
-            <a:ext cx="10881360" cy="566928"/>
+            <a:ext cx="10881360" cy="713232"/>
           </a:xfrm>
           <a:prstGeom prst="rect">
             <a:avLst/>
@@ -8031,7 +8337,7 @@
               <a:buNone/>
             </a:pPr>
             <a:r>
-              <a:rPr lang="en-US" sz="2700" b="1" dirty="0">
+              <a:rPr lang="en-US" sz="3400" b="1" dirty="0">
                 <a:solidFill>
                   <a:srgbClr val="003A63"/>
                 </a:solidFill>
@@ -8041,20 +8347,20 @@
               </a:rPr>
               <a:t>Reflection Questions</a:t>
             </a:r>
-            <a:endParaRPr lang="en-US" sz="2700" dirty="0"/>
-          </a:p>
-        </p:txBody>
-      </p:sp>
-      <p:sp>
-        <p:nvSpPr>
-          <p:cNvPr id="10" name="Text 8"/>
-          <p:cNvSpPr/>
-          <p:nvPr/>
-        </p:nvSpPr>
-        <p:spPr>
-          <a:xfrm>
-            <a:off x="868680" y="1417320"/>
-            <a:ext cx="6675120" cy="4434840"/>
+            <a:endParaRPr lang="en-US" sz="3400" dirty="0"/>
+          </a:p>
+        </p:txBody>
+      </p:sp>
+      <p:sp>
+        <p:nvSpPr>
+          <p:cNvPr id="11" name="Text 9"/>
+          <p:cNvSpPr/>
+          <p:nvPr/>
+        </p:nvSpPr>
+        <p:spPr>
+          <a:xfrm>
+            <a:off x="868680" y="1508760"/>
+            <a:ext cx="6537960" cy="4160520"/>
           </a:xfrm>
           <a:prstGeom prst="rect">
             <a:avLst/>
@@ -8069,7 +8375,7 @@
           <a:lstStyle/>
           <a:p>
             <a:r>
-              <a:rPr lang="en-US" sz="1700" dirty="0">
+              <a:rPr lang="en-US" sz="2100" dirty="0">
                 <a:solidFill>
                   <a:srgbClr val="17364A"/>
                 </a:solidFill>
@@ -8077,13 +8383,13 @@
                 <a:ea typeface="Aptos" pitchFamily="34" charset="-122"/>
                 <a:cs typeface="Aptos" pitchFamily="34" charset="-120"/>
               </a:rPr>
-              <a:t>Which AI use cases in your agency require identifiable or sensitive data, and which could be completed with de-identified.</a:t>
-            </a:r>
-            <a:endParaRPr lang="en-US" sz="1700" dirty="0"/>
-          </a:p>
-          <a:p>
-            <a:r>
-              <a:rPr lang="en-US" sz="1700" dirty="0">
+              <a:t>Which AI use cases in your agency require identifiable or sensitive data, and which could be completed.</a:t>
+            </a:r>
+            <a:endParaRPr lang="en-US" sz="2100" dirty="0"/>
+          </a:p>
+          <a:p>
+            <a:r>
+              <a:rPr lang="en-US" sz="2100" dirty="0">
                 <a:solidFill>
                   <a:srgbClr val="17364A"/>
                 </a:solidFill>
@@ -8093,11 +8399,11 @@
               </a:rPr>
               <a:t>What data elements create the greatest re-identification risk in your context?</a:t>
             </a:r>
-            <a:endParaRPr lang="en-US" sz="1700" dirty="0"/>
-          </a:p>
-          <a:p>
-            <a:r>
-              <a:rPr lang="en-US" sz="1700" dirty="0">
+            <a:endParaRPr lang="en-US" sz="2100" dirty="0"/>
+          </a:p>
+          <a:p>
+            <a:r>
+              <a:rPr lang="en-US" sz="2100" dirty="0">
                 <a:solidFill>
                   <a:srgbClr val="17364A"/>
                 </a:solidFill>
@@ -8107,13 +8413,13 @@
               </a:rPr>
               <a:t>How are free-text fields reviewed before they are used in AI-supported workflows?</a:t>
             </a:r>
-            <a:endParaRPr lang="en-US" sz="1700" dirty="0"/>
-          </a:p>
-        </p:txBody>
-      </p:sp>
-      <p:sp>
-        <p:nvSpPr>
-          <p:cNvPr id="11" name="Shape 9"/>
+            <a:endParaRPr lang="en-US" sz="2100" dirty="0"/>
+          </a:p>
+        </p:txBody>
+      </p:sp>
+      <p:sp>
+        <p:nvSpPr>
+          <p:cNvPr id="12" name="Shape 10"/>
           <p:cNvSpPr/>
           <p:nvPr/>
         </p:nvSpPr>
@@ -8140,14 +8446,14 @@
       </p:sp>
       <p:sp>
         <p:nvSpPr>
-          <p:cNvPr id="12" name="Text 10"/>
+          <p:cNvPr id="13" name="Text 11"/>
           <p:cNvSpPr/>
           <p:nvPr/>
         </p:nvSpPr>
         <p:spPr>
           <a:xfrm>
             <a:off x="8074152" y="1563624"/>
-            <a:ext cx="2825496" cy="201168"/>
+            <a:ext cx="2825496" cy="256032"/>
           </a:xfrm>
           <a:prstGeom prst="rect">
             <a:avLst/>
@@ -8163,7 +8469,7 @@
               <a:buNone/>
             </a:pPr>
             <a:r>
-              <a:rPr lang="en-US" sz="950" b="1" dirty="0">
+              <a:rPr lang="en-US" sz="1300" b="1" dirty="0">
                 <a:solidFill>
                   <a:srgbClr val="0068B7"/>
                 </a:solidFill>
@@ -8173,20 +8479,20 @@
               </a:rPr>
               <a:t>Key idea</a:t>
             </a:r>
-            <a:endParaRPr lang="en-US" sz="950" dirty="0"/>
-          </a:p>
-        </p:txBody>
-      </p:sp>
-      <p:sp>
-        <p:nvSpPr>
-          <p:cNvPr id="13" name="Text 11"/>
-          <p:cNvSpPr/>
-          <p:nvPr/>
-        </p:nvSpPr>
-        <p:spPr>
-          <a:xfrm>
-            <a:off x="8074152" y="1856232"/>
-            <a:ext cx="2825496" cy="1261872"/>
+            <a:endParaRPr lang="en-US" sz="1300" dirty="0"/>
+          </a:p>
+        </p:txBody>
+      </p:sp>
+      <p:sp>
+        <p:nvSpPr>
+          <p:cNvPr id="14" name="Text 12"/>
+          <p:cNvSpPr/>
+          <p:nvPr/>
+        </p:nvSpPr>
+        <p:spPr>
+          <a:xfrm>
+            <a:off x="8074152" y="1920240"/>
+            <a:ext cx="2825496" cy="1188720"/>
           </a:xfrm>
           <a:prstGeom prst="rect">
             <a:avLst/>
@@ -8204,7 +8510,7 @@
               <a:buNone/>
             </a:pPr>
             <a:r>
-              <a:rPr lang="en-US" sz="1250" dirty="0">
+              <a:rPr lang="en-US" sz="1550" dirty="0">
                 <a:solidFill>
                   <a:srgbClr val="17364A"/>
                 </a:solidFill>
@@ -8212,15 +8518,15 @@
                 <a:ea typeface="Aptos" pitchFamily="34" charset="-122"/>
                 <a:cs typeface="Aptos" pitchFamily="34" charset="-120"/>
               </a:rPr>
-              <a:t>Which AI use cases in your agency require identifiable or sensitive data, and which could be completed with de-identified.</a:t>
-            </a:r>
-            <a:endParaRPr lang="en-US" sz="1250" dirty="0"/>
-          </a:p>
-        </p:txBody>
-      </p:sp>
-      <p:sp>
-        <p:nvSpPr>
-          <p:cNvPr id="14" name="Shape 12"/>
+              <a:t>Which AI use cases in your agency require identifiable or sensitive data, and which could be completed.</a:t>
+            </a:r>
+            <a:endParaRPr lang="en-US" sz="1550" dirty="0"/>
+          </a:p>
+        </p:txBody>
+      </p:sp>
+      <p:sp>
+        <p:nvSpPr>
+          <p:cNvPr id="15" name="Shape 13"/>
           <p:cNvSpPr/>
           <p:nvPr/>
         </p:nvSpPr>
@@ -8247,14 +8553,14 @@
       </p:sp>
       <p:sp>
         <p:nvSpPr>
-          <p:cNvPr id="15" name="Text 13"/>
+          <p:cNvPr id="16" name="Text 14"/>
           <p:cNvSpPr/>
           <p:nvPr/>
         </p:nvSpPr>
         <p:spPr>
           <a:xfrm>
             <a:off x="8074152" y="3666744"/>
-            <a:ext cx="2825496" cy="201168"/>
+            <a:ext cx="2825496" cy="256032"/>
           </a:xfrm>
           <a:prstGeom prst="rect">
             <a:avLst/>
@@ -8270,7 +8576,7 @@
               <a:buNone/>
             </a:pPr>
             <a:r>
-              <a:rPr lang="en-US" sz="950" b="1" dirty="0">
+              <a:rPr lang="en-US" sz="1300" b="1" dirty="0">
                 <a:solidFill>
                   <a:srgbClr val="0068B7"/>
                 </a:solidFill>
@@ -8280,20 +8586,20 @@
               </a:rPr>
               <a:t>Use this for</a:t>
             </a:r>
-            <a:endParaRPr lang="en-US" sz="950" dirty="0"/>
-          </a:p>
-        </p:txBody>
-      </p:sp>
-      <p:sp>
-        <p:nvSpPr>
-          <p:cNvPr id="16" name="Text 14"/>
-          <p:cNvSpPr/>
-          <p:nvPr/>
-        </p:nvSpPr>
-        <p:spPr>
-          <a:xfrm>
-            <a:off x="8074152" y="3959352"/>
-            <a:ext cx="2825496" cy="1170432"/>
+            <a:endParaRPr lang="en-US" sz="1300" dirty="0"/>
+          </a:p>
+        </p:txBody>
+      </p:sp>
+      <p:sp>
+        <p:nvSpPr>
+          <p:cNvPr id="17" name="Text 15"/>
+          <p:cNvSpPr/>
+          <p:nvPr/>
+        </p:nvSpPr>
+        <p:spPr>
+          <a:xfrm>
+            <a:off x="8074152" y="4023360"/>
+            <a:ext cx="2825496" cy="1097280"/>
           </a:xfrm>
           <a:prstGeom prst="rect">
             <a:avLst/>
@@ -8311,7 +8617,7 @@
               <a:buNone/>
             </a:pPr>
             <a:r>
-              <a:rPr lang="en-US" sz="1250" dirty="0">
+              <a:rPr lang="en-US" sz="1550" dirty="0">
                 <a:solidFill>
                   <a:srgbClr val="17364A"/>
                 </a:solidFill>
@@ -8321,7 +8627,7 @@
               </a:rPr>
               <a:t>Connect the concept to public health decisions, safeguards, documentation, or implementation work.</a:t>
             </a:r>
-            <a:endParaRPr lang="en-US" sz="1250" dirty="0"/>
+            <a:endParaRPr lang="en-US" sz="1550" dirty="0"/>
           </a:p>
         </p:txBody>
       </p:sp>
@@ -8518,7 +8824,7 @@
                 <a:ea typeface="Aptos" pitchFamily="34" charset="-122"/>
                 <a:cs typeface="Aptos" pitchFamily="34" charset="-120"/>
               </a:rPr>
-              <a:t>© Paula Soper</a:t>
+              <a:t>Â© Paula Soper</a:t>
             </a:r>
             <a:endParaRPr lang="en-US" sz="800" dirty="0"/>
           </a:p>
@@ -8532,8 +8838,47 @@
         </p:nvSpPr>
         <p:spPr>
           <a:xfrm>
+            <a:off x="11137392" y="6510528"/>
+            <a:ext cx="411480" cy="201168"/>
+          </a:xfrm>
+          <a:prstGeom prst="rect">
+            <a:avLst/>
+          </a:prstGeom>
+          <a:noFill/>
+          <a:ln/>
+        </p:spPr>
+        <p:txBody>
+          <a:bodyPr wrap="square" lIns="0" tIns="0" rIns="0" bIns="0" rtlCol="0" anchor="ctr"/>
+          <a:lstStyle/>
+          <a:p>
+            <a:pPr algn="r" indent="0" marL="0">
+              <a:buNone/>
+            </a:pPr>
+            <a:r>
+              <a:rPr lang="en-US" sz="900" dirty="0">
+                <a:solidFill>
+                  <a:srgbClr val="5F7181"/>
+                </a:solidFill>
+                <a:latin typeface="Aptos" pitchFamily="34" charset="0"/>
+                <a:ea typeface="Aptos" pitchFamily="34" charset="-122"/>
+                <a:cs typeface="Aptos" pitchFamily="34" charset="-120"/>
+              </a:rPr>
+              <a:t>19</a:t>
+            </a:r>
+            <a:endParaRPr lang="en-US" sz="900" dirty="0"/>
+          </a:p>
+        </p:txBody>
+      </p:sp>
+      <p:sp>
+        <p:nvSpPr>
+          <p:cNvPr id="8" name="Text 6"/>
+          <p:cNvSpPr/>
+          <p:nvPr/>
+        </p:nvSpPr>
+        <p:spPr>
+          <a:xfrm>
             <a:off x="640080" y="658368"/>
-            <a:ext cx="10881360" cy="566928"/>
+            <a:ext cx="10881360" cy="713232"/>
           </a:xfrm>
           <a:prstGeom prst="rect">
             <a:avLst/>
@@ -8551,7 +8896,7 @@
               <a:buNone/>
             </a:pPr>
             <a:r>
-              <a:rPr lang="en-US" sz="2700" b="1" dirty="0">
+              <a:rPr lang="en-US" sz="3400" b="1" dirty="0">
                 <a:solidFill>
                   <a:srgbClr val="003A63"/>
                 </a:solidFill>
@@ -8561,20 +8906,20 @@
               </a:rPr>
               <a:t>Reflection Questions Continued</a:t>
             </a:r>
-            <a:endParaRPr lang="en-US" sz="2700" dirty="0"/>
-          </a:p>
-        </p:txBody>
-      </p:sp>
-      <p:sp>
-        <p:nvSpPr>
-          <p:cNvPr id="8" name="Text 6"/>
-          <p:cNvSpPr/>
-          <p:nvPr/>
-        </p:nvSpPr>
-        <p:spPr>
-          <a:xfrm>
-            <a:off x="868680" y="1417320"/>
-            <a:ext cx="6675120" cy="4434840"/>
+            <a:endParaRPr lang="en-US" sz="3400" dirty="0"/>
+          </a:p>
+        </p:txBody>
+      </p:sp>
+      <p:sp>
+        <p:nvSpPr>
+          <p:cNvPr id="9" name="Text 7"/>
+          <p:cNvSpPr/>
+          <p:nvPr/>
+        </p:nvSpPr>
+        <p:spPr>
+          <a:xfrm>
+            <a:off x="868680" y="1508760"/>
+            <a:ext cx="6537960" cy="4160520"/>
           </a:xfrm>
           <a:prstGeom prst="rect">
             <a:avLst/>
@@ -8589,7 +8934,7 @@
           <a:lstStyle/>
           <a:p>
             <a:r>
-              <a:rPr lang="en-US" sz="1700" dirty="0">
+              <a:rPr lang="en-US" sz="2100" dirty="0">
                 <a:solidFill>
                   <a:srgbClr val="17364A"/>
                 </a:solidFill>
@@ -8599,11 +8944,11 @@
               </a:rPr>
               <a:t>Which outputs could reveal sensitive information even if the input data are controlled?</a:t>
             </a:r>
-            <a:endParaRPr lang="en-US" sz="1700" dirty="0"/>
-          </a:p>
-          <a:p>
-            <a:r>
-              <a:rPr lang="en-US" sz="1700" dirty="0">
+            <a:endParaRPr lang="en-US" sz="2100" dirty="0"/>
+          </a:p>
+          <a:p>
+            <a:r>
+              <a:rPr lang="en-US" sz="2100" dirty="0">
                 <a:solidFill>
                   <a:srgbClr val="17364A"/>
                 </a:solidFill>
@@ -8613,13 +8958,13 @@
               </a:rPr>
               <a:t>Who has authority to approve privacy-preserving AI controls for a workflow?</a:t>
             </a:r>
-            <a:endParaRPr lang="en-US" sz="1700" dirty="0"/>
-          </a:p>
-        </p:txBody>
-      </p:sp>
-      <p:sp>
-        <p:nvSpPr>
-          <p:cNvPr id="9" name="Shape 7"/>
+            <a:endParaRPr lang="en-US" sz="2100" dirty="0"/>
+          </a:p>
+        </p:txBody>
+      </p:sp>
+      <p:sp>
+        <p:nvSpPr>
+          <p:cNvPr id="10" name="Shape 8"/>
           <p:cNvSpPr/>
           <p:nvPr/>
         </p:nvSpPr>
@@ -8646,14 +8991,14 @@
       </p:sp>
       <p:sp>
         <p:nvSpPr>
-          <p:cNvPr id="10" name="Text 8"/>
+          <p:cNvPr id="11" name="Text 9"/>
           <p:cNvSpPr/>
           <p:nvPr/>
         </p:nvSpPr>
         <p:spPr>
           <a:xfrm>
             <a:off x="8074152" y="1563624"/>
-            <a:ext cx="2825496" cy="201168"/>
+            <a:ext cx="2825496" cy="256032"/>
           </a:xfrm>
           <a:prstGeom prst="rect">
             <a:avLst/>
@@ -8669,7 +9014,7 @@
               <a:buNone/>
             </a:pPr>
             <a:r>
-              <a:rPr lang="en-US" sz="950" b="1" dirty="0">
+              <a:rPr lang="en-US" sz="1300" b="1" dirty="0">
                 <a:solidFill>
                   <a:srgbClr val="0068B7"/>
                 </a:solidFill>
@@ -8679,20 +9024,20 @@
               </a:rPr>
               <a:t>Key idea</a:t>
             </a:r>
-            <a:endParaRPr lang="en-US" sz="950" dirty="0"/>
-          </a:p>
-        </p:txBody>
-      </p:sp>
-      <p:sp>
-        <p:nvSpPr>
-          <p:cNvPr id="11" name="Text 9"/>
-          <p:cNvSpPr/>
-          <p:nvPr/>
-        </p:nvSpPr>
-        <p:spPr>
-          <a:xfrm>
-            <a:off x="8074152" y="1856232"/>
-            <a:ext cx="2825496" cy="1261872"/>
+            <a:endParaRPr lang="en-US" sz="1300" dirty="0"/>
+          </a:p>
+        </p:txBody>
+      </p:sp>
+      <p:sp>
+        <p:nvSpPr>
+          <p:cNvPr id="12" name="Text 10"/>
+          <p:cNvSpPr/>
+          <p:nvPr/>
+        </p:nvSpPr>
+        <p:spPr>
+          <a:xfrm>
+            <a:off x="8074152" y="1920240"/>
+            <a:ext cx="2825496" cy="1188720"/>
           </a:xfrm>
           <a:prstGeom prst="rect">
             <a:avLst/>
@@ -8710,7 +9055,7 @@
               <a:buNone/>
             </a:pPr>
             <a:r>
-              <a:rPr lang="en-US" sz="1250" dirty="0">
+              <a:rPr lang="en-US" sz="1550" dirty="0">
                 <a:solidFill>
                   <a:srgbClr val="17364A"/>
                 </a:solidFill>
@@ -8720,13 +9065,13 @@
               </a:rPr>
               <a:t>Which outputs could reveal sensitive information even if the input data are controlled?</a:t>
             </a:r>
-            <a:endParaRPr lang="en-US" sz="1250" dirty="0"/>
-          </a:p>
-        </p:txBody>
-      </p:sp>
-      <p:sp>
-        <p:nvSpPr>
-          <p:cNvPr id="12" name="Shape 10"/>
+            <a:endParaRPr lang="en-US" sz="1550" dirty="0"/>
+          </a:p>
+        </p:txBody>
+      </p:sp>
+      <p:sp>
+        <p:nvSpPr>
+          <p:cNvPr id="13" name="Shape 11"/>
           <p:cNvSpPr/>
           <p:nvPr/>
         </p:nvSpPr>
@@ -8753,14 +9098,14 @@
       </p:sp>
       <p:sp>
         <p:nvSpPr>
-          <p:cNvPr id="13" name="Text 11"/>
+          <p:cNvPr id="14" name="Text 12"/>
           <p:cNvSpPr/>
           <p:nvPr/>
         </p:nvSpPr>
         <p:spPr>
           <a:xfrm>
             <a:off x="8074152" y="3666744"/>
-            <a:ext cx="2825496" cy="201168"/>
+            <a:ext cx="2825496" cy="256032"/>
           </a:xfrm>
           <a:prstGeom prst="rect">
             <a:avLst/>
@@ -8776,7 +9121,7 @@
               <a:buNone/>
             </a:pPr>
             <a:r>
-              <a:rPr lang="en-US" sz="950" b="1" dirty="0">
+              <a:rPr lang="en-US" sz="1300" b="1" dirty="0">
                 <a:solidFill>
                   <a:srgbClr val="0068B7"/>
                 </a:solidFill>
@@ -8786,20 +9131,20 @@
               </a:rPr>
               <a:t>Use this for</a:t>
             </a:r>
-            <a:endParaRPr lang="en-US" sz="950" dirty="0"/>
-          </a:p>
-        </p:txBody>
-      </p:sp>
-      <p:sp>
-        <p:nvSpPr>
-          <p:cNvPr id="14" name="Text 12"/>
-          <p:cNvSpPr/>
-          <p:nvPr/>
-        </p:nvSpPr>
-        <p:spPr>
-          <a:xfrm>
-            <a:off x="8074152" y="3959352"/>
-            <a:ext cx="2825496" cy="1170432"/>
+            <a:endParaRPr lang="en-US" sz="1300" dirty="0"/>
+          </a:p>
+        </p:txBody>
+      </p:sp>
+      <p:sp>
+        <p:nvSpPr>
+          <p:cNvPr id="15" name="Text 13"/>
+          <p:cNvSpPr/>
+          <p:nvPr/>
+        </p:nvSpPr>
+        <p:spPr>
+          <a:xfrm>
+            <a:off x="8074152" y="4023360"/>
+            <a:ext cx="2825496" cy="1097280"/>
           </a:xfrm>
           <a:prstGeom prst="rect">
             <a:avLst/>
@@ -8817,7 +9162,7 @@
               <a:buNone/>
             </a:pPr>
             <a:r>
-              <a:rPr lang="en-US" sz="1250" dirty="0">
+              <a:rPr lang="en-US" sz="1550" dirty="0">
                 <a:solidFill>
                   <a:srgbClr val="17364A"/>
                 </a:solidFill>
@@ -8827,7 +9172,7 @@
               </a:rPr>
               <a:t>Connect the concept to public health decisions, safeguards, documentation, or implementation work.</a:t>
             </a:r>
-            <a:endParaRPr lang="en-US" sz="1250" dirty="0"/>
+            <a:endParaRPr lang="en-US" sz="1550" dirty="0"/>
           </a:p>
         </p:txBody>
       </p:sp>
@@ -9024,7 +9369,7 @@
                 <a:ea typeface="Aptos" pitchFamily="34" charset="-122"/>
                 <a:cs typeface="Aptos" pitchFamily="34" charset="-120"/>
               </a:rPr>
-              <a:t>© Paula Soper</a:t>
+              <a:t>Â© Paula Soper</a:t>
             </a:r>
             <a:endParaRPr lang="en-US" sz="800" dirty="0"/>
           </a:p>
@@ -9038,8 +9383,47 @@
         </p:nvSpPr>
         <p:spPr>
           <a:xfrm>
+            <a:off x="11137392" y="6510528"/>
+            <a:ext cx="411480" cy="201168"/>
+          </a:xfrm>
+          <a:prstGeom prst="rect">
+            <a:avLst/>
+          </a:prstGeom>
+          <a:noFill/>
+          <a:ln/>
+        </p:spPr>
+        <p:txBody>
+          <a:bodyPr wrap="square" lIns="0" tIns="0" rIns="0" bIns="0" rtlCol="0" anchor="ctr"/>
+          <a:lstStyle/>
+          <a:p>
+            <a:pPr algn="r" indent="0" marL="0">
+              <a:buNone/>
+            </a:pPr>
+            <a:r>
+              <a:rPr lang="en-US" sz="900" dirty="0">
+                <a:solidFill>
+                  <a:srgbClr val="5F7181"/>
+                </a:solidFill>
+                <a:latin typeface="Aptos" pitchFamily="34" charset="0"/>
+                <a:ea typeface="Aptos" pitchFamily="34" charset="-122"/>
+                <a:cs typeface="Aptos" pitchFamily="34" charset="-120"/>
+              </a:rPr>
+              <a:t>2</a:t>
+            </a:r>
+            <a:endParaRPr lang="en-US" sz="900" dirty="0"/>
+          </a:p>
+        </p:txBody>
+      </p:sp>
+      <p:sp>
+        <p:nvSpPr>
+          <p:cNvPr id="8" name="Text 6"/>
+          <p:cNvSpPr/>
+          <p:nvPr/>
+        </p:nvSpPr>
+        <p:spPr>
+          <a:xfrm>
             <a:off x="640080" y="658368"/>
-            <a:ext cx="10881360" cy="566928"/>
+            <a:ext cx="10881360" cy="713232"/>
           </a:xfrm>
           <a:prstGeom prst="rect">
             <a:avLst/>
@@ -9057,7 +9441,7 @@
               <a:buNone/>
             </a:pPr>
             <a:r>
-              <a:rPr lang="en-US" sz="2700" b="1" dirty="0">
+              <a:rPr lang="en-US" sz="3400" b="1" dirty="0">
                 <a:solidFill>
                   <a:srgbClr val="003A63"/>
                 </a:solidFill>
@@ -9067,20 +9451,20 @@
               </a:rPr>
               <a:t>What this module helps you do</a:t>
             </a:r>
-            <a:endParaRPr lang="en-US" sz="2700" dirty="0"/>
-          </a:p>
-        </p:txBody>
-      </p:sp>
-      <p:sp>
-        <p:nvSpPr>
-          <p:cNvPr id="8" name="Text 6"/>
-          <p:cNvSpPr/>
-          <p:nvPr/>
-        </p:nvSpPr>
-        <p:spPr>
-          <a:xfrm>
-            <a:off x="868680" y="1417320"/>
-            <a:ext cx="6675120" cy="3291840"/>
+            <a:endParaRPr lang="en-US" sz="3400" dirty="0"/>
+          </a:p>
+        </p:txBody>
+      </p:sp>
+      <p:sp>
+        <p:nvSpPr>
+          <p:cNvPr id="9" name="Text 7"/>
+          <p:cNvSpPr/>
+          <p:nvPr/>
+        </p:nvSpPr>
+        <p:spPr>
+          <a:xfrm>
+            <a:off x="868680" y="1508760"/>
+            <a:ext cx="6446520" cy="2926080"/>
           </a:xfrm>
           <a:prstGeom prst="rect">
             <a:avLst/>
@@ -9095,7 +9479,7 @@
           <a:lstStyle/>
           <a:p>
             <a:r>
-              <a:rPr lang="en-US" sz="1700" dirty="0">
+              <a:rPr lang="en-US" sz="2100" dirty="0">
                 <a:solidFill>
                   <a:srgbClr val="17364A"/>
                 </a:solidFill>
@@ -9103,13 +9487,13 @@
                 <a:ea typeface="Aptos" pitchFamily="34" charset="-122"/>
                 <a:cs typeface="Aptos" pitchFamily="34" charset="-120"/>
               </a:rPr>
-              <a:t>Privacy-preserving AI is the set of technical, policy, and workflow practices that allow public health agencies to use data responsibly while.</a:t>
-            </a:r>
-            <a:endParaRPr lang="en-US" sz="1700" dirty="0"/>
-          </a:p>
-          <a:p>
-            <a:r>
-              <a:rPr lang="en-US" sz="1700" dirty="0">
+              <a:t>Privacy-preserving AI is the set of technical, policy, and workflow practices that allow public health agencies.</a:t>
+            </a:r>
+            <a:endParaRPr lang="en-US" sz="2100" dirty="0"/>
+          </a:p>
+          <a:p>
+            <a:r>
+              <a:rPr lang="en-US" sz="2100" dirty="0">
                 <a:solidFill>
                   <a:srgbClr val="17364A"/>
                 </a:solidFill>
@@ -9117,13 +9501,13 @@
                 <a:ea typeface="Aptos" pitchFamily="34" charset="-122"/>
                 <a:cs typeface="Aptos" pitchFamily="34" charset="-120"/>
               </a:rPr>
-              <a:t>This module focuses on how privacy protections must be built into AI planning before data are extracted, shared, used for model development,.</a:t>
-            </a:r>
-            <a:endParaRPr lang="en-US" sz="1700" dirty="0"/>
-          </a:p>
-          <a:p>
-            <a:r>
-              <a:rPr lang="en-US" sz="1700" dirty="0">
+              <a:t>This module focuses on how privacy protections must be built into AI planning before data are extracted, shared,.</a:t>
+            </a:r>
+            <a:endParaRPr lang="en-US" sz="2100" dirty="0"/>
+          </a:p>
+          <a:p>
+            <a:r>
+              <a:rPr lang="en-US" sz="2100" dirty="0">
                 <a:solidFill>
                   <a:srgbClr val="17364A"/>
                 </a:solidFill>
@@ -9131,29 +9515,15 @@
                 <a:ea typeface="Aptos" pitchFamily="34" charset="-122"/>
                 <a:cs typeface="Aptos" pitchFamily="34" charset="-120"/>
               </a:rPr>
-              <a:t>Public health agencies often have legal authority to collect and use sensitive data, but authority to use data does not remove the obligation to.</a:t>
-            </a:r>
-            <a:endParaRPr lang="en-US" sz="1700" dirty="0"/>
-          </a:p>
-          <a:p>
-            <a:r>
-              <a:rPr lang="en-US" sz="1700" dirty="0">
-                <a:solidFill>
-                  <a:srgbClr val="17364A"/>
-                </a:solidFill>
-                <a:latin typeface="Aptos" pitchFamily="34" charset="0"/>
-                <a:ea typeface="Aptos" pitchFamily="34" charset="-122"/>
-                <a:cs typeface="Aptos" pitchFamily="34" charset="-120"/>
-              </a:rPr>
-              <a:t>AI can increase privacy risk because it may combine data sources, infer sensitive attributes, generate outputs that reveal source details, or make.</a:t>
-            </a:r>
-            <a:endParaRPr lang="en-US" sz="1700" dirty="0"/>
-          </a:p>
-        </p:txBody>
-      </p:sp>
-      <p:sp>
-        <p:nvSpPr>
-          <p:cNvPr id="9" name="Shape 7"/>
+              <a:t>Public health agencies often have legal authority to collect and use sensitive data, but authority to use data.</a:t>
+            </a:r>
+            <a:endParaRPr lang="en-US" sz="2100" dirty="0"/>
+          </a:p>
+        </p:txBody>
+      </p:sp>
+      <p:sp>
+        <p:nvSpPr>
+          <p:cNvPr id="10" name="Shape 8"/>
           <p:cNvSpPr/>
           <p:nvPr/>
         </p:nvSpPr>
@@ -9180,14 +9550,14 @@
       </p:sp>
       <p:sp>
         <p:nvSpPr>
-          <p:cNvPr id="10" name="Text 8"/>
+          <p:cNvPr id="11" name="Text 9"/>
           <p:cNvSpPr/>
           <p:nvPr/>
         </p:nvSpPr>
         <p:spPr>
           <a:xfrm>
             <a:off x="8074152" y="1563624"/>
-            <a:ext cx="2825496" cy="201168"/>
+            <a:ext cx="2825496" cy="256032"/>
           </a:xfrm>
           <a:prstGeom prst="rect">
             <a:avLst/>
@@ -9203,7 +9573,7 @@
               <a:buNone/>
             </a:pPr>
             <a:r>
-              <a:rPr lang="en-US" sz="950" b="1" dirty="0">
+              <a:rPr lang="en-US" sz="1300" b="1" dirty="0">
                 <a:solidFill>
                   <a:srgbClr val="0068B7"/>
                 </a:solidFill>
@@ -9213,20 +9583,20 @@
               </a:rPr>
               <a:t>Module details</a:t>
             </a:r>
-            <a:endParaRPr lang="en-US" sz="950" dirty="0"/>
-          </a:p>
-        </p:txBody>
-      </p:sp>
-      <p:sp>
-        <p:nvSpPr>
-          <p:cNvPr id="11" name="Text 9"/>
-          <p:cNvSpPr/>
-          <p:nvPr/>
-        </p:nvSpPr>
-        <p:spPr>
-          <a:xfrm>
-            <a:off x="8074152" y="1856232"/>
-            <a:ext cx="2825496" cy="1353312"/>
+            <a:endParaRPr lang="en-US" sz="1300" dirty="0"/>
+          </a:p>
+        </p:txBody>
+      </p:sp>
+      <p:sp>
+        <p:nvSpPr>
+          <p:cNvPr id="12" name="Text 10"/>
+          <p:cNvSpPr/>
+          <p:nvPr/>
+        </p:nvSpPr>
+        <p:spPr>
+          <a:xfrm>
+            <a:off x="8074152" y="1920240"/>
+            <a:ext cx="2825496" cy="1280160"/>
           </a:xfrm>
           <a:prstGeom prst="rect">
             <a:avLst/>
@@ -9244,7 +9614,7 @@
               <a:buNone/>
             </a:pPr>
             <a:r>
-              <a:rPr lang="en-US" sz="1250" dirty="0">
+              <a:rPr lang="en-US" sz="1550" dirty="0">
                 <a:solidFill>
                   <a:srgbClr val="17364A"/>
                 </a:solidFill>
@@ -9254,14 +9624,14 @@
               </a:rPr>
               <a:t>Level: intermediate/practitioner</a:t>
             </a:r>
-            <a:endParaRPr lang="en-US" sz="1250" dirty="0"/>
+            <a:endParaRPr lang="en-US" sz="1550" dirty="0"/>
           </a:p>
           <a:p>
             <a:pPr indent="0" marL="0">
               <a:buNone/>
             </a:pPr>
             <a:r>
-              <a:rPr lang="en-US" sz="1250" dirty="0">
+              <a:rPr lang="en-US" sz="1550" dirty="0">
                 <a:solidFill>
                   <a:srgbClr val="17364A"/>
                 </a:solidFill>
@@ -9271,14 +9641,14 @@
               </a:rPr>
               <a:t>Primary track: Governance and Security Track</a:t>
             </a:r>
-            <a:endParaRPr lang="en-US" sz="1250" dirty="0"/>
+            <a:endParaRPr lang="en-US" sz="1550" dirty="0"/>
           </a:p>
           <a:p>
             <a:pPr indent="0" marL="0">
               <a:buNone/>
             </a:pPr>
             <a:r>
-              <a:rPr lang="en-US" sz="1250" dirty="0">
+              <a:rPr lang="en-US" sz="1550" dirty="0">
                 <a:solidFill>
                   <a:srgbClr val="17364A"/>
                 </a:solidFill>
@@ -9288,32 +9658,32 @@
               </a:rPr>
               <a:t>Appears in tracks: operations-data-quality</a:t>
             </a:r>
-            <a:endParaRPr lang="en-US" sz="1250" dirty="0"/>
-          </a:p>
-        </p:txBody>
-      </p:sp>
-      <p:sp>
-        <p:nvSpPr>
-          <p:cNvPr id="12" name="Shape 10"/>
-          <p:cNvSpPr/>
-          <p:nvPr/>
-        </p:nvSpPr>
-        <p:spPr>
-          <a:xfrm>
-            <a:off x="7909560" y="3611880"/>
-            <a:ext cx="3154680" cy="1783080"/>
+            <a:endParaRPr lang="en-US" sz="1550" dirty="0"/>
+          </a:p>
+        </p:txBody>
+      </p:sp>
+      <p:sp>
+        <p:nvSpPr>
+          <p:cNvPr id="13" name="Shape 11"/>
+          <p:cNvSpPr/>
+          <p:nvPr/>
+        </p:nvSpPr>
+        <p:spPr>
+          <a:xfrm>
+            <a:off x="7635240" y="3730752"/>
+            <a:ext cx="1033272" cy="749808"/>
           </a:xfrm>
           <a:prstGeom prst="roundRect">
             <a:avLst>
-              <a:gd name="adj" fmla="val 6154"/>
+              <a:gd name="adj" fmla="val 14634"/>
             </a:avLst>
           </a:prstGeom>
           <a:solidFill>
-            <a:srgbClr val="EEF8ED"/>
+            <a:srgbClr val="0068B7"/>
           </a:solidFill>
           <a:ln w="12700">
             <a:solidFill>
-              <a:srgbClr val="B9D7E6"/>
+              <a:srgbClr val="0068B7"/>
             </a:solidFill>
             <a:prstDash val="solid"/>
           </a:ln>
@@ -9321,81 +9691,256 @@
       </p:sp>
       <p:sp>
         <p:nvSpPr>
-          <p:cNvPr id="13" name="Text 11"/>
-          <p:cNvSpPr/>
-          <p:nvPr/>
-        </p:nvSpPr>
-        <p:spPr>
-          <a:xfrm>
-            <a:off x="8074152" y="3758184"/>
-            <a:ext cx="2825496" cy="201168"/>
-          </a:xfrm>
-          <a:prstGeom prst="rect">
-            <a:avLst/>
-          </a:prstGeom>
-          <a:noFill/>
-          <a:ln/>
-        </p:spPr>
-        <p:txBody>
-          <a:bodyPr wrap="square" lIns="0" tIns="0" rIns="0" bIns="0" rtlCol="0" anchor="ctr"/>
-          <a:lstStyle/>
-          <a:p>
-            <a:pPr indent="0" marL="0">
-              <a:buNone/>
-            </a:pPr>
-            <a:r>
-              <a:rPr lang="en-US" sz="950" b="1" dirty="0">
-                <a:solidFill>
-                  <a:srgbClr val="0068B7"/>
-                </a:solidFill>
-                <a:latin typeface="Aptos" pitchFamily="34" charset="0"/>
-                <a:ea typeface="Aptos" pitchFamily="34" charset="-122"/>
-                <a:cs typeface="Aptos" pitchFamily="34" charset="-120"/>
-              </a:rPr>
-              <a:t>Learning approach</a:t>
-            </a:r>
-            <a:endParaRPr lang="en-US" sz="950" dirty="0"/>
-          </a:p>
-        </p:txBody>
-      </p:sp>
-      <p:sp>
-        <p:nvSpPr>
           <p:cNvPr id="14" name="Text 12"/>
           <p:cNvSpPr/>
           <p:nvPr/>
         </p:nvSpPr>
         <p:spPr>
           <a:xfrm>
-            <a:off x="8074152" y="4050792"/>
-            <a:ext cx="2825496" cy="1216152"/>
-          </a:xfrm>
-          <a:prstGeom prst="rect">
-            <a:avLst/>
-          </a:prstGeom>
-          <a:noFill/>
-          <a:ln/>
-        </p:spPr>
-        <p:txBody>
-          <a:bodyPr wrap="square" lIns="0" tIns="0" rIns="0" bIns="0" rtlCol="0" anchor="t">
+            <a:off x="7708392" y="3922776"/>
+            <a:ext cx="886968" cy="310896"/>
+          </a:xfrm>
+          <a:prstGeom prst="rect">
+            <a:avLst/>
+          </a:prstGeom>
+          <a:noFill/>
+          <a:ln/>
+        </p:spPr>
+        <p:txBody>
+          <a:bodyPr wrap="square" lIns="0" tIns="0" rIns="0" bIns="0" rtlCol="0" anchor="ctr">
             <a:normAutofit/>
           </a:bodyPr>
           <a:lstStyle/>
           <a:p>
-            <a:pPr indent="0" marL="0">
-              <a:buNone/>
-            </a:pPr>
-            <a:r>
-              <a:rPr lang="en-US" sz="1250" dirty="0">
-                <a:solidFill>
-                  <a:srgbClr val="17364A"/>
-                </a:solidFill>
-                <a:latin typeface="Aptos" pitchFamily="34" charset="0"/>
-                <a:ea typeface="Aptos" pitchFamily="34" charset="-122"/>
-                <a:cs typeface="Aptos" pitchFamily="34" charset="-120"/>
-              </a:rPr>
-              <a:t>Review the core ideas, complete the practical exercise, check your understanding, and use the related plays and tools to apply the lesson.</a:t>
-            </a:r>
-            <a:endParaRPr lang="en-US" sz="1250" dirty="0"/>
+            <a:pPr algn="ctr" indent="0" marL="0">
+              <a:buNone/>
+            </a:pPr>
+            <a:r>
+              <a:rPr lang="en-US" sz="1500" b="1" dirty="0">
+                <a:solidFill>
+                  <a:srgbClr val="FFFFFF"/>
+                </a:solidFill>
+                <a:latin typeface="Aptos" pitchFamily="34" charset="0"/>
+                <a:ea typeface="Aptos" pitchFamily="34" charset="-122"/>
+                <a:cs typeface="Aptos" pitchFamily="34" charset="-120"/>
+              </a:rPr>
+              <a:t>Learn</a:t>
+            </a:r>
+            <a:endParaRPr lang="en-US" sz="1500" dirty="0"/>
+          </a:p>
+        </p:txBody>
+      </p:sp>
+      <p:sp>
+        <p:nvSpPr>
+          <p:cNvPr id="15" name="Text 13"/>
+          <p:cNvSpPr/>
+          <p:nvPr/>
+        </p:nvSpPr>
+        <p:spPr>
+          <a:xfrm>
+            <a:off x="8695944" y="3941064"/>
+            <a:ext cx="201168" cy="256032"/>
+          </a:xfrm>
+          <a:prstGeom prst="rect">
+            <a:avLst/>
+          </a:prstGeom>
+          <a:noFill/>
+          <a:ln/>
+        </p:spPr>
+        <p:txBody>
+          <a:bodyPr wrap="square" lIns="0" tIns="0" rIns="0" bIns="0" rtlCol="0" anchor="ctr"/>
+          <a:lstStyle/>
+          <a:p>
+            <a:pPr algn="ctr" indent="0" marL="0">
+              <a:buNone/>
+            </a:pPr>
+            <a:r>
+              <a:rPr lang="en-US" sz="1800" b="1" dirty="0">
+                <a:solidFill>
+                  <a:srgbClr val="0068B7"/>
+                </a:solidFill>
+                <a:latin typeface="Aptos" pitchFamily="34" charset="0"/>
+                <a:ea typeface="Aptos" pitchFamily="34" charset="-122"/>
+                <a:cs typeface="Aptos" pitchFamily="34" charset="-120"/>
+              </a:rPr>
+              <a:t>â†’</a:t>
+            </a:r>
+            <a:endParaRPr lang="en-US" sz="1800" dirty="0"/>
+          </a:p>
+        </p:txBody>
+      </p:sp>
+      <p:sp>
+        <p:nvSpPr>
+          <p:cNvPr id="16" name="Shape 14"/>
+          <p:cNvSpPr/>
+          <p:nvPr/>
+        </p:nvSpPr>
+        <p:spPr>
+          <a:xfrm>
+            <a:off x="8924544" y="3730752"/>
+            <a:ext cx="1033272" cy="749808"/>
+          </a:xfrm>
+          <a:prstGeom prst="roundRect">
+            <a:avLst>
+              <a:gd name="adj" fmla="val 14634"/>
+            </a:avLst>
+          </a:prstGeom>
+          <a:solidFill>
+            <a:srgbClr val="2F8A28"/>
+          </a:solidFill>
+          <a:ln w="12700">
+            <a:solidFill>
+              <a:srgbClr val="2F8A28"/>
+            </a:solidFill>
+            <a:prstDash val="solid"/>
+          </a:ln>
+        </p:spPr>
+      </p:sp>
+      <p:sp>
+        <p:nvSpPr>
+          <p:cNvPr id="17" name="Text 15"/>
+          <p:cNvSpPr/>
+          <p:nvPr/>
+        </p:nvSpPr>
+        <p:spPr>
+          <a:xfrm>
+            <a:off x="8997696" y="3922776"/>
+            <a:ext cx="886968" cy="310896"/>
+          </a:xfrm>
+          <a:prstGeom prst="rect">
+            <a:avLst/>
+          </a:prstGeom>
+          <a:noFill/>
+          <a:ln/>
+        </p:spPr>
+        <p:txBody>
+          <a:bodyPr wrap="square" lIns="0" tIns="0" rIns="0" bIns="0" rtlCol="0" anchor="ctr">
+            <a:normAutofit/>
+          </a:bodyPr>
+          <a:lstStyle/>
+          <a:p>
+            <a:pPr algn="ctr" indent="0" marL="0">
+              <a:buNone/>
+            </a:pPr>
+            <a:r>
+              <a:rPr lang="en-US" sz="1500" b="1" dirty="0">
+                <a:solidFill>
+                  <a:srgbClr val="FFFFFF"/>
+                </a:solidFill>
+                <a:latin typeface="Aptos" pitchFamily="34" charset="0"/>
+                <a:ea typeface="Aptos" pitchFamily="34" charset="-122"/>
+                <a:cs typeface="Aptos" pitchFamily="34" charset="-120"/>
+              </a:rPr>
+              <a:t>Apply</a:t>
+            </a:r>
+            <a:endParaRPr lang="en-US" sz="1500" dirty="0"/>
+          </a:p>
+        </p:txBody>
+      </p:sp>
+      <p:sp>
+        <p:nvSpPr>
+          <p:cNvPr id="18" name="Text 16"/>
+          <p:cNvSpPr/>
+          <p:nvPr/>
+        </p:nvSpPr>
+        <p:spPr>
+          <a:xfrm>
+            <a:off x="9985248" y="3941064"/>
+            <a:ext cx="201168" cy="256032"/>
+          </a:xfrm>
+          <a:prstGeom prst="rect">
+            <a:avLst/>
+          </a:prstGeom>
+          <a:noFill/>
+          <a:ln/>
+        </p:spPr>
+        <p:txBody>
+          <a:bodyPr wrap="square" lIns="0" tIns="0" rIns="0" bIns="0" rtlCol="0" anchor="ctr"/>
+          <a:lstStyle/>
+          <a:p>
+            <a:pPr algn="ctr" indent="0" marL="0">
+              <a:buNone/>
+            </a:pPr>
+            <a:r>
+              <a:rPr lang="en-US" sz="1800" b="1" dirty="0">
+                <a:solidFill>
+                  <a:srgbClr val="0068B7"/>
+                </a:solidFill>
+                <a:latin typeface="Aptos" pitchFamily="34" charset="0"/>
+                <a:ea typeface="Aptos" pitchFamily="34" charset="-122"/>
+                <a:cs typeface="Aptos" pitchFamily="34" charset="-120"/>
+              </a:rPr>
+              <a:t>â†’</a:t>
+            </a:r>
+            <a:endParaRPr lang="en-US" sz="1800" dirty="0"/>
+          </a:p>
+        </p:txBody>
+      </p:sp>
+      <p:sp>
+        <p:nvSpPr>
+          <p:cNvPr id="19" name="Shape 17"/>
+          <p:cNvSpPr/>
+          <p:nvPr/>
+        </p:nvSpPr>
+        <p:spPr>
+          <a:xfrm>
+            <a:off x="10213848" y="3730752"/>
+            <a:ext cx="1033272" cy="749808"/>
+          </a:xfrm>
+          <a:prstGeom prst="roundRect">
+            <a:avLst>
+              <a:gd name="adj" fmla="val 14634"/>
+            </a:avLst>
+          </a:prstGeom>
+          <a:solidFill>
+            <a:srgbClr val="6A4CA3"/>
+          </a:solidFill>
+          <a:ln w="12700">
+            <a:solidFill>
+              <a:srgbClr val="6A4CA3"/>
+            </a:solidFill>
+            <a:prstDash val="solid"/>
+          </a:ln>
+        </p:spPr>
+      </p:sp>
+      <p:sp>
+        <p:nvSpPr>
+          <p:cNvPr id="20" name="Text 18"/>
+          <p:cNvSpPr/>
+          <p:nvPr/>
+        </p:nvSpPr>
+        <p:spPr>
+          <a:xfrm>
+            <a:off x="10287000" y="3922776"/>
+            <a:ext cx="886968" cy="310896"/>
+          </a:xfrm>
+          <a:prstGeom prst="rect">
+            <a:avLst/>
+          </a:prstGeom>
+          <a:noFill/>
+          <a:ln/>
+        </p:spPr>
+        <p:txBody>
+          <a:bodyPr wrap="square" lIns="0" tIns="0" rIns="0" bIns="0" rtlCol="0" anchor="ctr">
+            <a:normAutofit/>
+          </a:bodyPr>
+          <a:lstStyle/>
+          <a:p>
+            <a:pPr algn="ctr" indent="0" marL="0">
+              <a:buNone/>
+            </a:pPr>
+            <a:r>
+              <a:rPr lang="en-US" sz="1500" b="1" dirty="0">
+                <a:solidFill>
+                  <a:srgbClr val="FFFFFF"/>
+                </a:solidFill>
+                <a:latin typeface="Aptos" pitchFamily="34" charset="0"/>
+                <a:ea typeface="Aptos" pitchFamily="34" charset="-122"/>
+                <a:cs typeface="Aptos" pitchFamily="34" charset="-120"/>
+              </a:rPr>
+              <a:t>Document</a:t>
+            </a:r>
+            <a:endParaRPr lang="en-US" sz="1500" dirty="0"/>
           </a:p>
         </p:txBody>
       </p:sp>
@@ -9592,7 +10137,7 @@
                 <a:ea typeface="Aptos" pitchFamily="34" charset="-122"/>
                 <a:cs typeface="Aptos" pitchFamily="34" charset="-120"/>
               </a:rPr>
-              <a:t>© Paula Soper</a:t>
+              <a:t>Â© Paula Soper</a:t>
             </a:r>
             <a:endParaRPr lang="en-US" sz="800" dirty="0"/>
           </a:p>
@@ -9600,7 +10145,46 @@
       </p:sp>
       <p:sp>
         <p:nvSpPr>
-          <p:cNvPr id="7" name="Shape 5"/>
+          <p:cNvPr id="7" name="Text 5"/>
+          <p:cNvSpPr/>
+          <p:nvPr/>
+        </p:nvSpPr>
+        <p:spPr>
+          <a:xfrm>
+            <a:off x="11137392" y="6510528"/>
+            <a:ext cx="411480" cy="201168"/>
+          </a:xfrm>
+          <a:prstGeom prst="rect">
+            <a:avLst/>
+          </a:prstGeom>
+          <a:noFill/>
+          <a:ln/>
+        </p:spPr>
+        <p:txBody>
+          <a:bodyPr wrap="square" lIns="0" tIns="0" rIns="0" bIns="0" rtlCol="0" anchor="ctr"/>
+          <a:lstStyle/>
+          <a:p>
+            <a:pPr algn="r" indent="0" marL="0">
+              <a:buNone/>
+            </a:pPr>
+            <a:r>
+              <a:rPr lang="en-US" sz="900" dirty="0">
+                <a:solidFill>
+                  <a:srgbClr val="5F7181"/>
+                </a:solidFill>
+                <a:latin typeface="Aptos" pitchFamily="34" charset="0"/>
+                <a:ea typeface="Aptos" pitchFamily="34" charset="-122"/>
+                <a:cs typeface="Aptos" pitchFamily="34" charset="-120"/>
+              </a:rPr>
+              <a:t>20</a:t>
+            </a:r>
+            <a:endParaRPr lang="en-US" sz="900" dirty="0"/>
+          </a:p>
+        </p:txBody>
+      </p:sp>
+      <p:sp>
+        <p:nvSpPr>
+          <p:cNvPr id="8" name="Shape 6"/>
           <p:cNvSpPr/>
           <p:nvPr/>
         </p:nvSpPr>
@@ -9625,7 +10209,7 @@
       </p:sp>
       <p:sp>
         <p:nvSpPr>
-          <p:cNvPr id="8" name="Text 6"/>
+          <p:cNvPr id="9" name="Text 7"/>
           <p:cNvSpPr/>
           <p:nvPr/>
         </p:nvSpPr>
@@ -9664,14 +10248,14 @@
       </p:sp>
       <p:sp>
         <p:nvSpPr>
-          <p:cNvPr id="9" name="Text 7"/>
+          <p:cNvPr id="10" name="Text 8"/>
           <p:cNvSpPr/>
           <p:nvPr/>
         </p:nvSpPr>
         <p:spPr>
           <a:xfrm>
             <a:off x="640080" y="621792"/>
-            <a:ext cx="10881360" cy="566928"/>
+            <a:ext cx="10881360" cy="713232"/>
           </a:xfrm>
           <a:prstGeom prst="rect">
             <a:avLst/>
@@ -9689,7 +10273,7 @@
               <a:buNone/>
             </a:pPr>
             <a:r>
-              <a:rPr lang="en-US" sz="2700" b="1" dirty="0">
+              <a:rPr lang="en-US" sz="3400" b="1" dirty="0">
                 <a:solidFill>
                   <a:srgbClr val="003A63"/>
                 </a:solidFill>
@@ -9699,20 +10283,20 @@
               </a:rPr>
               <a:t>Practical Exercise</a:t>
             </a:r>
-            <a:endParaRPr lang="en-US" sz="2700" dirty="0"/>
-          </a:p>
-        </p:txBody>
-      </p:sp>
-      <p:sp>
-        <p:nvSpPr>
-          <p:cNvPr id="10" name="Text 8"/>
-          <p:cNvSpPr/>
-          <p:nvPr/>
-        </p:nvSpPr>
-        <p:spPr>
-          <a:xfrm>
-            <a:off x="868680" y="1417320"/>
-            <a:ext cx="6675120" cy="4434840"/>
+            <a:endParaRPr lang="en-US" sz="3400" dirty="0"/>
+          </a:p>
+        </p:txBody>
+      </p:sp>
+      <p:sp>
+        <p:nvSpPr>
+          <p:cNvPr id="11" name="Text 9"/>
+          <p:cNvSpPr/>
+          <p:nvPr/>
+        </p:nvSpPr>
+        <p:spPr>
+          <a:xfrm>
+            <a:off x="868680" y="1508760"/>
+            <a:ext cx="6537960" cy="4160520"/>
           </a:xfrm>
           <a:prstGeom prst="rect">
             <a:avLst/>
@@ -9727,7 +10311,7 @@
           <a:lstStyle/>
           <a:p>
             <a:r>
-              <a:rPr lang="en-US" sz="1700" dirty="0">
+              <a:rPr lang="en-US" sz="2100" dirty="0">
                 <a:solidFill>
                   <a:srgbClr val="17364A"/>
                 </a:solidFill>
@@ -9737,11 +10321,11 @@
               </a:rPr>
               <a:t>Create a privacy-preserving AI review worksheet for one proposed public health AI workflow.</a:t>
             </a:r>
-            <a:endParaRPr lang="en-US" sz="1700" dirty="0"/>
-          </a:p>
-          <a:p>
-            <a:r>
-              <a:rPr lang="en-US" sz="1700" dirty="0">
+            <a:endParaRPr lang="en-US" sz="2100" dirty="0"/>
+          </a:p>
+          <a:p>
+            <a:r>
+              <a:rPr lang="en-US" sz="2100" dirty="0">
                 <a:solidFill>
                   <a:srgbClr val="17364A"/>
                 </a:solidFill>
@@ -9749,13 +10333,13 @@
                 <a:ea typeface="Aptos" pitchFamily="34" charset="-122"/>
                 <a:cs typeface="Aptos" pitchFamily="34" charset="-120"/>
               </a:rPr>
-              <a:t>The worksheet should identify the data involved, the sensitivity level, the minimum necessary fields, the approved users,.</a:t>
-            </a:r>
-            <a:endParaRPr lang="en-US" sz="1700" dirty="0"/>
-          </a:p>
-          <a:p>
-            <a:r>
-              <a:rPr lang="en-US" sz="1700" dirty="0">
+              <a:t>The worksheet should identify the data involved, the sensitivity level, the minimum necessary fields,.</a:t>
+            </a:r>
+            <a:endParaRPr lang="en-US" sz="2100" dirty="0"/>
+          </a:p>
+          <a:p>
+            <a:r>
+              <a:rPr lang="en-US" sz="2100" dirty="0">
                 <a:solidFill>
                   <a:srgbClr val="17364A"/>
                 </a:solidFill>
@@ -9763,29 +10347,15 @@
                 <a:ea typeface="Aptos" pitchFamily="34" charset="-122"/>
                 <a:cs typeface="Aptos" pitchFamily="34" charset="-120"/>
               </a:rPr>
-              <a:t>The exercise should also identify residual risks and questions that need privacy, legal, security, or governance review.</a:t>
-            </a:r>
-            <a:endParaRPr lang="en-US" sz="1700" dirty="0"/>
-          </a:p>
-          <a:p>
-            <a:r>
-              <a:rPr lang="en-US" sz="1700" dirty="0">
-                <a:solidFill>
-                  <a:srgbClr val="17364A"/>
-                </a:solidFill>
-                <a:latin typeface="Aptos" pitchFamily="34" charset="0"/>
-                <a:ea typeface="Aptos" pitchFamily="34" charset="-122"/>
-                <a:cs typeface="Aptos" pitchFamily="34" charset="-120"/>
-              </a:rPr>
-              <a:t>Learners should pay special attention to free text, small-area data, rare conditions, linked datasets, vendor access, and.</a:t>
-            </a:r>
-            <a:endParaRPr lang="en-US" sz="1700" dirty="0"/>
-          </a:p>
-        </p:txBody>
-      </p:sp>
-      <p:sp>
-        <p:nvSpPr>
-          <p:cNvPr id="11" name="Shape 9"/>
+              <a:t>The exercise should also identify residual risks and questions that need privacy, legal, security, or.</a:t>
+            </a:r>
+            <a:endParaRPr lang="en-US" sz="2100" dirty="0"/>
+          </a:p>
+        </p:txBody>
+      </p:sp>
+      <p:sp>
+        <p:nvSpPr>
+          <p:cNvPr id="12" name="Shape 10"/>
           <p:cNvSpPr/>
           <p:nvPr/>
         </p:nvSpPr>
@@ -9812,14 +10382,14 @@
       </p:sp>
       <p:sp>
         <p:nvSpPr>
-          <p:cNvPr id="12" name="Text 10"/>
+          <p:cNvPr id="13" name="Text 11"/>
           <p:cNvSpPr/>
           <p:nvPr/>
         </p:nvSpPr>
         <p:spPr>
           <a:xfrm>
             <a:off x="8074152" y="1563624"/>
-            <a:ext cx="2825496" cy="201168"/>
+            <a:ext cx="2825496" cy="256032"/>
           </a:xfrm>
           <a:prstGeom prst="rect">
             <a:avLst/>
@@ -9835,7 +10405,7 @@
               <a:buNone/>
             </a:pPr>
             <a:r>
-              <a:rPr lang="en-US" sz="950" b="1" dirty="0">
+              <a:rPr lang="en-US" sz="1300" b="1" dirty="0">
                 <a:solidFill>
                   <a:srgbClr val="0068B7"/>
                 </a:solidFill>
@@ -9845,20 +10415,20 @@
               </a:rPr>
               <a:t>Key idea</a:t>
             </a:r>
-            <a:endParaRPr lang="en-US" sz="950" dirty="0"/>
-          </a:p>
-        </p:txBody>
-      </p:sp>
-      <p:sp>
-        <p:nvSpPr>
-          <p:cNvPr id="13" name="Text 11"/>
-          <p:cNvSpPr/>
-          <p:nvPr/>
-        </p:nvSpPr>
-        <p:spPr>
-          <a:xfrm>
-            <a:off x="8074152" y="1856232"/>
-            <a:ext cx="2825496" cy="1261872"/>
+            <a:endParaRPr lang="en-US" sz="1300" dirty="0"/>
+          </a:p>
+        </p:txBody>
+      </p:sp>
+      <p:sp>
+        <p:nvSpPr>
+          <p:cNvPr id="14" name="Text 12"/>
+          <p:cNvSpPr/>
+          <p:nvPr/>
+        </p:nvSpPr>
+        <p:spPr>
+          <a:xfrm>
+            <a:off x="8074152" y="1920240"/>
+            <a:ext cx="2825496" cy="1188720"/>
           </a:xfrm>
           <a:prstGeom prst="rect">
             <a:avLst/>
@@ -9876,7 +10446,7 @@
               <a:buNone/>
             </a:pPr>
             <a:r>
-              <a:rPr lang="en-US" sz="1250" dirty="0">
+              <a:rPr lang="en-US" sz="1550" dirty="0">
                 <a:solidFill>
                   <a:srgbClr val="17364A"/>
                 </a:solidFill>
@@ -9886,13 +10456,13 @@
               </a:rPr>
               <a:t>Create a privacy-preserving AI review worksheet for one proposed public health AI workflow.</a:t>
             </a:r>
-            <a:endParaRPr lang="en-US" sz="1250" dirty="0"/>
-          </a:p>
-        </p:txBody>
-      </p:sp>
-      <p:sp>
-        <p:nvSpPr>
-          <p:cNvPr id="14" name="Shape 12"/>
+            <a:endParaRPr lang="en-US" sz="1550" dirty="0"/>
+          </a:p>
+        </p:txBody>
+      </p:sp>
+      <p:sp>
+        <p:nvSpPr>
+          <p:cNvPr id="15" name="Shape 13"/>
           <p:cNvSpPr/>
           <p:nvPr/>
         </p:nvSpPr>
@@ -9919,14 +10489,14 @@
       </p:sp>
       <p:sp>
         <p:nvSpPr>
-          <p:cNvPr id="15" name="Text 13"/>
+          <p:cNvPr id="16" name="Text 14"/>
           <p:cNvSpPr/>
           <p:nvPr/>
         </p:nvSpPr>
         <p:spPr>
           <a:xfrm>
             <a:off x="8074152" y="3666744"/>
-            <a:ext cx="2825496" cy="201168"/>
+            <a:ext cx="2825496" cy="256032"/>
           </a:xfrm>
           <a:prstGeom prst="rect">
             <a:avLst/>
@@ -9942,7 +10512,7 @@
               <a:buNone/>
             </a:pPr>
             <a:r>
-              <a:rPr lang="en-US" sz="950" b="1" dirty="0">
+              <a:rPr lang="en-US" sz="1300" b="1" dirty="0">
                 <a:solidFill>
                   <a:srgbClr val="0068B7"/>
                 </a:solidFill>
@@ -9952,20 +10522,20 @@
               </a:rPr>
               <a:t>Use this for</a:t>
             </a:r>
-            <a:endParaRPr lang="en-US" sz="950" dirty="0"/>
-          </a:p>
-        </p:txBody>
-      </p:sp>
-      <p:sp>
-        <p:nvSpPr>
-          <p:cNvPr id="16" name="Text 14"/>
-          <p:cNvSpPr/>
-          <p:nvPr/>
-        </p:nvSpPr>
-        <p:spPr>
-          <a:xfrm>
-            <a:off x="8074152" y="3959352"/>
-            <a:ext cx="2825496" cy="1170432"/>
+            <a:endParaRPr lang="en-US" sz="1300" dirty="0"/>
+          </a:p>
+        </p:txBody>
+      </p:sp>
+      <p:sp>
+        <p:nvSpPr>
+          <p:cNvPr id="17" name="Text 15"/>
+          <p:cNvSpPr/>
+          <p:nvPr/>
+        </p:nvSpPr>
+        <p:spPr>
+          <a:xfrm>
+            <a:off x="8074152" y="4023360"/>
+            <a:ext cx="2825496" cy="1097280"/>
           </a:xfrm>
           <a:prstGeom prst="rect">
             <a:avLst/>
@@ -9983,7 +10553,7 @@
               <a:buNone/>
             </a:pPr>
             <a:r>
-              <a:rPr lang="en-US" sz="1250" dirty="0">
+              <a:rPr lang="en-US" sz="1550" dirty="0">
                 <a:solidFill>
                   <a:srgbClr val="17364A"/>
                 </a:solidFill>
@@ -9993,7 +10563,7 @@
               </a:rPr>
               <a:t>Connect the concept to public health decisions, safeguards, documentation, or implementation work.</a:t>
             </a:r>
-            <a:endParaRPr lang="en-US" sz="1250" dirty="0"/>
+            <a:endParaRPr lang="en-US" sz="1550" dirty="0"/>
           </a:p>
         </p:txBody>
       </p:sp>
@@ -10190,7 +10760,7 @@
                 <a:ea typeface="Aptos" pitchFamily="34" charset="-122"/>
                 <a:cs typeface="Aptos" pitchFamily="34" charset="-120"/>
               </a:rPr>
-              <a:t>© Paula Soper</a:t>
+              <a:t>Â© Paula Soper</a:t>
             </a:r>
             <a:endParaRPr lang="en-US" sz="800" dirty="0"/>
           </a:p>
@@ -10198,7 +10768,46 @@
       </p:sp>
       <p:sp>
         <p:nvSpPr>
-          <p:cNvPr id="7" name="Shape 5"/>
+          <p:cNvPr id="7" name="Text 5"/>
+          <p:cNvSpPr/>
+          <p:nvPr/>
+        </p:nvSpPr>
+        <p:spPr>
+          <a:xfrm>
+            <a:off x="11137392" y="6510528"/>
+            <a:ext cx="411480" cy="201168"/>
+          </a:xfrm>
+          <a:prstGeom prst="rect">
+            <a:avLst/>
+          </a:prstGeom>
+          <a:noFill/>
+          <a:ln/>
+        </p:spPr>
+        <p:txBody>
+          <a:bodyPr wrap="square" lIns="0" tIns="0" rIns="0" bIns="0" rtlCol="0" anchor="ctr"/>
+          <a:lstStyle/>
+          <a:p>
+            <a:pPr algn="r" indent="0" marL="0">
+              <a:buNone/>
+            </a:pPr>
+            <a:r>
+              <a:rPr lang="en-US" sz="900" dirty="0">
+                <a:solidFill>
+                  <a:srgbClr val="5F7181"/>
+                </a:solidFill>
+                <a:latin typeface="Aptos" pitchFamily="34" charset="0"/>
+                <a:ea typeface="Aptos" pitchFamily="34" charset="-122"/>
+                <a:cs typeface="Aptos" pitchFamily="34" charset="-120"/>
+              </a:rPr>
+              <a:t>21</a:t>
+            </a:r>
+            <a:endParaRPr lang="en-US" sz="900" dirty="0"/>
+          </a:p>
+        </p:txBody>
+      </p:sp>
+      <p:sp>
+        <p:nvSpPr>
+          <p:cNvPr id="8" name="Shape 6"/>
           <p:cNvSpPr/>
           <p:nvPr/>
         </p:nvSpPr>
@@ -10223,7 +10832,7 @@
       </p:sp>
       <p:sp>
         <p:nvSpPr>
-          <p:cNvPr id="8" name="Text 6"/>
+          <p:cNvPr id="9" name="Text 7"/>
           <p:cNvSpPr/>
           <p:nvPr/>
         </p:nvSpPr>
@@ -10262,14 +10871,14 @@
       </p:sp>
       <p:sp>
         <p:nvSpPr>
-          <p:cNvPr id="9" name="Text 7"/>
+          <p:cNvPr id="10" name="Text 8"/>
           <p:cNvSpPr/>
           <p:nvPr/>
         </p:nvSpPr>
         <p:spPr>
           <a:xfrm>
             <a:off x="640080" y="621792"/>
-            <a:ext cx="10881360" cy="566928"/>
+            <a:ext cx="10881360" cy="713232"/>
           </a:xfrm>
           <a:prstGeom prst="rect">
             <a:avLst/>
@@ -10287,7 +10896,7 @@
               <a:buNone/>
             </a:pPr>
             <a:r>
-              <a:rPr lang="en-US" sz="2700" b="1" dirty="0">
+              <a:rPr lang="en-US" sz="3400" b="1" dirty="0">
                 <a:solidFill>
                   <a:srgbClr val="003A63"/>
                 </a:solidFill>
@@ -10297,20 +10906,20 @@
               </a:rPr>
               <a:t>Expected Artifact or Evidence</a:t>
             </a:r>
-            <a:endParaRPr lang="en-US" sz="2700" dirty="0"/>
-          </a:p>
-        </p:txBody>
-      </p:sp>
-      <p:sp>
-        <p:nvSpPr>
-          <p:cNvPr id="10" name="Text 8"/>
-          <p:cNvSpPr/>
-          <p:nvPr/>
-        </p:nvSpPr>
-        <p:spPr>
-          <a:xfrm>
-            <a:off x="868680" y="1417320"/>
-            <a:ext cx="6675120" cy="4434840"/>
+            <a:endParaRPr lang="en-US" sz="3400" dirty="0"/>
+          </a:p>
+        </p:txBody>
+      </p:sp>
+      <p:sp>
+        <p:nvSpPr>
+          <p:cNvPr id="11" name="Text 9"/>
+          <p:cNvSpPr/>
+          <p:nvPr/>
+        </p:nvSpPr>
+        <p:spPr>
+          <a:xfrm>
+            <a:off x="868680" y="1508760"/>
+            <a:ext cx="6537960" cy="4160520"/>
           </a:xfrm>
           <a:prstGeom prst="rect">
             <a:avLst/>
@@ -10325,7 +10934,7 @@
           <a:lstStyle/>
           <a:p>
             <a:r>
-              <a:rPr lang="en-US" sz="1700" dirty="0">
+              <a:rPr lang="en-US" sz="2100" dirty="0">
                 <a:solidFill>
                   <a:srgbClr val="17364A"/>
                 </a:solidFill>
@@ -10333,15 +10942,15 @@
                 <a:ea typeface="Aptos" pitchFamily="34" charset="-122"/>
                 <a:cs typeface="Aptos" pitchFamily="34" charset="-120"/>
               </a:rPr>
-              <a:t>The expected artifact is a privacy-preserving AI review worksheet with a brief summary of the proposed workflow, data-use.</a:t>
-            </a:r>
-            <a:endParaRPr lang="en-US" sz="1700" dirty="0"/>
-          </a:p>
-        </p:txBody>
-      </p:sp>
-      <p:sp>
-        <p:nvSpPr>
-          <p:cNvPr id="11" name="Shape 9"/>
+              <a:t>The expected artifact is a privacy-preserving AI review worksheet with a brief summary of the proposed.</a:t>
+            </a:r>
+            <a:endParaRPr lang="en-US" sz="2100" dirty="0"/>
+          </a:p>
+        </p:txBody>
+      </p:sp>
+      <p:sp>
+        <p:nvSpPr>
+          <p:cNvPr id="12" name="Shape 10"/>
           <p:cNvSpPr/>
           <p:nvPr/>
         </p:nvSpPr>
@@ -10368,14 +10977,14 @@
       </p:sp>
       <p:sp>
         <p:nvSpPr>
-          <p:cNvPr id="12" name="Text 10"/>
+          <p:cNvPr id="13" name="Text 11"/>
           <p:cNvSpPr/>
           <p:nvPr/>
         </p:nvSpPr>
         <p:spPr>
           <a:xfrm>
             <a:off x="8074152" y="1563624"/>
-            <a:ext cx="2825496" cy="201168"/>
+            <a:ext cx="2825496" cy="256032"/>
           </a:xfrm>
           <a:prstGeom prst="rect">
             <a:avLst/>
@@ -10391,7 +11000,7 @@
               <a:buNone/>
             </a:pPr>
             <a:r>
-              <a:rPr lang="en-US" sz="950" b="1" dirty="0">
+              <a:rPr lang="en-US" sz="1300" b="1" dirty="0">
                 <a:solidFill>
                   <a:srgbClr val="0068B7"/>
                 </a:solidFill>
@@ -10401,20 +11010,20 @@
               </a:rPr>
               <a:t>Key idea</a:t>
             </a:r>
-            <a:endParaRPr lang="en-US" sz="950" dirty="0"/>
-          </a:p>
-        </p:txBody>
-      </p:sp>
-      <p:sp>
-        <p:nvSpPr>
-          <p:cNvPr id="13" name="Text 11"/>
-          <p:cNvSpPr/>
-          <p:nvPr/>
-        </p:nvSpPr>
-        <p:spPr>
-          <a:xfrm>
-            <a:off x="8074152" y="1856232"/>
-            <a:ext cx="2825496" cy="1261872"/>
+            <a:endParaRPr lang="en-US" sz="1300" dirty="0"/>
+          </a:p>
+        </p:txBody>
+      </p:sp>
+      <p:sp>
+        <p:nvSpPr>
+          <p:cNvPr id="14" name="Text 12"/>
+          <p:cNvSpPr/>
+          <p:nvPr/>
+        </p:nvSpPr>
+        <p:spPr>
+          <a:xfrm>
+            <a:off x="8074152" y="1920240"/>
+            <a:ext cx="2825496" cy="1188720"/>
           </a:xfrm>
           <a:prstGeom prst="rect">
             <a:avLst/>
@@ -10432,7 +11041,7 @@
               <a:buNone/>
             </a:pPr>
             <a:r>
-              <a:rPr lang="en-US" sz="1250" dirty="0">
+              <a:rPr lang="en-US" sz="1550" dirty="0">
                 <a:solidFill>
                   <a:srgbClr val="17364A"/>
                 </a:solidFill>
@@ -10440,15 +11049,15 @@
                 <a:ea typeface="Aptos" pitchFamily="34" charset="-122"/>
                 <a:cs typeface="Aptos" pitchFamily="34" charset="-120"/>
               </a:rPr>
-              <a:t>The expected artifact is a privacy-preserving AI review worksheet with a brief summary of the proposed workflow, data-use.</a:t>
-            </a:r>
-            <a:endParaRPr lang="en-US" sz="1250" dirty="0"/>
-          </a:p>
-        </p:txBody>
-      </p:sp>
-      <p:sp>
-        <p:nvSpPr>
-          <p:cNvPr id="14" name="Shape 12"/>
+              <a:t>The expected artifact is a privacy-preserving AI review worksheet with a brief summary of the proposed.</a:t>
+            </a:r>
+            <a:endParaRPr lang="en-US" sz="1550" dirty="0"/>
+          </a:p>
+        </p:txBody>
+      </p:sp>
+      <p:sp>
+        <p:nvSpPr>
+          <p:cNvPr id="15" name="Shape 13"/>
           <p:cNvSpPr/>
           <p:nvPr/>
         </p:nvSpPr>
@@ -10475,14 +11084,14 @@
       </p:sp>
       <p:sp>
         <p:nvSpPr>
-          <p:cNvPr id="15" name="Text 13"/>
+          <p:cNvPr id="16" name="Text 14"/>
           <p:cNvSpPr/>
           <p:nvPr/>
         </p:nvSpPr>
         <p:spPr>
           <a:xfrm>
             <a:off x="8074152" y="3666744"/>
-            <a:ext cx="2825496" cy="201168"/>
+            <a:ext cx="2825496" cy="256032"/>
           </a:xfrm>
           <a:prstGeom prst="rect">
             <a:avLst/>
@@ -10498,7 +11107,7 @@
               <a:buNone/>
             </a:pPr>
             <a:r>
-              <a:rPr lang="en-US" sz="950" b="1" dirty="0">
+              <a:rPr lang="en-US" sz="1300" b="1" dirty="0">
                 <a:solidFill>
                   <a:srgbClr val="0068B7"/>
                 </a:solidFill>
@@ -10508,20 +11117,20 @@
               </a:rPr>
               <a:t>Use this for</a:t>
             </a:r>
-            <a:endParaRPr lang="en-US" sz="950" dirty="0"/>
-          </a:p>
-        </p:txBody>
-      </p:sp>
-      <p:sp>
-        <p:nvSpPr>
-          <p:cNvPr id="16" name="Text 14"/>
-          <p:cNvSpPr/>
-          <p:nvPr/>
-        </p:nvSpPr>
-        <p:spPr>
-          <a:xfrm>
-            <a:off x="8074152" y="3959352"/>
-            <a:ext cx="2825496" cy="1170432"/>
+            <a:endParaRPr lang="en-US" sz="1300" dirty="0"/>
+          </a:p>
+        </p:txBody>
+      </p:sp>
+      <p:sp>
+        <p:nvSpPr>
+          <p:cNvPr id="17" name="Text 15"/>
+          <p:cNvSpPr/>
+          <p:nvPr/>
+        </p:nvSpPr>
+        <p:spPr>
+          <a:xfrm>
+            <a:off x="8074152" y="4023360"/>
+            <a:ext cx="2825496" cy="1097280"/>
           </a:xfrm>
           <a:prstGeom prst="rect">
             <a:avLst/>
@@ -10539,7 +11148,7 @@
               <a:buNone/>
             </a:pPr>
             <a:r>
-              <a:rPr lang="en-US" sz="1250" dirty="0">
+              <a:rPr lang="en-US" sz="1550" dirty="0">
                 <a:solidFill>
                   <a:srgbClr val="17364A"/>
                 </a:solidFill>
@@ -10549,7 +11158,7 @@
               </a:rPr>
               <a:t>Connect the concept to public health decisions, safeguards, documentation, or implementation work.</a:t>
             </a:r>
-            <a:endParaRPr lang="en-US" sz="1250" dirty="0"/>
+            <a:endParaRPr lang="en-US" sz="1550" dirty="0"/>
           </a:p>
         </p:txBody>
       </p:sp>
@@ -10746,7 +11355,7 @@
                 <a:ea typeface="Aptos" pitchFamily="34" charset="-122"/>
                 <a:cs typeface="Aptos" pitchFamily="34" charset="-120"/>
               </a:rPr>
-              <a:t>© Paula Soper</a:t>
+              <a:t>Â© Paula Soper</a:t>
             </a:r>
             <a:endParaRPr lang="en-US" sz="800" dirty="0"/>
           </a:p>
@@ -10754,7 +11363,46 @@
       </p:sp>
       <p:sp>
         <p:nvSpPr>
-          <p:cNvPr id="7" name="Shape 5"/>
+          <p:cNvPr id="7" name="Text 5"/>
+          <p:cNvSpPr/>
+          <p:nvPr/>
+        </p:nvSpPr>
+        <p:spPr>
+          <a:xfrm>
+            <a:off x="11137392" y="6510528"/>
+            <a:ext cx="411480" cy="201168"/>
+          </a:xfrm>
+          <a:prstGeom prst="rect">
+            <a:avLst/>
+          </a:prstGeom>
+          <a:noFill/>
+          <a:ln/>
+        </p:spPr>
+        <p:txBody>
+          <a:bodyPr wrap="square" lIns="0" tIns="0" rIns="0" bIns="0" rtlCol="0" anchor="ctr"/>
+          <a:lstStyle/>
+          <a:p>
+            <a:pPr algn="r" indent="0" marL="0">
+              <a:buNone/>
+            </a:pPr>
+            <a:r>
+              <a:rPr lang="en-US" sz="900" dirty="0">
+                <a:solidFill>
+                  <a:srgbClr val="5F7181"/>
+                </a:solidFill>
+                <a:latin typeface="Aptos" pitchFamily="34" charset="0"/>
+                <a:ea typeface="Aptos" pitchFamily="34" charset="-122"/>
+                <a:cs typeface="Aptos" pitchFamily="34" charset="-120"/>
+              </a:rPr>
+              <a:t>22</a:t>
+            </a:r>
+            <a:endParaRPr lang="en-US" sz="900" dirty="0"/>
+          </a:p>
+        </p:txBody>
+      </p:sp>
+      <p:sp>
+        <p:nvSpPr>
+          <p:cNvPr id="8" name="Shape 6"/>
           <p:cNvSpPr/>
           <p:nvPr/>
         </p:nvSpPr>
@@ -10779,7 +11427,7 @@
       </p:sp>
       <p:sp>
         <p:nvSpPr>
-          <p:cNvPr id="8" name="Text 6"/>
+          <p:cNvPr id="9" name="Text 7"/>
           <p:cNvSpPr/>
           <p:nvPr/>
         </p:nvSpPr>
@@ -10818,14 +11466,14 @@
       </p:sp>
       <p:sp>
         <p:nvSpPr>
-          <p:cNvPr id="9" name="Text 7"/>
+          <p:cNvPr id="10" name="Text 8"/>
           <p:cNvSpPr/>
           <p:nvPr/>
         </p:nvSpPr>
         <p:spPr>
           <a:xfrm>
             <a:off x="640080" y="621792"/>
-            <a:ext cx="10881360" cy="566928"/>
+            <a:ext cx="10881360" cy="713232"/>
           </a:xfrm>
           <a:prstGeom prst="rect">
             <a:avLst/>
@@ -10843,7 +11491,7 @@
               <a:buNone/>
             </a:pPr>
             <a:r>
-              <a:rPr lang="en-US" sz="2700" b="1" dirty="0">
+              <a:rPr lang="en-US" sz="3400" b="1" dirty="0">
                 <a:solidFill>
                   <a:srgbClr val="003A63"/>
                 </a:solidFill>
@@ -10853,20 +11501,20 @@
               </a:rPr>
               <a:t>Expected Assignment</a:t>
             </a:r>
-            <a:endParaRPr lang="en-US" sz="2700" dirty="0"/>
-          </a:p>
-        </p:txBody>
-      </p:sp>
-      <p:sp>
-        <p:nvSpPr>
-          <p:cNvPr id="10" name="Text 8"/>
-          <p:cNvSpPr/>
-          <p:nvPr/>
-        </p:nvSpPr>
-        <p:spPr>
-          <a:xfrm>
-            <a:off x="868680" y="1417320"/>
-            <a:ext cx="6675120" cy="4434840"/>
+            <a:endParaRPr lang="en-US" sz="3400" dirty="0"/>
+          </a:p>
+        </p:txBody>
+      </p:sp>
+      <p:sp>
+        <p:nvSpPr>
+          <p:cNvPr id="11" name="Text 9"/>
+          <p:cNvSpPr/>
+          <p:nvPr/>
+        </p:nvSpPr>
+        <p:spPr>
+          <a:xfrm>
+            <a:off x="868680" y="1508760"/>
+            <a:ext cx="6537960" cy="4160520"/>
           </a:xfrm>
           <a:prstGeom prst="rect">
             <a:avLst/>
@@ -10881,7 +11529,7 @@
           <a:lstStyle/>
           <a:p>
             <a:r>
-              <a:rPr lang="en-US" sz="1700" dirty="0">
+              <a:rPr lang="en-US" sz="2100" dirty="0">
                 <a:solidFill>
                   <a:srgbClr val="17364A"/>
                 </a:solidFill>
@@ -10889,15 +11537,15 @@
                 <a:ea typeface="Aptos" pitchFamily="34" charset="-122"/>
                 <a:cs typeface="Aptos" pitchFamily="34" charset="-120"/>
               </a:rPr>
-              <a:t>The expected artifact is a privacy-preserving AI review worksheet with a brief summary of the proposed workflow, data-use.</a:t>
-            </a:r>
-            <a:endParaRPr lang="en-US" sz="1700" dirty="0"/>
-          </a:p>
-        </p:txBody>
-      </p:sp>
-      <p:sp>
-        <p:nvSpPr>
-          <p:cNvPr id="11" name="Shape 9"/>
+              <a:t>The expected artifact is a privacy-preserving AI review worksheet with a brief summary of the proposed.</a:t>
+            </a:r>
+            <a:endParaRPr lang="en-US" sz="2100" dirty="0"/>
+          </a:p>
+        </p:txBody>
+      </p:sp>
+      <p:sp>
+        <p:nvSpPr>
+          <p:cNvPr id="12" name="Shape 10"/>
           <p:cNvSpPr/>
           <p:nvPr/>
         </p:nvSpPr>
@@ -10924,14 +11572,14 @@
       </p:sp>
       <p:sp>
         <p:nvSpPr>
-          <p:cNvPr id="12" name="Text 10"/>
+          <p:cNvPr id="13" name="Text 11"/>
           <p:cNvSpPr/>
           <p:nvPr/>
         </p:nvSpPr>
         <p:spPr>
           <a:xfrm>
             <a:off x="8074152" y="1563624"/>
-            <a:ext cx="2825496" cy="201168"/>
+            <a:ext cx="2825496" cy="256032"/>
           </a:xfrm>
           <a:prstGeom prst="rect">
             <a:avLst/>
@@ -10947,7 +11595,7 @@
               <a:buNone/>
             </a:pPr>
             <a:r>
-              <a:rPr lang="en-US" sz="950" b="1" dirty="0">
+              <a:rPr lang="en-US" sz="1300" b="1" dirty="0">
                 <a:solidFill>
                   <a:srgbClr val="0068B7"/>
                 </a:solidFill>
@@ -10957,20 +11605,20 @@
               </a:rPr>
               <a:t>Key idea</a:t>
             </a:r>
-            <a:endParaRPr lang="en-US" sz="950" dirty="0"/>
-          </a:p>
-        </p:txBody>
-      </p:sp>
-      <p:sp>
-        <p:nvSpPr>
-          <p:cNvPr id="13" name="Text 11"/>
-          <p:cNvSpPr/>
-          <p:nvPr/>
-        </p:nvSpPr>
-        <p:spPr>
-          <a:xfrm>
-            <a:off x="8074152" y="1856232"/>
-            <a:ext cx="2825496" cy="1261872"/>
+            <a:endParaRPr lang="en-US" sz="1300" dirty="0"/>
+          </a:p>
+        </p:txBody>
+      </p:sp>
+      <p:sp>
+        <p:nvSpPr>
+          <p:cNvPr id="14" name="Text 12"/>
+          <p:cNvSpPr/>
+          <p:nvPr/>
+        </p:nvSpPr>
+        <p:spPr>
+          <a:xfrm>
+            <a:off x="8074152" y="1920240"/>
+            <a:ext cx="2825496" cy="1188720"/>
           </a:xfrm>
           <a:prstGeom prst="rect">
             <a:avLst/>
@@ -10988,7 +11636,7 @@
               <a:buNone/>
             </a:pPr>
             <a:r>
-              <a:rPr lang="en-US" sz="1250" dirty="0">
+              <a:rPr lang="en-US" sz="1550" dirty="0">
                 <a:solidFill>
                   <a:srgbClr val="17364A"/>
                 </a:solidFill>
@@ -10996,15 +11644,15 @@
                 <a:ea typeface="Aptos" pitchFamily="34" charset="-122"/>
                 <a:cs typeface="Aptos" pitchFamily="34" charset="-120"/>
               </a:rPr>
-              <a:t>The expected artifact is a privacy-preserving AI review worksheet with a brief summary of the proposed workflow, data-use.</a:t>
-            </a:r>
-            <a:endParaRPr lang="en-US" sz="1250" dirty="0"/>
-          </a:p>
-        </p:txBody>
-      </p:sp>
-      <p:sp>
-        <p:nvSpPr>
-          <p:cNvPr id="14" name="Shape 12"/>
+              <a:t>The expected artifact is a privacy-preserving AI review worksheet with a brief summary of the proposed.</a:t>
+            </a:r>
+            <a:endParaRPr lang="en-US" sz="1550" dirty="0"/>
+          </a:p>
+        </p:txBody>
+      </p:sp>
+      <p:sp>
+        <p:nvSpPr>
+          <p:cNvPr id="15" name="Shape 13"/>
           <p:cNvSpPr/>
           <p:nvPr/>
         </p:nvSpPr>
@@ -11031,14 +11679,14 @@
       </p:sp>
       <p:sp>
         <p:nvSpPr>
-          <p:cNvPr id="15" name="Text 13"/>
+          <p:cNvPr id="16" name="Text 14"/>
           <p:cNvSpPr/>
           <p:nvPr/>
         </p:nvSpPr>
         <p:spPr>
           <a:xfrm>
             <a:off x="8074152" y="3666744"/>
-            <a:ext cx="2825496" cy="201168"/>
+            <a:ext cx="2825496" cy="256032"/>
           </a:xfrm>
           <a:prstGeom prst="rect">
             <a:avLst/>
@@ -11054,7 +11702,7 @@
               <a:buNone/>
             </a:pPr>
             <a:r>
-              <a:rPr lang="en-US" sz="950" b="1" dirty="0">
+              <a:rPr lang="en-US" sz="1300" b="1" dirty="0">
                 <a:solidFill>
                   <a:srgbClr val="0068B7"/>
                 </a:solidFill>
@@ -11064,20 +11712,20 @@
               </a:rPr>
               <a:t>Use this for</a:t>
             </a:r>
-            <a:endParaRPr lang="en-US" sz="950" dirty="0"/>
-          </a:p>
-        </p:txBody>
-      </p:sp>
-      <p:sp>
-        <p:nvSpPr>
-          <p:cNvPr id="16" name="Text 14"/>
-          <p:cNvSpPr/>
-          <p:nvPr/>
-        </p:nvSpPr>
-        <p:spPr>
-          <a:xfrm>
-            <a:off x="8074152" y="3959352"/>
-            <a:ext cx="2825496" cy="1170432"/>
+            <a:endParaRPr lang="en-US" sz="1300" dirty="0"/>
+          </a:p>
+        </p:txBody>
+      </p:sp>
+      <p:sp>
+        <p:nvSpPr>
+          <p:cNvPr id="17" name="Text 15"/>
+          <p:cNvSpPr/>
+          <p:nvPr/>
+        </p:nvSpPr>
+        <p:spPr>
+          <a:xfrm>
+            <a:off x="8074152" y="4023360"/>
+            <a:ext cx="2825496" cy="1097280"/>
           </a:xfrm>
           <a:prstGeom prst="rect">
             <a:avLst/>
@@ -11095,7 +11743,7 @@
               <a:buNone/>
             </a:pPr>
             <a:r>
-              <a:rPr lang="en-US" sz="1250" dirty="0">
+              <a:rPr lang="en-US" sz="1550" dirty="0">
                 <a:solidFill>
                   <a:srgbClr val="17364A"/>
                 </a:solidFill>
@@ -11105,7 +11753,7 @@
               </a:rPr>
               <a:t>Connect the concept to public health decisions, safeguards, documentation, or implementation work.</a:t>
             </a:r>
-            <a:endParaRPr lang="en-US" sz="1250" dirty="0"/>
+            <a:endParaRPr lang="en-US" sz="1550" dirty="0"/>
           </a:p>
         </p:txBody>
       </p:sp>
@@ -11302,7 +11950,7 @@
                 <a:ea typeface="Aptos" pitchFamily="34" charset="-122"/>
                 <a:cs typeface="Aptos" pitchFamily="34" charset="-120"/>
               </a:rPr>
-              <a:t>© Paula Soper</a:t>
+              <a:t>Â© Paula Soper</a:t>
             </a:r>
             <a:endParaRPr lang="en-US" sz="800" dirty="0"/>
           </a:p>
@@ -11310,7 +11958,46 @@
       </p:sp>
       <p:sp>
         <p:nvSpPr>
-          <p:cNvPr id="7" name="Shape 5"/>
+          <p:cNvPr id="7" name="Text 5"/>
+          <p:cNvSpPr/>
+          <p:nvPr/>
+        </p:nvSpPr>
+        <p:spPr>
+          <a:xfrm>
+            <a:off x="11137392" y="6510528"/>
+            <a:ext cx="411480" cy="201168"/>
+          </a:xfrm>
+          <a:prstGeom prst="rect">
+            <a:avLst/>
+          </a:prstGeom>
+          <a:noFill/>
+          <a:ln/>
+        </p:spPr>
+        <p:txBody>
+          <a:bodyPr wrap="square" lIns="0" tIns="0" rIns="0" bIns="0" rtlCol="0" anchor="ctr"/>
+          <a:lstStyle/>
+          <a:p>
+            <a:pPr algn="r" indent="0" marL="0">
+              <a:buNone/>
+            </a:pPr>
+            <a:r>
+              <a:rPr lang="en-US" sz="900" dirty="0">
+                <a:solidFill>
+                  <a:srgbClr val="5F7181"/>
+                </a:solidFill>
+                <a:latin typeface="Aptos" pitchFamily="34" charset="0"/>
+                <a:ea typeface="Aptos" pitchFamily="34" charset="-122"/>
+                <a:cs typeface="Aptos" pitchFamily="34" charset="-120"/>
+              </a:rPr>
+              <a:t>23</a:t>
+            </a:r>
+            <a:endParaRPr lang="en-US" sz="900" dirty="0"/>
+          </a:p>
+        </p:txBody>
+      </p:sp>
+      <p:sp>
+        <p:nvSpPr>
+          <p:cNvPr id="8" name="Shape 6"/>
           <p:cNvSpPr/>
           <p:nvPr/>
         </p:nvSpPr>
@@ -11335,7 +12022,7 @@
       </p:sp>
       <p:sp>
         <p:nvSpPr>
-          <p:cNvPr id="8" name="Text 6"/>
+          <p:cNvPr id="9" name="Text 7"/>
           <p:cNvSpPr/>
           <p:nvPr/>
         </p:nvSpPr>
@@ -11374,14 +12061,14 @@
       </p:sp>
       <p:sp>
         <p:nvSpPr>
-          <p:cNvPr id="9" name="Text 7"/>
+          <p:cNvPr id="10" name="Text 8"/>
           <p:cNvSpPr/>
           <p:nvPr/>
         </p:nvSpPr>
         <p:spPr>
           <a:xfrm>
             <a:off x="640080" y="621792"/>
-            <a:ext cx="10881360" cy="566928"/>
+            <a:ext cx="10881360" cy="713232"/>
           </a:xfrm>
           <a:prstGeom prst="rect">
             <a:avLst/>
@@ -11399,7 +12086,7 @@
               <a:buNone/>
             </a:pPr>
             <a:r>
-              <a:rPr lang="en-US" sz="2700" b="1" dirty="0">
+              <a:rPr lang="en-US" sz="3400" b="1" dirty="0">
                 <a:solidFill>
                   <a:srgbClr val="003A63"/>
                 </a:solidFill>
@@ -11409,20 +12096,20 @@
               </a:rPr>
               <a:t>Knowledge Check</a:t>
             </a:r>
-            <a:endParaRPr lang="en-US" sz="2700" dirty="0"/>
-          </a:p>
-        </p:txBody>
-      </p:sp>
-      <p:sp>
-        <p:nvSpPr>
-          <p:cNvPr id="10" name="Text 8"/>
-          <p:cNvSpPr/>
-          <p:nvPr/>
-        </p:nvSpPr>
-        <p:spPr>
-          <a:xfrm>
-            <a:off x="868680" y="1417320"/>
-            <a:ext cx="6675120" cy="4434840"/>
+            <a:endParaRPr lang="en-US" sz="3400" dirty="0"/>
+          </a:p>
+        </p:txBody>
+      </p:sp>
+      <p:sp>
+        <p:nvSpPr>
+          <p:cNvPr id="11" name="Text 9"/>
+          <p:cNvSpPr/>
+          <p:nvPr/>
+        </p:nvSpPr>
+        <p:spPr>
+          <a:xfrm>
+            <a:off x="868680" y="1508760"/>
+            <a:ext cx="6537960" cy="4160520"/>
           </a:xfrm>
           <a:prstGeom prst="rect">
             <a:avLst/>
@@ -11437,7 +12124,7 @@
           <a:lstStyle/>
           <a:p>
             <a:r>
-              <a:rPr lang="en-US" sz="1700" dirty="0">
+              <a:rPr lang="en-US" sz="2100" dirty="0">
                 <a:solidFill>
                   <a:srgbClr val="17364A"/>
                 </a:solidFill>
@@ -11447,11 +12134,11 @@
               </a:rPr>
               <a:t>1. Which statement best describes de-identification in public health AI?</a:t>
             </a:r>
-            <a:endParaRPr lang="en-US" sz="1700" dirty="0"/>
-          </a:p>
-          <a:p>
-            <a:r>
-              <a:rPr lang="en-US" sz="1700" dirty="0">
+            <a:endParaRPr lang="en-US" sz="2100" dirty="0"/>
+          </a:p>
+          <a:p>
+            <a:r>
+              <a:rPr lang="en-US" sz="2100" dirty="0">
                 <a:solidFill>
                   <a:srgbClr val="17364A"/>
                 </a:solidFill>
@@ -11461,11 +12148,11 @@
               </a:rPr>
               <a:t>2. Why can AI increase re-identification risk?</a:t>
             </a:r>
-            <a:endParaRPr lang="en-US" sz="1700" dirty="0"/>
-          </a:p>
-          <a:p>
-            <a:r>
-              <a:rPr lang="en-US" sz="1700" dirty="0">
+            <a:endParaRPr lang="en-US" sz="2100" dirty="0"/>
+          </a:p>
+          <a:p>
+            <a:r>
+              <a:rPr lang="en-US" sz="2100" dirty="0">
                 <a:solidFill>
                   <a:srgbClr val="17364A"/>
                 </a:solidFill>
@@ -11475,27 +12162,13 @@
               </a:rPr>
               <a:t>3. What is a strong privacy guardrail for an AI workflow?</a:t>
             </a:r>
-            <a:endParaRPr lang="en-US" sz="1700" dirty="0"/>
-          </a:p>
-          <a:p>
-            <a:r>
-              <a:rPr lang="en-US" sz="1700" dirty="0">
-                <a:solidFill>
-                  <a:srgbClr val="17364A"/>
-                </a:solidFill>
-                <a:latin typeface="Aptos" pitchFamily="34" charset="0"/>
-                <a:ea typeface="Aptos" pitchFamily="34" charset="-122"/>
-                <a:cs typeface="Aptos" pitchFamily="34" charset="-120"/>
-              </a:rPr>
-              <a:t>4. When is de-identification alone insufficient?</a:t>
-            </a:r>
-            <a:endParaRPr lang="en-US" sz="1700" dirty="0"/>
-          </a:p>
-        </p:txBody>
-      </p:sp>
-      <p:sp>
-        <p:nvSpPr>
-          <p:cNvPr id="11" name="Shape 9"/>
+            <a:endParaRPr lang="en-US" sz="2100" dirty="0"/>
+          </a:p>
+        </p:txBody>
+      </p:sp>
+      <p:sp>
+        <p:nvSpPr>
+          <p:cNvPr id="12" name="Shape 10"/>
           <p:cNvSpPr/>
           <p:nvPr/>
         </p:nvSpPr>
@@ -11522,14 +12195,14 @@
       </p:sp>
       <p:sp>
         <p:nvSpPr>
-          <p:cNvPr id="12" name="Text 10"/>
+          <p:cNvPr id="13" name="Text 11"/>
           <p:cNvSpPr/>
           <p:nvPr/>
         </p:nvSpPr>
         <p:spPr>
           <a:xfrm>
             <a:off x="8074152" y="1563624"/>
-            <a:ext cx="2825496" cy="201168"/>
+            <a:ext cx="2825496" cy="256032"/>
           </a:xfrm>
           <a:prstGeom prst="rect">
             <a:avLst/>
@@ -11545,7 +12218,7 @@
               <a:buNone/>
             </a:pPr>
             <a:r>
-              <a:rPr lang="en-US" sz="950" b="1" dirty="0">
+              <a:rPr lang="en-US" sz="1300" b="1" dirty="0">
                 <a:solidFill>
                   <a:srgbClr val="0068B7"/>
                 </a:solidFill>
@@ -11555,20 +12228,20 @@
               </a:rPr>
               <a:t>Key idea</a:t>
             </a:r>
-            <a:endParaRPr lang="en-US" sz="950" dirty="0"/>
-          </a:p>
-        </p:txBody>
-      </p:sp>
-      <p:sp>
-        <p:nvSpPr>
-          <p:cNvPr id="13" name="Text 11"/>
-          <p:cNvSpPr/>
-          <p:nvPr/>
-        </p:nvSpPr>
-        <p:spPr>
-          <a:xfrm>
-            <a:off x="8074152" y="1856232"/>
-            <a:ext cx="2825496" cy="1261872"/>
+            <a:endParaRPr lang="en-US" sz="1300" dirty="0"/>
+          </a:p>
+        </p:txBody>
+      </p:sp>
+      <p:sp>
+        <p:nvSpPr>
+          <p:cNvPr id="14" name="Text 12"/>
+          <p:cNvSpPr/>
+          <p:nvPr/>
+        </p:nvSpPr>
+        <p:spPr>
+          <a:xfrm>
+            <a:off x="8074152" y="1920240"/>
+            <a:ext cx="2825496" cy="1188720"/>
           </a:xfrm>
           <a:prstGeom prst="rect">
             <a:avLst/>
@@ -11586,7 +12259,7 @@
               <a:buNone/>
             </a:pPr>
             <a:r>
-              <a:rPr lang="en-US" sz="1250" dirty="0">
+              <a:rPr lang="en-US" sz="1550" dirty="0">
                 <a:solidFill>
                   <a:srgbClr val="17364A"/>
                 </a:solidFill>
@@ -11596,13 +12269,13 @@
               </a:rPr>
               <a:t>1. Which statement best describes de-identification in public health AI?</a:t>
             </a:r>
-            <a:endParaRPr lang="en-US" sz="1250" dirty="0"/>
-          </a:p>
-        </p:txBody>
-      </p:sp>
-      <p:sp>
-        <p:nvSpPr>
-          <p:cNvPr id="14" name="Shape 12"/>
+            <a:endParaRPr lang="en-US" sz="1550" dirty="0"/>
+          </a:p>
+        </p:txBody>
+      </p:sp>
+      <p:sp>
+        <p:nvSpPr>
+          <p:cNvPr id="15" name="Shape 13"/>
           <p:cNvSpPr/>
           <p:nvPr/>
         </p:nvSpPr>
@@ -11629,14 +12302,14 @@
       </p:sp>
       <p:sp>
         <p:nvSpPr>
-          <p:cNvPr id="15" name="Text 13"/>
+          <p:cNvPr id="16" name="Text 14"/>
           <p:cNvSpPr/>
           <p:nvPr/>
         </p:nvSpPr>
         <p:spPr>
           <a:xfrm>
             <a:off x="8074152" y="3666744"/>
-            <a:ext cx="2825496" cy="201168"/>
+            <a:ext cx="2825496" cy="256032"/>
           </a:xfrm>
           <a:prstGeom prst="rect">
             <a:avLst/>
@@ -11652,7 +12325,7 @@
               <a:buNone/>
             </a:pPr>
             <a:r>
-              <a:rPr lang="en-US" sz="950" b="1" dirty="0">
+              <a:rPr lang="en-US" sz="1300" b="1" dirty="0">
                 <a:solidFill>
                   <a:srgbClr val="0068B7"/>
                 </a:solidFill>
@@ -11662,20 +12335,20 @@
               </a:rPr>
               <a:t>Use this for</a:t>
             </a:r>
-            <a:endParaRPr lang="en-US" sz="950" dirty="0"/>
-          </a:p>
-        </p:txBody>
-      </p:sp>
-      <p:sp>
-        <p:nvSpPr>
-          <p:cNvPr id="16" name="Text 14"/>
-          <p:cNvSpPr/>
-          <p:nvPr/>
-        </p:nvSpPr>
-        <p:spPr>
-          <a:xfrm>
-            <a:off x="8074152" y="3959352"/>
-            <a:ext cx="2825496" cy="1170432"/>
+            <a:endParaRPr lang="en-US" sz="1300" dirty="0"/>
+          </a:p>
+        </p:txBody>
+      </p:sp>
+      <p:sp>
+        <p:nvSpPr>
+          <p:cNvPr id="17" name="Text 15"/>
+          <p:cNvSpPr/>
+          <p:nvPr/>
+        </p:nvSpPr>
+        <p:spPr>
+          <a:xfrm>
+            <a:off x="8074152" y="4023360"/>
+            <a:ext cx="2825496" cy="1097280"/>
           </a:xfrm>
           <a:prstGeom prst="rect">
             <a:avLst/>
@@ -11693,7 +12366,7 @@
               <a:buNone/>
             </a:pPr>
             <a:r>
-              <a:rPr lang="en-US" sz="1250" dirty="0">
+              <a:rPr lang="en-US" sz="1550" dirty="0">
                 <a:solidFill>
                   <a:srgbClr val="17364A"/>
                 </a:solidFill>
@@ -11703,7 +12376,7 @@
               </a:rPr>
               <a:t>Connect the concept to public health decisions, safeguards, documentation, or implementation work.</a:t>
             </a:r>
-            <a:endParaRPr lang="en-US" sz="1250" dirty="0"/>
+            <a:endParaRPr lang="en-US" sz="1550" dirty="0"/>
           </a:p>
         </p:txBody>
       </p:sp>
@@ -11900,7 +12573,7 @@
                 <a:ea typeface="Aptos" pitchFamily="34" charset="-122"/>
                 <a:cs typeface="Aptos" pitchFamily="34" charset="-120"/>
               </a:rPr>
-              <a:t>© Paula Soper</a:t>
+              <a:t>Â© Paula Soper</a:t>
             </a:r>
             <a:endParaRPr lang="en-US" sz="800" dirty="0"/>
           </a:p>
@@ -11908,7 +12581,46 @@
       </p:sp>
       <p:sp>
         <p:nvSpPr>
-          <p:cNvPr id="7" name="Shape 5"/>
+          <p:cNvPr id="7" name="Text 5"/>
+          <p:cNvSpPr/>
+          <p:nvPr/>
+        </p:nvSpPr>
+        <p:spPr>
+          <a:xfrm>
+            <a:off x="11137392" y="6510528"/>
+            <a:ext cx="411480" cy="201168"/>
+          </a:xfrm>
+          <a:prstGeom prst="rect">
+            <a:avLst/>
+          </a:prstGeom>
+          <a:noFill/>
+          <a:ln/>
+        </p:spPr>
+        <p:txBody>
+          <a:bodyPr wrap="square" lIns="0" tIns="0" rIns="0" bIns="0" rtlCol="0" anchor="ctr"/>
+          <a:lstStyle/>
+          <a:p>
+            <a:pPr algn="r" indent="0" marL="0">
+              <a:buNone/>
+            </a:pPr>
+            <a:r>
+              <a:rPr lang="en-US" sz="900" dirty="0">
+                <a:solidFill>
+                  <a:srgbClr val="5F7181"/>
+                </a:solidFill>
+                <a:latin typeface="Aptos" pitchFamily="34" charset="0"/>
+                <a:ea typeface="Aptos" pitchFamily="34" charset="-122"/>
+                <a:cs typeface="Aptos" pitchFamily="34" charset="-120"/>
+              </a:rPr>
+              <a:t>24</a:t>
+            </a:r>
+            <a:endParaRPr lang="en-US" sz="900" dirty="0"/>
+          </a:p>
+        </p:txBody>
+      </p:sp>
+      <p:sp>
+        <p:nvSpPr>
+          <p:cNvPr id="8" name="Shape 6"/>
           <p:cNvSpPr/>
           <p:nvPr/>
         </p:nvSpPr>
@@ -11933,7 +12645,7 @@
       </p:sp>
       <p:sp>
         <p:nvSpPr>
-          <p:cNvPr id="8" name="Text 6"/>
+          <p:cNvPr id="9" name="Text 7"/>
           <p:cNvSpPr/>
           <p:nvPr/>
         </p:nvSpPr>
@@ -11972,14 +12684,14 @@
       </p:sp>
       <p:sp>
         <p:nvSpPr>
-          <p:cNvPr id="9" name="Text 7"/>
+          <p:cNvPr id="10" name="Text 8"/>
           <p:cNvSpPr/>
           <p:nvPr/>
         </p:nvSpPr>
         <p:spPr>
           <a:xfrm>
             <a:off x="640080" y="621792"/>
-            <a:ext cx="10881360" cy="566928"/>
+            <a:ext cx="10881360" cy="713232"/>
           </a:xfrm>
           <a:prstGeom prst="rect">
             <a:avLst/>
@@ -11997,7 +12709,7 @@
               <a:buNone/>
             </a:pPr>
             <a:r>
-              <a:rPr lang="en-US" sz="2700" b="1" dirty="0">
+              <a:rPr lang="en-US" sz="3400" b="1" dirty="0">
                 <a:solidFill>
                   <a:srgbClr val="003A63"/>
                 </a:solidFill>
@@ -12007,20 +12719,20 @@
               </a:rPr>
               <a:t>References and Resources</a:t>
             </a:r>
-            <a:endParaRPr lang="en-US" sz="2700" dirty="0"/>
-          </a:p>
-        </p:txBody>
-      </p:sp>
-      <p:sp>
-        <p:nvSpPr>
-          <p:cNvPr id="10" name="Text 8"/>
-          <p:cNvSpPr/>
-          <p:nvPr/>
-        </p:nvSpPr>
-        <p:spPr>
-          <a:xfrm>
-            <a:off x="868680" y="1417320"/>
-            <a:ext cx="6675120" cy="4434840"/>
+            <a:endParaRPr lang="en-US" sz="3400" dirty="0"/>
+          </a:p>
+        </p:txBody>
+      </p:sp>
+      <p:sp>
+        <p:nvSpPr>
+          <p:cNvPr id="11" name="Text 9"/>
+          <p:cNvSpPr/>
+          <p:nvPr/>
+        </p:nvSpPr>
+        <p:spPr>
+          <a:xfrm>
+            <a:off x="868680" y="1508760"/>
+            <a:ext cx="6537960" cy="4160520"/>
           </a:xfrm>
           <a:prstGeom prst="rect">
             <a:avLst/>
@@ -12035,7 +12747,7 @@
           <a:lstStyle/>
           <a:p>
             <a:r>
-              <a:rPr lang="en-US" sz="1700" dirty="0">
+              <a:rPr lang="en-US" sz="2100" dirty="0">
                 <a:solidFill>
                   <a:srgbClr val="17364A"/>
                 </a:solidFill>
@@ -12045,11 +12757,11 @@
               </a:rPr>
               <a:t>NIST Privacy Framework</a:t>
             </a:r>
-            <a:endParaRPr lang="en-US" sz="1700" dirty="0"/>
-          </a:p>
-          <a:p>
-            <a:r>
-              <a:rPr lang="en-US" sz="1700" dirty="0">
+            <a:endParaRPr lang="en-US" sz="2100" dirty="0"/>
+          </a:p>
+          <a:p>
+            <a:r>
+              <a:rPr lang="en-US" sz="2100" dirty="0">
                 <a:solidFill>
                   <a:srgbClr val="17364A"/>
                 </a:solidFill>
@@ -12059,11 +12771,11 @@
               </a:rPr>
               <a:t>NIST AI Risk Management Framework: https://www.nist.gov/itl/ai-risk-management-framework</a:t>
             </a:r>
-            <a:endParaRPr lang="en-US" sz="1700" dirty="0"/>
-          </a:p>
-          <a:p>
-            <a:r>
-              <a:rPr lang="en-US" sz="1700" dirty="0">
+            <a:endParaRPr lang="en-US" sz="2100" dirty="0"/>
+          </a:p>
+          <a:p>
+            <a:r>
+              <a:rPr lang="en-US" sz="2100" dirty="0">
                 <a:solidFill>
                   <a:srgbClr val="17364A"/>
                 </a:solidFill>
@@ -12073,27 +12785,13 @@
               </a:rPr>
               <a:t>HHS HIPAA de-identification guidance</a:t>
             </a:r>
-            <a:endParaRPr lang="en-US" sz="1700" dirty="0"/>
-          </a:p>
-          <a:p>
-            <a:r>
-              <a:rPr lang="en-US" sz="1700" dirty="0">
-                <a:solidFill>
-                  <a:srgbClr val="17364A"/>
-                </a:solidFill>
-                <a:latin typeface="Aptos" pitchFamily="34" charset="0"/>
-                <a:ea typeface="Aptos" pitchFamily="34" charset="-122"/>
-                <a:cs typeface="Aptos" pitchFamily="34" charset="-120"/>
-              </a:rPr>
-              <a:t>CDC data governance and public health data modernization resources</a:t>
-            </a:r>
-            <a:endParaRPr lang="en-US" sz="1700" dirty="0"/>
-          </a:p>
-        </p:txBody>
-      </p:sp>
-      <p:sp>
-        <p:nvSpPr>
-          <p:cNvPr id="11" name="Shape 9"/>
+            <a:endParaRPr lang="en-US" sz="2100" dirty="0"/>
+          </a:p>
+        </p:txBody>
+      </p:sp>
+      <p:sp>
+        <p:nvSpPr>
+          <p:cNvPr id="12" name="Shape 10"/>
           <p:cNvSpPr/>
           <p:nvPr/>
         </p:nvSpPr>
@@ -12120,14 +12818,14 @@
       </p:sp>
       <p:sp>
         <p:nvSpPr>
-          <p:cNvPr id="12" name="Text 10"/>
+          <p:cNvPr id="13" name="Text 11"/>
           <p:cNvSpPr/>
           <p:nvPr/>
         </p:nvSpPr>
         <p:spPr>
           <a:xfrm>
             <a:off x="8074152" y="1563624"/>
-            <a:ext cx="2825496" cy="201168"/>
+            <a:ext cx="2825496" cy="256032"/>
           </a:xfrm>
           <a:prstGeom prst="rect">
             <a:avLst/>
@@ -12143,7 +12841,7 @@
               <a:buNone/>
             </a:pPr>
             <a:r>
-              <a:rPr lang="en-US" sz="950" b="1" dirty="0">
+              <a:rPr lang="en-US" sz="1300" b="1" dirty="0">
                 <a:solidFill>
                   <a:srgbClr val="0068B7"/>
                 </a:solidFill>
@@ -12153,20 +12851,20 @@
               </a:rPr>
               <a:t>Key idea</a:t>
             </a:r>
-            <a:endParaRPr lang="en-US" sz="950" dirty="0"/>
-          </a:p>
-        </p:txBody>
-      </p:sp>
-      <p:sp>
-        <p:nvSpPr>
-          <p:cNvPr id="13" name="Text 11"/>
-          <p:cNvSpPr/>
-          <p:nvPr/>
-        </p:nvSpPr>
-        <p:spPr>
-          <a:xfrm>
-            <a:off x="8074152" y="1856232"/>
-            <a:ext cx="2825496" cy="1261872"/>
+            <a:endParaRPr lang="en-US" sz="1300" dirty="0"/>
+          </a:p>
+        </p:txBody>
+      </p:sp>
+      <p:sp>
+        <p:nvSpPr>
+          <p:cNvPr id="14" name="Text 12"/>
+          <p:cNvSpPr/>
+          <p:nvPr/>
+        </p:nvSpPr>
+        <p:spPr>
+          <a:xfrm>
+            <a:off x="8074152" y="1920240"/>
+            <a:ext cx="2825496" cy="1188720"/>
           </a:xfrm>
           <a:prstGeom prst="rect">
             <a:avLst/>
@@ -12184,7 +12882,7 @@
               <a:buNone/>
             </a:pPr>
             <a:r>
-              <a:rPr lang="en-US" sz="1250" dirty="0">
+              <a:rPr lang="en-US" sz="1550" dirty="0">
                 <a:solidFill>
                   <a:srgbClr val="17364A"/>
                 </a:solidFill>
@@ -12194,13 +12892,13 @@
               </a:rPr>
               <a:t>NIST Privacy Framework</a:t>
             </a:r>
-            <a:endParaRPr lang="en-US" sz="1250" dirty="0"/>
-          </a:p>
-        </p:txBody>
-      </p:sp>
-      <p:sp>
-        <p:nvSpPr>
-          <p:cNvPr id="14" name="Shape 12"/>
+            <a:endParaRPr lang="en-US" sz="1550" dirty="0"/>
+          </a:p>
+        </p:txBody>
+      </p:sp>
+      <p:sp>
+        <p:nvSpPr>
+          <p:cNvPr id="15" name="Shape 13"/>
           <p:cNvSpPr/>
           <p:nvPr/>
         </p:nvSpPr>
@@ -12227,14 +12925,14 @@
       </p:sp>
       <p:sp>
         <p:nvSpPr>
-          <p:cNvPr id="15" name="Text 13"/>
+          <p:cNvPr id="16" name="Text 14"/>
           <p:cNvSpPr/>
           <p:nvPr/>
         </p:nvSpPr>
         <p:spPr>
           <a:xfrm>
             <a:off x="8074152" y="3666744"/>
-            <a:ext cx="2825496" cy="201168"/>
+            <a:ext cx="2825496" cy="256032"/>
           </a:xfrm>
           <a:prstGeom prst="rect">
             <a:avLst/>
@@ -12250,7 +12948,7 @@
               <a:buNone/>
             </a:pPr>
             <a:r>
-              <a:rPr lang="en-US" sz="950" b="1" dirty="0">
+              <a:rPr lang="en-US" sz="1300" b="1" dirty="0">
                 <a:solidFill>
                   <a:srgbClr val="0068B7"/>
                 </a:solidFill>
@@ -12260,20 +12958,20 @@
               </a:rPr>
               <a:t>Use this for</a:t>
             </a:r>
-            <a:endParaRPr lang="en-US" sz="950" dirty="0"/>
-          </a:p>
-        </p:txBody>
-      </p:sp>
-      <p:sp>
-        <p:nvSpPr>
-          <p:cNvPr id="16" name="Text 14"/>
-          <p:cNvSpPr/>
-          <p:nvPr/>
-        </p:nvSpPr>
-        <p:spPr>
-          <a:xfrm>
-            <a:off x="8074152" y="3959352"/>
-            <a:ext cx="2825496" cy="1170432"/>
+            <a:endParaRPr lang="en-US" sz="1300" dirty="0"/>
+          </a:p>
+        </p:txBody>
+      </p:sp>
+      <p:sp>
+        <p:nvSpPr>
+          <p:cNvPr id="17" name="Text 15"/>
+          <p:cNvSpPr/>
+          <p:nvPr/>
+        </p:nvSpPr>
+        <p:spPr>
+          <a:xfrm>
+            <a:off x="8074152" y="4023360"/>
+            <a:ext cx="2825496" cy="1097280"/>
           </a:xfrm>
           <a:prstGeom prst="rect">
             <a:avLst/>
@@ -12291,7 +12989,7 @@
               <a:buNone/>
             </a:pPr>
             <a:r>
-              <a:rPr lang="en-US" sz="1250" dirty="0">
+              <a:rPr lang="en-US" sz="1550" dirty="0">
                 <a:solidFill>
                   <a:srgbClr val="17364A"/>
                 </a:solidFill>
@@ -12301,7 +12999,7 @@
               </a:rPr>
               <a:t>Connect the concept to public health decisions, safeguards, documentation, or implementation work.</a:t>
             </a:r>
-            <a:endParaRPr lang="en-US" sz="1250" dirty="0"/>
+            <a:endParaRPr lang="en-US" sz="1550" dirty="0"/>
           </a:p>
         </p:txBody>
       </p:sp>
@@ -12498,7 +13196,7 @@
                 <a:ea typeface="Aptos" pitchFamily="34" charset="-122"/>
                 <a:cs typeface="Aptos" pitchFamily="34" charset="-120"/>
               </a:rPr>
-              <a:t>© Paula Soper</a:t>
+              <a:t>Â© Paula Soper</a:t>
             </a:r>
             <a:endParaRPr lang="en-US" sz="800" dirty="0"/>
           </a:p>
@@ -12512,8 +13210,47 @@
         </p:nvSpPr>
         <p:spPr>
           <a:xfrm>
+            <a:off x="11137392" y="6510528"/>
+            <a:ext cx="411480" cy="201168"/>
+          </a:xfrm>
+          <a:prstGeom prst="rect">
+            <a:avLst/>
+          </a:prstGeom>
+          <a:noFill/>
+          <a:ln/>
+        </p:spPr>
+        <p:txBody>
+          <a:bodyPr wrap="square" lIns="0" tIns="0" rIns="0" bIns="0" rtlCol="0" anchor="ctr"/>
+          <a:lstStyle/>
+          <a:p>
+            <a:pPr algn="r" indent="0" marL="0">
+              <a:buNone/>
+            </a:pPr>
+            <a:r>
+              <a:rPr lang="en-US" sz="900" dirty="0">
+                <a:solidFill>
+                  <a:srgbClr val="5F7181"/>
+                </a:solidFill>
+                <a:latin typeface="Aptos" pitchFamily="34" charset="0"/>
+                <a:ea typeface="Aptos" pitchFamily="34" charset="-122"/>
+                <a:cs typeface="Aptos" pitchFamily="34" charset="-120"/>
+              </a:rPr>
+              <a:t>3</a:t>
+            </a:r>
+            <a:endParaRPr lang="en-US" sz="900" dirty="0"/>
+          </a:p>
+        </p:txBody>
+      </p:sp>
+      <p:sp>
+        <p:nvSpPr>
+          <p:cNvPr id="8" name="Text 6"/>
+          <p:cNvSpPr/>
+          <p:nvPr/>
+        </p:nvSpPr>
+        <p:spPr>
+          <a:xfrm>
             <a:off x="640080" y="658368"/>
-            <a:ext cx="10881360" cy="566928"/>
+            <a:ext cx="10881360" cy="713232"/>
           </a:xfrm>
           <a:prstGeom prst="rect">
             <a:avLst/>
@@ -12531,7 +13268,7 @@
               <a:buNone/>
             </a:pPr>
             <a:r>
-              <a:rPr lang="en-US" sz="2700" b="1" dirty="0">
+              <a:rPr lang="en-US" sz="3400" b="1" dirty="0">
                 <a:solidFill>
                   <a:srgbClr val="003A63"/>
                 </a:solidFill>
@@ -12541,20 +13278,20 @@
               </a:rPr>
               <a:t>How this module connects to the playbook</a:t>
             </a:r>
-            <a:endParaRPr lang="en-US" sz="2700" dirty="0"/>
-          </a:p>
-        </p:txBody>
-      </p:sp>
-      <p:sp>
-        <p:nvSpPr>
-          <p:cNvPr id="8" name="Text 6"/>
-          <p:cNvSpPr/>
-          <p:nvPr/>
-        </p:nvSpPr>
-        <p:spPr>
-          <a:xfrm>
-            <a:off x="868680" y="1417320"/>
-            <a:ext cx="6903720" cy="4480560"/>
+            <a:endParaRPr lang="en-US" sz="3400" dirty="0"/>
+          </a:p>
+        </p:txBody>
+      </p:sp>
+      <p:sp>
+        <p:nvSpPr>
+          <p:cNvPr id="9" name="Text 7"/>
+          <p:cNvSpPr/>
+          <p:nvPr/>
+        </p:nvSpPr>
+        <p:spPr>
+          <a:xfrm>
+            <a:off x="868680" y="1508760"/>
+            <a:ext cx="6812280" cy="3977640"/>
           </a:xfrm>
           <a:prstGeom prst="rect">
             <a:avLst/>
@@ -12569,7 +13306,7 @@
           <a:lstStyle/>
           <a:p>
             <a:r>
-              <a:rPr lang="en-US" sz="1540" dirty="0">
+              <a:rPr lang="en-US" sz="1900" dirty="0">
                 <a:solidFill>
                   <a:srgbClr val="17364A"/>
                 </a:solidFill>
@@ -12577,13 +13314,13 @@
                 <a:ea typeface="Aptos" pitchFamily="34" charset="-122"/>
                 <a:cs typeface="Aptos" pitchFamily="34" charset="-120"/>
               </a:rPr>
-              <a:t>Play 11: Build and Deploy AI Solutions - This lesson informs Play 11 by helping learners connect the lesson topic to build and deploy.</a:t>
-            </a:r>
-            <a:endParaRPr lang="en-US" sz="1540" dirty="0"/>
-          </a:p>
-          <a:p>
-            <a:r>
-              <a:rPr lang="en-US" sz="1540" dirty="0">
+              <a:t>Play 11: Build and Deploy AI Solutions - This lesson informs Play 11 by helping learners connect the lesson.</a:t>
+            </a:r>
+            <a:endParaRPr lang="en-US" sz="1900" dirty="0"/>
+          </a:p>
+          <a:p>
+            <a:r>
+              <a:rPr lang="en-US" sz="1900" dirty="0">
                 <a:solidFill>
                   <a:srgbClr val="17364A"/>
                 </a:solidFill>
@@ -12591,13 +13328,13 @@
                 <a:ea typeface="Aptos" pitchFamily="34" charset="-122"/>
                 <a:cs typeface="Aptos" pitchFamily="34" charset="-120"/>
               </a:rPr>
-              <a:t>Play 2: Readiness Assessment - This lesson informs Play 2 by helping learners connect the lesson topic to readiness assessment work.</a:t>
-            </a:r>
-            <a:endParaRPr lang="en-US" sz="1540" dirty="0"/>
-          </a:p>
-          <a:p>
-            <a:r>
-              <a:rPr lang="en-US" sz="1540" dirty="0">
+              <a:t>Play 2: Readiness Assessment - This lesson informs Play 2 by helping learners connect the lesson topic to.</a:t>
+            </a:r>
+            <a:endParaRPr lang="en-US" sz="1900" dirty="0"/>
+          </a:p>
+          <a:p>
+            <a:r>
+              <a:rPr lang="en-US" sz="1900" dirty="0">
                 <a:solidFill>
                   <a:srgbClr val="17364A"/>
                 </a:solidFill>
@@ -12605,13 +13342,13 @@
                 <a:ea typeface="Aptos" pitchFamily="34" charset="-122"/>
                 <a:cs typeface="Aptos" pitchFamily="34" charset="-120"/>
               </a:rPr>
-              <a:t>Play 3: Establish AI Governance - This lesson informs Play 3 by helping learners connect the lesson topic to establish ai governance.</a:t>
-            </a:r>
-            <a:endParaRPr lang="en-US" sz="1540" dirty="0"/>
-          </a:p>
-          <a:p>
-            <a:r>
-              <a:rPr lang="en-US" sz="1540" dirty="0">
+              <a:t>Play 3: Establish AI Governance - This lesson informs Play 3 by helping learners connect the lesson topic to.</a:t>
+            </a:r>
+            <a:endParaRPr lang="en-US" sz="1900" dirty="0"/>
+          </a:p>
+          <a:p>
+            <a:r>
+              <a:rPr lang="en-US" sz="1900" dirty="0">
                 <a:solidFill>
                   <a:srgbClr val="17364A"/>
                 </a:solidFill>
@@ -12619,15 +13356,15 @@
                 <a:ea typeface="Aptos" pitchFamily="34" charset="-122"/>
                 <a:cs typeface="Aptos" pitchFamily="34" charset="-120"/>
               </a:rPr>
-              <a:t>Play 1: Vision &amp; Guardrails - This lesson informs Play 1 by helping learners connect the lesson topic to vision &amp; guardrails work in.</a:t>
-            </a:r>
-            <a:endParaRPr lang="en-US" sz="1540" dirty="0"/>
-          </a:p>
-        </p:txBody>
-      </p:sp>
-      <p:sp>
-        <p:nvSpPr>
-          <p:cNvPr id="9" name="Shape 7"/>
+              <a:t>Play 1: Vision &amp; Guardrails - This lesson informs Play 1 by helping learners connect the lesson topic to.</a:t>
+            </a:r>
+            <a:endParaRPr lang="en-US" sz="1900" dirty="0"/>
+          </a:p>
+        </p:txBody>
+      </p:sp>
+      <p:sp>
+        <p:nvSpPr>
+          <p:cNvPr id="10" name="Shape 8"/>
           <p:cNvSpPr/>
           <p:nvPr/>
         </p:nvSpPr>
@@ -12654,14 +13391,14 @@
       </p:sp>
       <p:sp>
         <p:nvSpPr>
-          <p:cNvPr id="10" name="Text 8"/>
+          <p:cNvPr id="11" name="Text 9"/>
           <p:cNvSpPr/>
           <p:nvPr/>
         </p:nvSpPr>
         <p:spPr>
           <a:xfrm>
             <a:off x="8211312" y="1563624"/>
-            <a:ext cx="2734056" cy="201168"/>
+            <a:ext cx="2734056" cy="256032"/>
           </a:xfrm>
           <a:prstGeom prst="rect">
             <a:avLst/>
@@ -12677,7 +13414,7 @@
               <a:buNone/>
             </a:pPr>
             <a:r>
-              <a:rPr lang="en-US" sz="950" b="1" dirty="0">
+              <a:rPr lang="en-US" sz="1300" b="1" dirty="0">
                 <a:solidFill>
                   <a:srgbClr val="0068B7"/>
                 </a:solidFill>
@@ -12687,20 +13424,20 @@
               </a:rPr>
               <a:t>Apply the lesson</a:t>
             </a:r>
-            <a:endParaRPr lang="en-US" sz="950" dirty="0"/>
-          </a:p>
-        </p:txBody>
-      </p:sp>
-      <p:sp>
-        <p:nvSpPr>
-          <p:cNvPr id="11" name="Text 9"/>
-          <p:cNvSpPr/>
-          <p:nvPr/>
-        </p:nvSpPr>
-        <p:spPr>
-          <a:xfrm>
-            <a:off x="8211312" y="1856232"/>
-            <a:ext cx="2734056" cy="1536192"/>
+            <a:endParaRPr lang="en-US" sz="1300" dirty="0"/>
+          </a:p>
+        </p:txBody>
+      </p:sp>
+      <p:sp>
+        <p:nvSpPr>
+          <p:cNvPr id="12" name="Text 10"/>
+          <p:cNvSpPr/>
+          <p:nvPr/>
+        </p:nvSpPr>
+        <p:spPr>
+          <a:xfrm>
+            <a:off x="8211312" y="1920240"/>
+            <a:ext cx="2734056" cy="1463040"/>
           </a:xfrm>
           <a:prstGeom prst="rect">
             <a:avLst/>
@@ -12718,7 +13455,7 @@
               <a:buNone/>
             </a:pPr>
             <a:r>
-              <a:rPr lang="en-US" sz="1250" dirty="0">
+              <a:rPr lang="en-US" sz="1550" dirty="0">
                 <a:solidFill>
                   <a:srgbClr val="17364A"/>
                 </a:solidFill>
@@ -12728,32 +13465,32 @@
               </a:rPr>
               <a:t>Use the related plays to identify decisions, participants, timing, approvals, and documentation needed for responsible implementation.</a:t>
             </a:r>
-            <a:endParaRPr lang="en-US" sz="1250" dirty="0"/>
-          </a:p>
-        </p:txBody>
-      </p:sp>
-      <p:sp>
-        <p:nvSpPr>
-          <p:cNvPr id="12" name="Shape 10"/>
-          <p:cNvSpPr/>
-          <p:nvPr/>
-        </p:nvSpPr>
-        <p:spPr>
-          <a:xfrm>
-            <a:off x="8046720" y="3794760"/>
-            <a:ext cx="3063240" cy="1508760"/>
+            <a:endParaRPr lang="en-US" sz="1550" dirty="0"/>
+          </a:p>
+        </p:txBody>
+      </p:sp>
+      <p:sp>
+        <p:nvSpPr>
+          <p:cNvPr id="13" name="Shape 11"/>
+          <p:cNvSpPr/>
+          <p:nvPr/>
+        </p:nvSpPr>
+        <p:spPr>
+          <a:xfrm>
+            <a:off x="7818120" y="3977640"/>
+            <a:ext cx="972312" cy="749808"/>
           </a:xfrm>
           <a:prstGeom prst="roundRect">
             <a:avLst>
-              <a:gd name="adj" fmla="val 7273"/>
+              <a:gd name="adj" fmla="val 14634"/>
             </a:avLst>
           </a:prstGeom>
           <a:solidFill>
-            <a:srgbClr val="FFF4D9"/>
+            <a:srgbClr val="0068B7"/>
           </a:solidFill>
           <a:ln w="12700">
             <a:solidFill>
-              <a:srgbClr val="B9D7E6"/>
+              <a:srgbClr val="0068B7"/>
             </a:solidFill>
             <a:prstDash val="solid"/>
           </a:ln>
@@ -12761,81 +13498,256 @@
       </p:sp>
       <p:sp>
         <p:nvSpPr>
-          <p:cNvPr id="13" name="Text 11"/>
-          <p:cNvSpPr/>
-          <p:nvPr/>
-        </p:nvSpPr>
-        <p:spPr>
-          <a:xfrm>
-            <a:off x="8211312" y="3941064"/>
-            <a:ext cx="2734056" cy="201168"/>
-          </a:xfrm>
-          <a:prstGeom prst="rect">
-            <a:avLst/>
-          </a:prstGeom>
-          <a:noFill/>
-          <a:ln/>
-        </p:spPr>
-        <p:txBody>
-          <a:bodyPr wrap="square" lIns="0" tIns="0" rIns="0" bIns="0" rtlCol="0" anchor="ctr"/>
-          <a:lstStyle/>
-          <a:p>
-            <a:pPr indent="0" marL="0">
-              <a:buNone/>
-            </a:pPr>
-            <a:r>
-              <a:rPr lang="en-US" sz="950" b="1" dirty="0">
-                <a:solidFill>
-                  <a:srgbClr val="0068B7"/>
-                </a:solidFill>
-                <a:latin typeface="Aptos" pitchFamily="34" charset="0"/>
-                <a:ea typeface="Aptos" pitchFamily="34" charset="-122"/>
-                <a:cs typeface="Aptos" pitchFamily="34" charset="-120"/>
-              </a:rPr>
-              <a:t>Keep in mind</a:t>
-            </a:r>
-            <a:endParaRPr lang="en-US" sz="950" dirty="0"/>
-          </a:p>
-        </p:txBody>
-      </p:sp>
-      <p:sp>
-        <p:nvSpPr>
           <p:cNvPr id="14" name="Text 12"/>
           <p:cNvSpPr/>
           <p:nvPr/>
         </p:nvSpPr>
         <p:spPr>
           <a:xfrm>
-            <a:off x="8211312" y="4233672"/>
-            <a:ext cx="2734056" cy="941832"/>
-          </a:xfrm>
-          <a:prstGeom prst="rect">
-            <a:avLst/>
-          </a:prstGeom>
-          <a:noFill/>
-          <a:ln/>
-        </p:spPr>
-        <p:txBody>
-          <a:bodyPr wrap="square" lIns="0" tIns="0" rIns="0" bIns="0" rtlCol="0" anchor="t">
+            <a:off x="7891272" y="4169664"/>
+            <a:ext cx="826008" cy="310896"/>
+          </a:xfrm>
+          <a:prstGeom prst="rect">
+            <a:avLst/>
+          </a:prstGeom>
+          <a:noFill/>
+          <a:ln/>
+        </p:spPr>
+        <p:txBody>
+          <a:bodyPr wrap="square" lIns="0" tIns="0" rIns="0" bIns="0" rtlCol="0" anchor="ctr">
             <a:normAutofit/>
           </a:bodyPr>
           <a:lstStyle/>
           <a:p>
-            <a:pPr indent="0" marL="0">
-              <a:buNone/>
-            </a:pPr>
-            <a:r>
-              <a:rPr lang="en-US" sz="1250" dirty="0">
-                <a:solidFill>
-                  <a:srgbClr val="17364A"/>
-                </a:solidFill>
-                <a:latin typeface="Aptos" pitchFamily="34" charset="0"/>
-                <a:ea typeface="Aptos" pitchFamily="34" charset="-122"/>
-                <a:cs typeface="Aptos" pitchFamily="34" charset="-120"/>
-              </a:rPr>
-              <a:t>The playbook connection helps turn training into agency work, not just individual knowledge.</a:t>
-            </a:r>
-            <a:endParaRPr lang="en-US" sz="1250" dirty="0"/>
+            <a:pPr algn="ctr" indent="0" marL="0">
+              <a:buNone/>
+            </a:pPr>
+            <a:r>
+              <a:rPr lang="en-US" sz="1500" b="1" dirty="0">
+                <a:solidFill>
+                  <a:srgbClr val="FFFFFF"/>
+                </a:solidFill>
+                <a:latin typeface="Aptos" pitchFamily="34" charset="0"/>
+                <a:ea typeface="Aptos" pitchFamily="34" charset="-122"/>
+                <a:cs typeface="Aptos" pitchFamily="34" charset="-120"/>
+              </a:rPr>
+              <a:t>Lesson</a:t>
+            </a:r>
+            <a:endParaRPr lang="en-US" sz="1500" dirty="0"/>
+          </a:p>
+        </p:txBody>
+      </p:sp>
+      <p:sp>
+        <p:nvSpPr>
+          <p:cNvPr id="15" name="Text 13"/>
+          <p:cNvSpPr/>
+          <p:nvPr/>
+        </p:nvSpPr>
+        <p:spPr>
+          <a:xfrm>
+            <a:off x="8817864" y="4187952"/>
+            <a:ext cx="201168" cy="256032"/>
+          </a:xfrm>
+          <a:prstGeom prst="rect">
+            <a:avLst/>
+          </a:prstGeom>
+          <a:noFill/>
+          <a:ln/>
+        </p:spPr>
+        <p:txBody>
+          <a:bodyPr wrap="square" lIns="0" tIns="0" rIns="0" bIns="0" rtlCol="0" anchor="ctr"/>
+          <a:lstStyle/>
+          <a:p>
+            <a:pPr algn="ctr" indent="0" marL="0">
+              <a:buNone/>
+            </a:pPr>
+            <a:r>
+              <a:rPr lang="en-US" sz="1800" b="1" dirty="0">
+                <a:solidFill>
+                  <a:srgbClr val="0068B7"/>
+                </a:solidFill>
+                <a:latin typeface="Aptos" pitchFamily="34" charset="0"/>
+                <a:ea typeface="Aptos" pitchFamily="34" charset="-122"/>
+                <a:cs typeface="Aptos" pitchFamily="34" charset="-120"/>
+              </a:rPr>
+              <a:t>â†’</a:t>
+            </a:r>
+            <a:endParaRPr lang="en-US" sz="1800" dirty="0"/>
+          </a:p>
+        </p:txBody>
+      </p:sp>
+      <p:sp>
+        <p:nvSpPr>
+          <p:cNvPr id="16" name="Shape 14"/>
+          <p:cNvSpPr/>
+          <p:nvPr/>
+        </p:nvSpPr>
+        <p:spPr>
+          <a:xfrm>
+            <a:off x="9046464" y="3977640"/>
+            <a:ext cx="972312" cy="749808"/>
+          </a:xfrm>
+          <a:prstGeom prst="roundRect">
+            <a:avLst>
+              <a:gd name="adj" fmla="val 14634"/>
+            </a:avLst>
+          </a:prstGeom>
+          <a:solidFill>
+            <a:srgbClr val="2F8A28"/>
+          </a:solidFill>
+          <a:ln w="12700">
+            <a:solidFill>
+              <a:srgbClr val="2F8A28"/>
+            </a:solidFill>
+            <a:prstDash val="solid"/>
+          </a:ln>
+        </p:spPr>
+      </p:sp>
+      <p:sp>
+        <p:nvSpPr>
+          <p:cNvPr id="17" name="Text 15"/>
+          <p:cNvSpPr/>
+          <p:nvPr/>
+        </p:nvSpPr>
+        <p:spPr>
+          <a:xfrm>
+            <a:off x="9119616" y="4169664"/>
+            <a:ext cx="826008" cy="310896"/>
+          </a:xfrm>
+          <a:prstGeom prst="rect">
+            <a:avLst/>
+          </a:prstGeom>
+          <a:noFill/>
+          <a:ln/>
+        </p:spPr>
+        <p:txBody>
+          <a:bodyPr wrap="square" lIns="0" tIns="0" rIns="0" bIns="0" rtlCol="0" anchor="ctr">
+            <a:normAutofit/>
+          </a:bodyPr>
+          <a:lstStyle/>
+          <a:p>
+            <a:pPr algn="ctr" indent="0" marL="0">
+              <a:buNone/>
+            </a:pPr>
+            <a:r>
+              <a:rPr lang="en-US" sz="1500" b="1" dirty="0">
+                <a:solidFill>
+                  <a:srgbClr val="FFFFFF"/>
+                </a:solidFill>
+                <a:latin typeface="Aptos" pitchFamily="34" charset="0"/>
+                <a:ea typeface="Aptos" pitchFamily="34" charset="-122"/>
+                <a:cs typeface="Aptos" pitchFamily="34" charset="-120"/>
+              </a:rPr>
+              <a:t>Plays</a:t>
+            </a:r>
+            <a:endParaRPr lang="en-US" sz="1500" dirty="0"/>
+          </a:p>
+        </p:txBody>
+      </p:sp>
+      <p:sp>
+        <p:nvSpPr>
+          <p:cNvPr id="18" name="Text 16"/>
+          <p:cNvSpPr/>
+          <p:nvPr/>
+        </p:nvSpPr>
+        <p:spPr>
+          <a:xfrm>
+            <a:off x="10046208" y="4187952"/>
+            <a:ext cx="201168" cy="256032"/>
+          </a:xfrm>
+          <a:prstGeom prst="rect">
+            <a:avLst/>
+          </a:prstGeom>
+          <a:noFill/>
+          <a:ln/>
+        </p:spPr>
+        <p:txBody>
+          <a:bodyPr wrap="square" lIns="0" tIns="0" rIns="0" bIns="0" rtlCol="0" anchor="ctr"/>
+          <a:lstStyle/>
+          <a:p>
+            <a:pPr algn="ctr" indent="0" marL="0">
+              <a:buNone/>
+            </a:pPr>
+            <a:r>
+              <a:rPr lang="en-US" sz="1800" b="1" dirty="0">
+                <a:solidFill>
+                  <a:srgbClr val="0068B7"/>
+                </a:solidFill>
+                <a:latin typeface="Aptos" pitchFamily="34" charset="0"/>
+                <a:ea typeface="Aptos" pitchFamily="34" charset="-122"/>
+                <a:cs typeface="Aptos" pitchFamily="34" charset="-120"/>
+              </a:rPr>
+              <a:t>â†’</a:t>
+            </a:r>
+            <a:endParaRPr lang="en-US" sz="1800" dirty="0"/>
+          </a:p>
+        </p:txBody>
+      </p:sp>
+      <p:sp>
+        <p:nvSpPr>
+          <p:cNvPr id="19" name="Shape 17"/>
+          <p:cNvSpPr/>
+          <p:nvPr/>
+        </p:nvSpPr>
+        <p:spPr>
+          <a:xfrm>
+            <a:off x="10274808" y="3977640"/>
+            <a:ext cx="972312" cy="749808"/>
+          </a:xfrm>
+          <a:prstGeom prst="roundRect">
+            <a:avLst>
+              <a:gd name="adj" fmla="val 14634"/>
+            </a:avLst>
+          </a:prstGeom>
+          <a:solidFill>
+            <a:srgbClr val="6A4CA3"/>
+          </a:solidFill>
+          <a:ln w="12700">
+            <a:solidFill>
+              <a:srgbClr val="6A4CA3"/>
+            </a:solidFill>
+            <a:prstDash val="solid"/>
+          </a:ln>
+        </p:spPr>
+      </p:sp>
+      <p:sp>
+        <p:nvSpPr>
+          <p:cNvPr id="20" name="Text 18"/>
+          <p:cNvSpPr/>
+          <p:nvPr/>
+        </p:nvSpPr>
+        <p:spPr>
+          <a:xfrm>
+            <a:off x="10347960" y="4169664"/>
+            <a:ext cx="826008" cy="310896"/>
+          </a:xfrm>
+          <a:prstGeom prst="rect">
+            <a:avLst/>
+          </a:prstGeom>
+          <a:noFill/>
+          <a:ln/>
+        </p:spPr>
+        <p:txBody>
+          <a:bodyPr wrap="square" lIns="0" tIns="0" rIns="0" bIns="0" rtlCol="0" anchor="ctr">
+            <a:normAutofit/>
+          </a:bodyPr>
+          <a:lstStyle/>
+          <a:p>
+            <a:pPr algn="ctr" indent="0" marL="0">
+              <a:buNone/>
+            </a:pPr>
+            <a:r>
+              <a:rPr lang="en-US" sz="1500" b="1" dirty="0">
+                <a:solidFill>
+                  <a:srgbClr val="FFFFFF"/>
+                </a:solidFill>
+                <a:latin typeface="Aptos" pitchFamily="34" charset="0"/>
+                <a:ea typeface="Aptos" pitchFamily="34" charset="-122"/>
+                <a:cs typeface="Aptos" pitchFamily="34" charset="-120"/>
+              </a:rPr>
+              <a:t>Action</a:t>
+            </a:r>
+            <a:endParaRPr lang="en-US" sz="1500" dirty="0"/>
           </a:p>
         </p:txBody>
       </p:sp>
@@ -13032,7 +13944,7 @@
                 <a:ea typeface="Aptos" pitchFamily="34" charset="-122"/>
                 <a:cs typeface="Aptos" pitchFamily="34" charset="-120"/>
               </a:rPr>
-              <a:t>© Paula Soper</a:t>
+              <a:t>Â© Paula Soper</a:t>
             </a:r>
             <a:endParaRPr lang="en-US" sz="800" dirty="0"/>
           </a:p>
@@ -13046,8 +13958,47 @@
         </p:nvSpPr>
         <p:spPr>
           <a:xfrm>
+            <a:off x="11137392" y="6510528"/>
+            <a:ext cx="411480" cy="201168"/>
+          </a:xfrm>
+          <a:prstGeom prst="rect">
+            <a:avLst/>
+          </a:prstGeom>
+          <a:noFill/>
+          <a:ln/>
+        </p:spPr>
+        <p:txBody>
+          <a:bodyPr wrap="square" lIns="0" tIns="0" rIns="0" bIns="0" rtlCol="0" anchor="ctr"/>
+          <a:lstStyle/>
+          <a:p>
+            <a:pPr algn="r" indent="0" marL="0">
+              <a:buNone/>
+            </a:pPr>
+            <a:r>
+              <a:rPr lang="en-US" sz="900" dirty="0">
+                <a:solidFill>
+                  <a:srgbClr val="5F7181"/>
+                </a:solidFill>
+                <a:latin typeface="Aptos" pitchFamily="34" charset="0"/>
+                <a:ea typeface="Aptos" pitchFamily="34" charset="-122"/>
+                <a:cs typeface="Aptos" pitchFamily="34" charset="-120"/>
+              </a:rPr>
+              <a:t>4</a:t>
+            </a:r>
+            <a:endParaRPr lang="en-US" sz="900" dirty="0"/>
+          </a:p>
+        </p:txBody>
+      </p:sp>
+      <p:sp>
+        <p:nvSpPr>
+          <p:cNvPr id="8" name="Text 6"/>
+          <p:cNvSpPr/>
+          <p:nvPr/>
+        </p:nvSpPr>
+        <p:spPr>
+          <a:xfrm>
             <a:off x="640080" y="658368"/>
-            <a:ext cx="10881360" cy="566928"/>
+            <a:ext cx="10881360" cy="713232"/>
           </a:xfrm>
           <a:prstGeom prst="rect">
             <a:avLst/>
@@ -13065,7 +14016,7 @@
               <a:buNone/>
             </a:pPr>
             <a:r>
-              <a:rPr lang="en-US" sz="2700" b="1" dirty="0">
+              <a:rPr lang="en-US" sz="3400" b="1" dirty="0">
                 <a:solidFill>
                   <a:srgbClr val="003A63"/>
                 </a:solidFill>
@@ -13075,20 +14026,20 @@
               </a:rPr>
               <a:t>Related toolkit resources</a:t>
             </a:r>
-            <a:endParaRPr lang="en-US" sz="2700" dirty="0"/>
-          </a:p>
-        </p:txBody>
-      </p:sp>
-      <p:sp>
-        <p:nvSpPr>
-          <p:cNvPr id="8" name="Text 6"/>
-          <p:cNvSpPr/>
-          <p:nvPr/>
-        </p:nvSpPr>
-        <p:spPr>
-          <a:xfrm>
-            <a:off x="868680" y="1417320"/>
-            <a:ext cx="6903720" cy="4480560"/>
+            <a:endParaRPr lang="en-US" sz="3400" dirty="0"/>
+          </a:p>
+        </p:txBody>
+      </p:sp>
+      <p:sp>
+        <p:nvSpPr>
+          <p:cNvPr id="9" name="Text 7"/>
+          <p:cNvSpPr/>
+          <p:nvPr/>
+        </p:nvSpPr>
+        <p:spPr>
+          <a:xfrm>
+            <a:off x="868680" y="1508760"/>
+            <a:ext cx="6812280" cy="3977640"/>
           </a:xfrm>
           <a:prstGeom prst="rect">
             <a:avLst/>
@@ -13103,7 +14054,7 @@
           <a:lstStyle/>
           <a:p>
             <a:r>
-              <a:rPr lang="en-US" sz="1460" dirty="0">
+              <a:rPr lang="en-US" sz="1850" dirty="0">
                 <a:solidFill>
                   <a:srgbClr val="17364A"/>
                 </a:solidFill>
@@ -13111,13 +14062,13 @@
                 <a:ea typeface="Aptos" pitchFamily="34" charset="-122"/>
                 <a:cs typeface="Aptos" pitchFamily="34" charset="-120"/>
               </a:rPr>
-              <a:t>Tool 4: AI Policy Landscape Scan (Worksheet) - Use AI Policy Landscape Scan to translate this lesson into a documented public health.</a:t>
-            </a:r>
-            <a:endParaRPr lang="en-US" sz="1460" dirty="0"/>
-          </a:p>
-          <a:p>
-            <a:r>
-              <a:rPr lang="en-US" sz="1460" dirty="0">
+              <a:t>Tool 4: AI Policy Landscape Scan (Worksheet) - Use AI Policy Landscape Scan to translate this lesson into a.</a:t>
+            </a:r>
+            <a:endParaRPr lang="en-US" sz="1850" dirty="0"/>
+          </a:p>
+          <a:p>
+            <a:r>
+              <a:rPr lang="en-US" sz="1850" dirty="0">
                 <a:solidFill>
                   <a:srgbClr val="17364A"/>
                 </a:solidFill>
@@ -13125,13 +14076,13 @@
                 <a:ea typeface="Aptos" pitchFamily="34" charset="-122"/>
                 <a:cs typeface="Aptos" pitchFamily="34" charset="-120"/>
               </a:rPr>
-              <a:t>Tool 5: AI Environmental and Resource Impact Review (Checklist) - Use AI Environmental and Resource Impact Review to translate this.</a:t>
-            </a:r>
-            <a:endParaRPr lang="en-US" sz="1460" dirty="0"/>
-          </a:p>
-          <a:p>
-            <a:r>
-              <a:rPr lang="en-US" sz="1460" dirty="0">
+              <a:t>Tool 5: AI Environmental and Resource Impact Review (Checklist) - Use AI Environmental and Resource Impact.</a:t>
+            </a:r>
+            <a:endParaRPr lang="en-US" sz="1850" dirty="0"/>
+          </a:p>
+          <a:p>
+            <a:r>
+              <a:rPr lang="en-US" sz="1850" dirty="0">
                 <a:solidFill>
                   <a:srgbClr val="17364A"/>
                 </a:solidFill>
@@ -13139,13 +14090,13 @@
                 <a:ea typeface="Aptos" pitchFamily="34" charset="-122"/>
                 <a:cs typeface="Aptos" pitchFamily="34" charset="-120"/>
               </a:rPr>
-              <a:t>Tool 6: Human-Centered AI Decision Rule Checklist (Checklist) - Use Human-Centered AI Decision Rule Checklist to translate this.</a:t>
-            </a:r>
-            <a:endParaRPr lang="en-US" sz="1460" dirty="0"/>
-          </a:p>
-          <a:p>
-            <a:r>
-              <a:rPr lang="en-US" sz="1460" dirty="0">
+              <a:t>Tool 6: Human-Centered AI Decision Rule Checklist (Checklist) - Use Human-Centered AI Decision Rule.</a:t>
+            </a:r>
+            <a:endParaRPr lang="en-US" sz="1850" dirty="0"/>
+          </a:p>
+          <a:p>
+            <a:r>
+              <a:rPr lang="en-US" sz="1850" dirty="0">
                 <a:solidFill>
                   <a:srgbClr val="17364A"/>
                 </a:solidFill>
@@ -13153,29 +14104,15 @@
                 <a:ea typeface="Aptos" pitchFamily="34" charset="-122"/>
                 <a:cs typeface="Aptos" pitchFamily="34" charset="-120"/>
               </a:rPr>
-              <a:t>Tool 8: AI Project Charter (Planning) - Use AI Project Charter to translate this lesson into a documented public health AI planning,.</a:t>
-            </a:r>
-            <a:endParaRPr lang="en-US" sz="1460" dirty="0"/>
-          </a:p>
-          <a:p>
-            <a:r>
-              <a:rPr lang="en-US" sz="1460" dirty="0">
-                <a:solidFill>
-                  <a:srgbClr val="17364A"/>
-                </a:solidFill>
-                <a:latin typeface="Aptos" pitchFamily="34" charset="0"/>
-                <a:ea typeface="Aptos" pitchFamily="34" charset="-122"/>
-                <a:cs typeface="Aptos" pitchFamily="34" charset="-120"/>
-              </a:rPr>
-              <a:t>Tool 9: Data Quality Assessment Checklist (Checklist) - Use this tool to complete or strengthen the practical exercise for the module.</a:t>
-            </a:r>
-            <a:endParaRPr lang="en-US" sz="1460" dirty="0"/>
-          </a:p>
-        </p:txBody>
-      </p:sp>
-      <p:sp>
-        <p:nvSpPr>
-          <p:cNvPr id="9" name="Shape 7"/>
+              <a:t>Tool 8: AI Project Charter (Planning) - Use AI Project Charter to translate this lesson into a documented.</a:t>
+            </a:r>
+            <a:endParaRPr lang="en-US" sz="1850" dirty="0"/>
+          </a:p>
+        </p:txBody>
+      </p:sp>
+      <p:sp>
+        <p:nvSpPr>
+          <p:cNvPr id="10" name="Shape 8"/>
           <p:cNvSpPr/>
           <p:nvPr/>
         </p:nvSpPr>
@@ -13202,14 +14139,14 @@
       </p:sp>
       <p:sp>
         <p:nvSpPr>
-          <p:cNvPr id="10" name="Text 8"/>
+          <p:cNvPr id="11" name="Text 9"/>
           <p:cNvSpPr/>
           <p:nvPr/>
         </p:nvSpPr>
         <p:spPr>
           <a:xfrm>
             <a:off x="8211312" y="1563624"/>
-            <a:ext cx="2734056" cy="201168"/>
+            <a:ext cx="2734056" cy="256032"/>
           </a:xfrm>
           <a:prstGeom prst="rect">
             <a:avLst/>
@@ -13225,7 +14162,7 @@
               <a:buNone/>
             </a:pPr>
             <a:r>
-              <a:rPr lang="en-US" sz="950" b="1" dirty="0">
+              <a:rPr lang="en-US" sz="1300" b="1" dirty="0">
                 <a:solidFill>
                   <a:srgbClr val="0068B7"/>
                 </a:solidFill>
@@ -13235,20 +14172,20 @@
               </a:rPr>
               <a:t>Use the tools</a:t>
             </a:r>
-            <a:endParaRPr lang="en-US" sz="950" dirty="0"/>
-          </a:p>
-        </p:txBody>
-      </p:sp>
-      <p:sp>
-        <p:nvSpPr>
-          <p:cNvPr id="11" name="Text 9"/>
-          <p:cNvSpPr/>
-          <p:nvPr/>
-        </p:nvSpPr>
-        <p:spPr>
-          <a:xfrm>
-            <a:off x="8211312" y="1856232"/>
-            <a:ext cx="2734056" cy="1536192"/>
+            <a:endParaRPr lang="en-US" sz="1300" dirty="0"/>
+          </a:p>
+        </p:txBody>
+      </p:sp>
+      <p:sp>
+        <p:nvSpPr>
+          <p:cNvPr id="12" name="Text 10"/>
+          <p:cNvSpPr/>
+          <p:nvPr/>
+        </p:nvSpPr>
+        <p:spPr>
+          <a:xfrm>
+            <a:off x="8211312" y="1920240"/>
+            <a:ext cx="2734056" cy="1463040"/>
           </a:xfrm>
           <a:prstGeom prst="rect">
             <a:avLst/>
@@ -13266,7 +14203,7 @@
               <a:buNone/>
             </a:pPr>
             <a:r>
-              <a:rPr lang="en-US" sz="1250" dirty="0">
+              <a:rPr lang="en-US" sz="1550" dirty="0">
                 <a:solidFill>
                   <a:srgbClr val="17364A"/>
                 </a:solidFill>
@@ -13276,32 +14213,32 @@
               </a:rPr>
               <a:t>Use linked tools when your department needs a structured worksheet, template, checklist, review process, or documentation artifact.</a:t>
             </a:r>
-            <a:endParaRPr lang="en-US" sz="1250" dirty="0"/>
-          </a:p>
-        </p:txBody>
-      </p:sp>
-      <p:sp>
-        <p:nvSpPr>
-          <p:cNvPr id="12" name="Shape 10"/>
-          <p:cNvSpPr/>
-          <p:nvPr/>
-        </p:nvSpPr>
-        <p:spPr>
-          <a:xfrm>
-            <a:off x="8046720" y="3794760"/>
-            <a:ext cx="3063240" cy="1508760"/>
+            <a:endParaRPr lang="en-US" sz="1550" dirty="0"/>
+          </a:p>
+        </p:txBody>
+      </p:sp>
+      <p:sp>
+        <p:nvSpPr>
+          <p:cNvPr id="13" name="Shape 11"/>
+          <p:cNvSpPr/>
+          <p:nvPr/>
+        </p:nvSpPr>
+        <p:spPr>
+          <a:xfrm>
+            <a:off x="7818120" y="3977640"/>
+            <a:ext cx="972312" cy="749808"/>
           </a:xfrm>
           <a:prstGeom prst="roundRect">
             <a:avLst>
-              <a:gd name="adj" fmla="val 7273"/>
+              <a:gd name="adj" fmla="val 14634"/>
             </a:avLst>
           </a:prstGeom>
           <a:solidFill>
-            <a:srgbClr val="EEF8ED"/>
+            <a:srgbClr val="0068B7"/>
           </a:solidFill>
           <a:ln w="12700">
             <a:solidFill>
-              <a:srgbClr val="B9D7E6"/>
+              <a:srgbClr val="0068B7"/>
             </a:solidFill>
             <a:prstDash val="solid"/>
           </a:ln>
@@ -13309,81 +14246,256 @@
       </p:sp>
       <p:sp>
         <p:nvSpPr>
-          <p:cNvPr id="13" name="Text 11"/>
-          <p:cNvSpPr/>
-          <p:nvPr/>
-        </p:nvSpPr>
-        <p:spPr>
-          <a:xfrm>
-            <a:off x="8211312" y="3941064"/>
-            <a:ext cx="2734056" cy="201168"/>
-          </a:xfrm>
-          <a:prstGeom prst="rect">
-            <a:avLst/>
-          </a:prstGeom>
-          <a:noFill/>
-          <a:ln/>
-        </p:spPr>
-        <p:txBody>
-          <a:bodyPr wrap="square" lIns="0" tIns="0" rIns="0" bIns="0" rtlCol="0" anchor="ctr"/>
-          <a:lstStyle/>
-          <a:p>
-            <a:pPr indent="0" marL="0">
-              <a:buNone/>
-            </a:pPr>
-            <a:r>
-              <a:rPr lang="en-US" sz="950" b="1" dirty="0">
-                <a:solidFill>
-                  <a:srgbClr val="0068B7"/>
-                </a:solidFill>
-                <a:latin typeface="Aptos" pitchFamily="34" charset="0"/>
-                <a:ea typeface="Aptos" pitchFamily="34" charset="-122"/>
-                <a:cs typeface="Aptos" pitchFamily="34" charset="-120"/>
-              </a:rPr>
-              <a:t>Avoid duplication</a:t>
-            </a:r>
-            <a:endParaRPr lang="en-US" sz="950" dirty="0"/>
-          </a:p>
-        </p:txBody>
-      </p:sp>
-      <p:sp>
-        <p:nvSpPr>
           <p:cNvPr id="14" name="Text 12"/>
           <p:cNvSpPr/>
           <p:nvPr/>
         </p:nvSpPr>
         <p:spPr>
           <a:xfrm>
-            <a:off x="8211312" y="4233672"/>
-            <a:ext cx="2734056" cy="941832"/>
-          </a:xfrm>
-          <a:prstGeom prst="rect">
-            <a:avLst/>
-          </a:prstGeom>
-          <a:noFill/>
-          <a:ln/>
-        </p:spPr>
-        <p:txBody>
-          <a:bodyPr wrap="square" lIns="0" tIns="0" rIns="0" bIns="0" rtlCol="0" anchor="t">
+            <a:off x="7891272" y="4169664"/>
+            <a:ext cx="826008" cy="310896"/>
+          </a:xfrm>
+          <a:prstGeom prst="rect">
+            <a:avLst/>
+          </a:prstGeom>
+          <a:noFill/>
+          <a:ln/>
+        </p:spPr>
+        <p:txBody>
+          <a:bodyPr wrap="square" lIns="0" tIns="0" rIns="0" bIns="0" rtlCol="0" anchor="ctr">
             <a:normAutofit/>
           </a:bodyPr>
           <a:lstStyle/>
           <a:p>
-            <a:pPr indent="0" marL="0">
-              <a:buNone/>
-            </a:pPr>
-            <a:r>
-              <a:rPr lang="en-US" sz="1250" dirty="0">
-                <a:solidFill>
-                  <a:srgbClr val="17364A"/>
-                </a:solidFill>
-                <a:latin typeface="Aptos" pitchFamily="34" charset="0"/>
-                <a:ea typeface="Aptos" pitchFamily="34" charset="-122"/>
-                <a:cs typeface="Aptos" pitchFamily="34" charset="-120"/>
-              </a:rPr>
-              <a:t>If your department already has a strong equivalent tool, adapt or use the existing process instead of recreating it.</a:t>
-            </a:r>
-            <a:endParaRPr lang="en-US" sz="1250" dirty="0"/>
+            <a:pPr algn="ctr" indent="0" marL="0">
+              <a:buNone/>
+            </a:pPr>
+            <a:r>
+              <a:rPr lang="en-US" sz="1500" b="1" dirty="0">
+                <a:solidFill>
+                  <a:srgbClr val="FFFFFF"/>
+                </a:solidFill>
+                <a:latin typeface="Aptos" pitchFamily="34" charset="0"/>
+                <a:ea typeface="Aptos" pitchFamily="34" charset="-122"/>
+                <a:cs typeface="Aptos" pitchFamily="34" charset="-120"/>
+              </a:rPr>
+              <a:t>Concept</a:t>
+            </a:r>
+            <a:endParaRPr lang="en-US" sz="1500" dirty="0"/>
+          </a:p>
+        </p:txBody>
+      </p:sp>
+      <p:sp>
+        <p:nvSpPr>
+          <p:cNvPr id="15" name="Text 13"/>
+          <p:cNvSpPr/>
+          <p:nvPr/>
+        </p:nvSpPr>
+        <p:spPr>
+          <a:xfrm>
+            <a:off x="8817864" y="4187952"/>
+            <a:ext cx="201168" cy="256032"/>
+          </a:xfrm>
+          <a:prstGeom prst="rect">
+            <a:avLst/>
+          </a:prstGeom>
+          <a:noFill/>
+          <a:ln/>
+        </p:spPr>
+        <p:txBody>
+          <a:bodyPr wrap="square" lIns="0" tIns="0" rIns="0" bIns="0" rtlCol="0" anchor="ctr"/>
+          <a:lstStyle/>
+          <a:p>
+            <a:pPr algn="ctr" indent="0" marL="0">
+              <a:buNone/>
+            </a:pPr>
+            <a:r>
+              <a:rPr lang="en-US" sz="1800" b="1" dirty="0">
+                <a:solidFill>
+                  <a:srgbClr val="0068B7"/>
+                </a:solidFill>
+                <a:latin typeface="Aptos" pitchFamily="34" charset="0"/>
+                <a:ea typeface="Aptos" pitchFamily="34" charset="-122"/>
+                <a:cs typeface="Aptos" pitchFamily="34" charset="-120"/>
+              </a:rPr>
+              <a:t>â†’</a:t>
+            </a:r>
+            <a:endParaRPr lang="en-US" sz="1800" dirty="0"/>
+          </a:p>
+        </p:txBody>
+      </p:sp>
+      <p:sp>
+        <p:nvSpPr>
+          <p:cNvPr id="16" name="Shape 14"/>
+          <p:cNvSpPr/>
+          <p:nvPr/>
+        </p:nvSpPr>
+        <p:spPr>
+          <a:xfrm>
+            <a:off x="9046464" y="3977640"/>
+            <a:ext cx="972312" cy="749808"/>
+          </a:xfrm>
+          <a:prstGeom prst="roundRect">
+            <a:avLst>
+              <a:gd name="adj" fmla="val 14634"/>
+            </a:avLst>
+          </a:prstGeom>
+          <a:solidFill>
+            <a:srgbClr val="2F8A28"/>
+          </a:solidFill>
+          <a:ln w="12700">
+            <a:solidFill>
+              <a:srgbClr val="2F8A28"/>
+            </a:solidFill>
+            <a:prstDash val="solid"/>
+          </a:ln>
+        </p:spPr>
+      </p:sp>
+      <p:sp>
+        <p:nvSpPr>
+          <p:cNvPr id="17" name="Text 15"/>
+          <p:cNvSpPr/>
+          <p:nvPr/>
+        </p:nvSpPr>
+        <p:spPr>
+          <a:xfrm>
+            <a:off x="9119616" y="4169664"/>
+            <a:ext cx="826008" cy="310896"/>
+          </a:xfrm>
+          <a:prstGeom prst="rect">
+            <a:avLst/>
+          </a:prstGeom>
+          <a:noFill/>
+          <a:ln/>
+        </p:spPr>
+        <p:txBody>
+          <a:bodyPr wrap="square" lIns="0" tIns="0" rIns="0" bIns="0" rtlCol="0" anchor="ctr">
+            <a:normAutofit/>
+          </a:bodyPr>
+          <a:lstStyle/>
+          <a:p>
+            <a:pPr algn="ctr" indent="0" marL="0">
+              <a:buNone/>
+            </a:pPr>
+            <a:r>
+              <a:rPr lang="en-US" sz="1500" b="1" dirty="0">
+                <a:solidFill>
+                  <a:srgbClr val="FFFFFF"/>
+                </a:solidFill>
+                <a:latin typeface="Aptos" pitchFamily="34" charset="0"/>
+                <a:ea typeface="Aptos" pitchFamily="34" charset="-122"/>
+                <a:cs typeface="Aptos" pitchFamily="34" charset="-120"/>
+              </a:rPr>
+              <a:t>Tool</a:t>
+            </a:r>
+            <a:endParaRPr lang="en-US" sz="1500" dirty="0"/>
+          </a:p>
+        </p:txBody>
+      </p:sp>
+      <p:sp>
+        <p:nvSpPr>
+          <p:cNvPr id="18" name="Text 16"/>
+          <p:cNvSpPr/>
+          <p:nvPr/>
+        </p:nvSpPr>
+        <p:spPr>
+          <a:xfrm>
+            <a:off x="10046208" y="4187952"/>
+            <a:ext cx="201168" cy="256032"/>
+          </a:xfrm>
+          <a:prstGeom prst="rect">
+            <a:avLst/>
+          </a:prstGeom>
+          <a:noFill/>
+          <a:ln/>
+        </p:spPr>
+        <p:txBody>
+          <a:bodyPr wrap="square" lIns="0" tIns="0" rIns="0" bIns="0" rtlCol="0" anchor="ctr"/>
+          <a:lstStyle/>
+          <a:p>
+            <a:pPr algn="ctr" indent="0" marL="0">
+              <a:buNone/>
+            </a:pPr>
+            <a:r>
+              <a:rPr lang="en-US" sz="1800" b="1" dirty="0">
+                <a:solidFill>
+                  <a:srgbClr val="0068B7"/>
+                </a:solidFill>
+                <a:latin typeface="Aptos" pitchFamily="34" charset="0"/>
+                <a:ea typeface="Aptos" pitchFamily="34" charset="-122"/>
+                <a:cs typeface="Aptos" pitchFamily="34" charset="-120"/>
+              </a:rPr>
+              <a:t>â†’</a:t>
+            </a:r>
+            <a:endParaRPr lang="en-US" sz="1800" dirty="0"/>
+          </a:p>
+        </p:txBody>
+      </p:sp>
+      <p:sp>
+        <p:nvSpPr>
+          <p:cNvPr id="19" name="Shape 17"/>
+          <p:cNvSpPr/>
+          <p:nvPr/>
+        </p:nvSpPr>
+        <p:spPr>
+          <a:xfrm>
+            <a:off x="10274808" y="3977640"/>
+            <a:ext cx="972312" cy="749808"/>
+          </a:xfrm>
+          <a:prstGeom prst="roundRect">
+            <a:avLst>
+              <a:gd name="adj" fmla="val 14634"/>
+            </a:avLst>
+          </a:prstGeom>
+          <a:solidFill>
+            <a:srgbClr val="D69A2D"/>
+          </a:solidFill>
+          <a:ln w="12700">
+            <a:solidFill>
+              <a:srgbClr val="D69A2D"/>
+            </a:solidFill>
+            <a:prstDash val="solid"/>
+          </a:ln>
+        </p:spPr>
+      </p:sp>
+      <p:sp>
+        <p:nvSpPr>
+          <p:cNvPr id="20" name="Text 18"/>
+          <p:cNvSpPr/>
+          <p:nvPr/>
+        </p:nvSpPr>
+        <p:spPr>
+          <a:xfrm>
+            <a:off x="10347960" y="4169664"/>
+            <a:ext cx="826008" cy="310896"/>
+          </a:xfrm>
+          <a:prstGeom prst="rect">
+            <a:avLst/>
+          </a:prstGeom>
+          <a:noFill/>
+          <a:ln/>
+        </p:spPr>
+        <p:txBody>
+          <a:bodyPr wrap="square" lIns="0" tIns="0" rIns="0" bIns="0" rtlCol="0" anchor="ctr">
+            <a:normAutofit/>
+          </a:bodyPr>
+          <a:lstStyle/>
+          <a:p>
+            <a:pPr algn="ctr" indent="0" marL="0">
+              <a:buNone/>
+            </a:pPr>
+            <a:r>
+              <a:rPr lang="en-US" sz="1500" b="1" dirty="0">
+                <a:solidFill>
+                  <a:srgbClr val="FFFFFF"/>
+                </a:solidFill>
+                <a:latin typeface="Aptos" pitchFamily="34" charset="0"/>
+                <a:ea typeface="Aptos" pitchFamily="34" charset="-122"/>
+                <a:cs typeface="Aptos" pitchFamily="34" charset="-120"/>
+              </a:rPr>
+              <a:t>Artifact</a:t>
+            </a:r>
+            <a:endParaRPr lang="en-US" sz="1500" dirty="0"/>
           </a:p>
         </p:txBody>
       </p:sp>
@@ -13580,7 +14692,7 @@
                 <a:ea typeface="Aptos" pitchFamily="34" charset="-122"/>
                 <a:cs typeface="Aptos" pitchFamily="34" charset="-120"/>
               </a:rPr>
-              <a:t>© Paula Soper</a:t>
+              <a:t>Â© Paula Soper</a:t>
             </a:r>
             <a:endParaRPr lang="en-US" sz="800" dirty="0"/>
           </a:p>
@@ -13588,7 +14700,46 @@
       </p:sp>
       <p:sp>
         <p:nvSpPr>
-          <p:cNvPr id="7" name="Shape 5"/>
+          <p:cNvPr id="7" name="Text 5"/>
+          <p:cNvSpPr/>
+          <p:nvPr/>
+        </p:nvSpPr>
+        <p:spPr>
+          <a:xfrm>
+            <a:off x="11137392" y="6510528"/>
+            <a:ext cx="411480" cy="201168"/>
+          </a:xfrm>
+          <a:prstGeom prst="rect">
+            <a:avLst/>
+          </a:prstGeom>
+          <a:noFill/>
+          <a:ln/>
+        </p:spPr>
+        <p:txBody>
+          <a:bodyPr wrap="square" lIns="0" tIns="0" rIns="0" bIns="0" rtlCol="0" anchor="ctr"/>
+          <a:lstStyle/>
+          <a:p>
+            <a:pPr algn="r" indent="0" marL="0">
+              <a:buNone/>
+            </a:pPr>
+            <a:r>
+              <a:rPr lang="en-US" sz="900" dirty="0">
+                <a:solidFill>
+                  <a:srgbClr val="5F7181"/>
+                </a:solidFill>
+                <a:latin typeface="Aptos" pitchFamily="34" charset="0"/>
+                <a:ea typeface="Aptos" pitchFamily="34" charset="-122"/>
+                <a:cs typeface="Aptos" pitchFamily="34" charset="-120"/>
+              </a:rPr>
+              <a:t>5</a:t>
+            </a:r>
+            <a:endParaRPr lang="en-US" sz="900" dirty="0"/>
+          </a:p>
+        </p:txBody>
+      </p:sp>
+      <p:sp>
+        <p:nvSpPr>
+          <p:cNvPr id="8" name="Shape 6"/>
           <p:cNvSpPr/>
           <p:nvPr/>
         </p:nvSpPr>
@@ -13613,7 +14764,7 @@
       </p:sp>
       <p:sp>
         <p:nvSpPr>
-          <p:cNvPr id="8" name="Text 6"/>
+          <p:cNvPr id="9" name="Text 7"/>
           <p:cNvSpPr/>
           <p:nvPr/>
         </p:nvSpPr>
@@ -13652,14 +14803,14 @@
       </p:sp>
       <p:sp>
         <p:nvSpPr>
-          <p:cNvPr id="9" name="Text 7"/>
+          <p:cNvPr id="10" name="Text 8"/>
           <p:cNvSpPr/>
           <p:nvPr/>
         </p:nvSpPr>
         <p:spPr>
           <a:xfrm>
             <a:off x="640080" y="621792"/>
-            <a:ext cx="10881360" cy="566928"/>
+            <a:ext cx="10881360" cy="713232"/>
           </a:xfrm>
           <a:prstGeom prst="rect">
             <a:avLst/>
@@ -13677,7 +14828,7 @@
               <a:buNone/>
             </a:pPr>
             <a:r>
-              <a:rPr lang="en-US" sz="2700" b="1" dirty="0">
+              <a:rPr lang="en-US" sz="3400" b="1" dirty="0">
                 <a:solidFill>
                   <a:srgbClr val="003A63"/>
                 </a:solidFill>
@@ -13687,20 +14838,20 @@
               </a:rPr>
               <a:t>Learning Objectives</a:t>
             </a:r>
-            <a:endParaRPr lang="en-US" sz="2700" dirty="0"/>
-          </a:p>
-        </p:txBody>
-      </p:sp>
-      <p:sp>
-        <p:nvSpPr>
-          <p:cNvPr id="10" name="Text 8"/>
-          <p:cNvSpPr/>
-          <p:nvPr/>
-        </p:nvSpPr>
-        <p:spPr>
-          <a:xfrm>
-            <a:off x="868680" y="1417320"/>
-            <a:ext cx="6675120" cy="4434840"/>
+            <a:endParaRPr lang="en-US" sz="3400" dirty="0"/>
+          </a:p>
+        </p:txBody>
+      </p:sp>
+      <p:sp>
+        <p:nvSpPr>
+          <p:cNvPr id="11" name="Text 9"/>
+          <p:cNvSpPr/>
+          <p:nvPr/>
+        </p:nvSpPr>
+        <p:spPr>
+          <a:xfrm>
+            <a:off x="868680" y="1508760"/>
+            <a:ext cx="6537960" cy="4160520"/>
           </a:xfrm>
           <a:prstGeom prst="rect">
             <a:avLst/>
@@ -13715,7 +14866,7 @@
           <a:lstStyle/>
           <a:p>
             <a:r>
-              <a:rPr lang="en-US" sz="1700" dirty="0">
+              <a:rPr lang="en-US" sz="2100" dirty="0">
                 <a:solidFill>
                   <a:srgbClr val="17364A"/>
                 </a:solidFill>
@@ -13725,11 +14876,11 @@
               </a:rPr>
               <a:t>Explain why AI can increase privacy and confidentiality risks in public health workflows.</a:t>
             </a:r>
-            <a:endParaRPr lang="en-US" sz="1700" dirty="0"/>
-          </a:p>
-          <a:p>
-            <a:r>
-              <a:rPr lang="en-US" sz="1700" dirty="0">
+            <a:endParaRPr lang="en-US" sz="2100" dirty="0"/>
+          </a:p>
+          <a:p>
+            <a:r>
+              <a:rPr lang="en-US" sz="2100" dirty="0">
                 <a:solidFill>
                   <a:srgbClr val="17364A"/>
                 </a:solidFill>
@@ -13737,13 +14888,13 @@
                 <a:ea typeface="Aptos" pitchFamily="34" charset="-122"/>
                 <a:cs typeface="Aptos" pitchFamily="34" charset="-120"/>
               </a:rPr>
-              <a:t>Distinguish between identifiable data, de-identified data, aggregated data, limited datasets, and synthetic data at a.</a:t>
-            </a:r>
-            <a:endParaRPr lang="en-US" sz="1700" dirty="0"/>
-          </a:p>
-          <a:p>
-            <a:r>
-              <a:rPr lang="en-US" sz="1700" dirty="0">
+              <a:t>Distinguish between identifiable data, de-identified data, aggregated data, limited datasets, and.</a:t>
+            </a:r>
+            <a:endParaRPr lang="en-US" sz="2100" dirty="0"/>
+          </a:p>
+          <a:p>
+            <a:r>
+              <a:rPr lang="en-US" sz="2100" dirty="0">
                 <a:solidFill>
                   <a:srgbClr val="17364A"/>
                 </a:solidFill>
@@ -13751,29 +14902,15 @@
                 <a:ea typeface="Aptos" pitchFamily="34" charset="-122"/>
                 <a:cs typeface="Aptos" pitchFamily="34" charset="-120"/>
               </a:rPr>
-              <a:t>Identify technical and operational safeguards that reduce privacy risk, including data minimization, role-based access,.</a:t>
-            </a:r>
-            <a:endParaRPr lang="en-US" sz="1700" dirty="0"/>
-          </a:p>
-          <a:p>
-            <a:r>
-              <a:rPr lang="en-US" sz="1700" dirty="0">
-                <a:solidFill>
-                  <a:srgbClr val="17364A"/>
-                </a:solidFill>
-                <a:latin typeface="Aptos" pitchFamily="34" charset="0"/>
-                <a:ea typeface="Aptos" pitchFamily="34" charset="-122"/>
-                <a:cs typeface="Aptos" pitchFamily="34" charset="-120"/>
-              </a:rPr>
-              <a:t>Assess re-identification risk when public health data are linked, enriched, summarized, or shared for AI-supported use.</a:t>
-            </a:r>
-            <a:endParaRPr lang="en-US" sz="1700" dirty="0"/>
-          </a:p>
-        </p:txBody>
-      </p:sp>
-      <p:sp>
-        <p:nvSpPr>
-          <p:cNvPr id="11" name="Shape 9"/>
+              <a:t>Identify technical and operational safeguards that reduce privacy risk, including data minimization,.</a:t>
+            </a:r>
+            <a:endParaRPr lang="en-US" sz="2100" dirty="0"/>
+          </a:p>
+        </p:txBody>
+      </p:sp>
+      <p:sp>
+        <p:nvSpPr>
+          <p:cNvPr id="12" name="Shape 10"/>
           <p:cNvSpPr/>
           <p:nvPr/>
         </p:nvSpPr>
@@ -13800,14 +14937,14 @@
       </p:sp>
       <p:sp>
         <p:nvSpPr>
-          <p:cNvPr id="12" name="Text 10"/>
+          <p:cNvPr id="13" name="Text 11"/>
           <p:cNvSpPr/>
           <p:nvPr/>
         </p:nvSpPr>
         <p:spPr>
           <a:xfrm>
             <a:off x="8074152" y="1563624"/>
-            <a:ext cx="2825496" cy="201168"/>
+            <a:ext cx="2825496" cy="256032"/>
           </a:xfrm>
           <a:prstGeom prst="rect">
             <a:avLst/>
@@ -13823,7 +14960,7 @@
               <a:buNone/>
             </a:pPr>
             <a:r>
-              <a:rPr lang="en-US" sz="950" b="1" dirty="0">
+              <a:rPr lang="en-US" sz="1300" b="1" dirty="0">
                 <a:solidFill>
                   <a:srgbClr val="0068B7"/>
                 </a:solidFill>
@@ -13833,20 +14970,20 @@
               </a:rPr>
               <a:t>Key idea</a:t>
             </a:r>
-            <a:endParaRPr lang="en-US" sz="950" dirty="0"/>
-          </a:p>
-        </p:txBody>
-      </p:sp>
-      <p:sp>
-        <p:nvSpPr>
-          <p:cNvPr id="13" name="Text 11"/>
-          <p:cNvSpPr/>
-          <p:nvPr/>
-        </p:nvSpPr>
-        <p:spPr>
-          <a:xfrm>
-            <a:off x="8074152" y="1856232"/>
-            <a:ext cx="2825496" cy="1261872"/>
+            <a:endParaRPr lang="en-US" sz="1300" dirty="0"/>
+          </a:p>
+        </p:txBody>
+      </p:sp>
+      <p:sp>
+        <p:nvSpPr>
+          <p:cNvPr id="14" name="Text 12"/>
+          <p:cNvSpPr/>
+          <p:nvPr/>
+        </p:nvSpPr>
+        <p:spPr>
+          <a:xfrm>
+            <a:off x="8074152" y="1920240"/>
+            <a:ext cx="2825496" cy="1188720"/>
           </a:xfrm>
           <a:prstGeom prst="rect">
             <a:avLst/>
@@ -13864,7 +15001,7 @@
               <a:buNone/>
             </a:pPr>
             <a:r>
-              <a:rPr lang="en-US" sz="1250" dirty="0">
+              <a:rPr lang="en-US" sz="1550" dirty="0">
                 <a:solidFill>
                   <a:srgbClr val="17364A"/>
                 </a:solidFill>
@@ -13874,13 +15011,13 @@
               </a:rPr>
               <a:t>Explain why AI can increase privacy and confidentiality risks in public health workflows.</a:t>
             </a:r>
-            <a:endParaRPr lang="en-US" sz="1250" dirty="0"/>
-          </a:p>
-        </p:txBody>
-      </p:sp>
-      <p:sp>
-        <p:nvSpPr>
-          <p:cNvPr id="14" name="Shape 12"/>
+            <a:endParaRPr lang="en-US" sz="1550" dirty="0"/>
+          </a:p>
+        </p:txBody>
+      </p:sp>
+      <p:sp>
+        <p:nvSpPr>
+          <p:cNvPr id="15" name="Shape 13"/>
           <p:cNvSpPr/>
           <p:nvPr/>
         </p:nvSpPr>
@@ -13907,14 +15044,14 @@
       </p:sp>
       <p:sp>
         <p:nvSpPr>
-          <p:cNvPr id="15" name="Text 13"/>
+          <p:cNvPr id="16" name="Text 14"/>
           <p:cNvSpPr/>
           <p:nvPr/>
         </p:nvSpPr>
         <p:spPr>
           <a:xfrm>
             <a:off x="8074152" y="3666744"/>
-            <a:ext cx="2825496" cy="201168"/>
+            <a:ext cx="2825496" cy="256032"/>
           </a:xfrm>
           <a:prstGeom prst="rect">
             <a:avLst/>
@@ -13930,7 +15067,7 @@
               <a:buNone/>
             </a:pPr>
             <a:r>
-              <a:rPr lang="en-US" sz="950" b="1" dirty="0">
+              <a:rPr lang="en-US" sz="1300" b="1" dirty="0">
                 <a:solidFill>
                   <a:srgbClr val="0068B7"/>
                 </a:solidFill>
@@ -13940,20 +15077,20 @@
               </a:rPr>
               <a:t>Use this for</a:t>
             </a:r>
-            <a:endParaRPr lang="en-US" sz="950" dirty="0"/>
-          </a:p>
-        </p:txBody>
-      </p:sp>
-      <p:sp>
-        <p:nvSpPr>
-          <p:cNvPr id="16" name="Text 14"/>
-          <p:cNvSpPr/>
-          <p:nvPr/>
-        </p:nvSpPr>
-        <p:spPr>
-          <a:xfrm>
-            <a:off x="8074152" y="3959352"/>
-            <a:ext cx="2825496" cy="1170432"/>
+            <a:endParaRPr lang="en-US" sz="1300" dirty="0"/>
+          </a:p>
+        </p:txBody>
+      </p:sp>
+      <p:sp>
+        <p:nvSpPr>
+          <p:cNvPr id="17" name="Text 15"/>
+          <p:cNvSpPr/>
+          <p:nvPr/>
+        </p:nvSpPr>
+        <p:spPr>
+          <a:xfrm>
+            <a:off x="8074152" y="4023360"/>
+            <a:ext cx="2825496" cy="1097280"/>
           </a:xfrm>
           <a:prstGeom prst="rect">
             <a:avLst/>
@@ -13971,7 +15108,7 @@
               <a:buNone/>
             </a:pPr>
             <a:r>
-              <a:rPr lang="en-US" sz="1250" dirty="0">
+              <a:rPr lang="en-US" sz="1550" dirty="0">
                 <a:solidFill>
                   <a:srgbClr val="17364A"/>
                 </a:solidFill>
@@ -13981,7 +15118,7 @@
               </a:rPr>
               <a:t>Connect the concept to public health decisions, safeguards, documentation, or implementation work.</a:t>
             </a:r>
-            <a:endParaRPr lang="en-US" sz="1250" dirty="0"/>
+            <a:endParaRPr lang="en-US" sz="1550" dirty="0"/>
           </a:p>
         </p:txBody>
       </p:sp>
@@ -14178,7 +15315,7 @@
                 <a:ea typeface="Aptos" pitchFamily="34" charset="-122"/>
                 <a:cs typeface="Aptos" pitchFamily="34" charset="-120"/>
               </a:rPr>
-              <a:t>© Paula Soper</a:t>
+              <a:t>Â© Paula Soper</a:t>
             </a:r>
             <a:endParaRPr lang="en-US" sz="800" dirty="0"/>
           </a:p>
@@ -14192,8 +15329,47 @@
         </p:nvSpPr>
         <p:spPr>
           <a:xfrm>
+            <a:off x="11137392" y="6510528"/>
+            <a:ext cx="411480" cy="201168"/>
+          </a:xfrm>
+          <a:prstGeom prst="rect">
+            <a:avLst/>
+          </a:prstGeom>
+          <a:noFill/>
+          <a:ln/>
+        </p:spPr>
+        <p:txBody>
+          <a:bodyPr wrap="square" lIns="0" tIns="0" rIns="0" bIns="0" rtlCol="0" anchor="ctr"/>
+          <a:lstStyle/>
+          <a:p>
+            <a:pPr algn="r" indent="0" marL="0">
+              <a:buNone/>
+            </a:pPr>
+            <a:r>
+              <a:rPr lang="en-US" sz="900" dirty="0">
+                <a:solidFill>
+                  <a:srgbClr val="5F7181"/>
+                </a:solidFill>
+                <a:latin typeface="Aptos" pitchFamily="34" charset="0"/>
+                <a:ea typeface="Aptos" pitchFamily="34" charset="-122"/>
+                <a:cs typeface="Aptos" pitchFamily="34" charset="-120"/>
+              </a:rPr>
+              <a:t>6</a:t>
+            </a:r>
+            <a:endParaRPr lang="en-US" sz="900" dirty="0"/>
+          </a:p>
+        </p:txBody>
+      </p:sp>
+      <p:sp>
+        <p:nvSpPr>
+          <p:cNvPr id="8" name="Text 6"/>
+          <p:cNvSpPr/>
+          <p:nvPr/>
+        </p:nvSpPr>
+        <p:spPr>
+          <a:xfrm>
             <a:off x="640080" y="658368"/>
-            <a:ext cx="10881360" cy="566928"/>
+            <a:ext cx="10881360" cy="713232"/>
           </a:xfrm>
           <a:prstGeom prst="rect">
             <a:avLst/>
@@ -14211,7 +15387,7 @@
               <a:buNone/>
             </a:pPr>
             <a:r>
-              <a:rPr lang="en-US" sz="2700" b="1" dirty="0">
+              <a:rPr lang="en-US" sz="3400" b="1" dirty="0">
                 <a:solidFill>
                   <a:srgbClr val="003A63"/>
                 </a:solidFill>
@@ -14221,20 +15397,20 @@
               </a:rPr>
               <a:t>Learning Objectives Continued</a:t>
             </a:r>
-            <a:endParaRPr lang="en-US" sz="2700" dirty="0"/>
-          </a:p>
-        </p:txBody>
-      </p:sp>
-      <p:sp>
-        <p:nvSpPr>
-          <p:cNvPr id="8" name="Text 6"/>
-          <p:cNvSpPr/>
-          <p:nvPr/>
-        </p:nvSpPr>
-        <p:spPr>
-          <a:xfrm>
-            <a:off x="868680" y="1417320"/>
-            <a:ext cx="6675120" cy="4434840"/>
+            <a:endParaRPr lang="en-US" sz="3400" dirty="0"/>
+          </a:p>
+        </p:txBody>
+      </p:sp>
+      <p:sp>
+        <p:nvSpPr>
+          <p:cNvPr id="9" name="Text 7"/>
+          <p:cNvSpPr/>
+          <p:nvPr/>
+        </p:nvSpPr>
+        <p:spPr>
+          <a:xfrm>
+            <a:off x="868680" y="1508760"/>
+            <a:ext cx="6537960" cy="4160520"/>
           </a:xfrm>
           <a:prstGeom prst="rect">
             <a:avLst/>
@@ -14249,7 +15425,7 @@
           <a:lstStyle/>
           <a:p>
             <a:r>
-              <a:rPr lang="en-US" sz="1700" dirty="0">
+              <a:rPr lang="en-US" sz="2100" dirty="0">
                 <a:solidFill>
                   <a:srgbClr val="17364A"/>
                 </a:solidFill>
@@ -14259,13 +15435,13 @@
               </a:rPr>
               <a:t>Produce a privacy-preserving AI review worksheet for a real or realistic public health workflow.</a:t>
             </a:r>
-            <a:endParaRPr lang="en-US" sz="1700" dirty="0"/>
-          </a:p>
-        </p:txBody>
-      </p:sp>
-      <p:sp>
-        <p:nvSpPr>
-          <p:cNvPr id="9" name="Shape 7"/>
+            <a:endParaRPr lang="en-US" sz="2100" dirty="0"/>
+          </a:p>
+        </p:txBody>
+      </p:sp>
+      <p:sp>
+        <p:nvSpPr>
+          <p:cNvPr id="10" name="Shape 8"/>
           <p:cNvSpPr/>
           <p:nvPr/>
         </p:nvSpPr>
@@ -14292,14 +15468,14 @@
       </p:sp>
       <p:sp>
         <p:nvSpPr>
-          <p:cNvPr id="10" name="Text 8"/>
+          <p:cNvPr id="11" name="Text 9"/>
           <p:cNvSpPr/>
           <p:nvPr/>
         </p:nvSpPr>
         <p:spPr>
           <a:xfrm>
             <a:off x="8074152" y="1563624"/>
-            <a:ext cx="2825496" cy="201168"/>
+            <a:ext cx="2825496" cy="256032"/>
           </a:xfrm>
           <a:prstGeom prst="rect">
             <a:avLst/>
@@ -14315,7 +15491,7 @@
               <a:buNone/>
             </a:pPr>
             <a:r>
-              <a:rPr lang="en-US" sz="950" b="1" dirty="0">
+              <a:rPr lang="en-US" sz="1300" b="1" dirty="0">
                 <a:solidFill>
                   <a:srgbClr val="0068B7"/>
                 </a:solidFill>
@@ -14325,20 +15501,20 @@
               </a:rPr>
               <a:t>Key idea</a:t>
             </a:r>
-            <a:endParaRPr lang="en-US" sz="950" dirty="0"/>
-          </a:p>
-        </p:txBody>
-      </p:sp>
-      <p:sp>
-        <p:nvSpPr>
-          <p:cNvPr id="11" name="Text 9"/>
-          <p:cNvSpPr/>
-          <p:nvPr/>
-        </p:nvSpPr>
-        <p:spPr>
-          <a:xfrm>
-            <a:off x="8074152" y="1856232"/>
-            <a:ext cx="2825496" cy="1261872"/>
+            <a:endParaRPr lang="en-US" sz="1300" dirty="0"/>
+          </a:p>
+        </p:txBody>
+      </p:sp>
+      <p:sp>
+        <p:nvSpPr>
+          <p:cNvPr id="12" name="Text 10"/>
+          <p:cNvSpPr/>
+          <p:nvPr/>
+        </p:nvSpPr>
+        <p:spPr>
+          <a:xfrm>
+            <a:off x="8074152" y="1920240"/>
+            <a:ext cx="2825496" cy="1188720"/>
           </a:xfrm>
           <a:prstGeom prst="rect">
             <a:avLst/>
@@ -14356,7 +15532,7 @@
               <a:buNone/>
             </a:pPr>
             <a:r>
-              <a:rPr lang="en-US" sz="1250" dirty="0">
+              <a:rPr lang="en-US" sz="1550" dirty="0">
                 <a:solidFill>
                   <a:srgbClr val="17364A"/>
                 </a:solidFill>
@@ -14366,13 +15542,13 @@
               </a:rPr>
               <a:t>Produce a privacy-preserving AI review worksheet for a real or realistic public health workflow.</a:t>
             </a:r>
-            <a:endParaRPr lang="en-US" sz="1250" dirty="0"/>
-          </a:p>
-        </p:txBody>
-      </p:sp>
-      <p:sp>
-        <p:nvSpPr>
-          <p:cNvPr id="12" name="Shape 10"/>
+            <a:endParaRPr lang="en-US" sz="1550" dirty="0"/>
+          </a:p>
+        </p:txBody>
+      </p:sp>
+      <p:sp>
+        <p:nvSpPr>
+          <p:cNvPr id="13" name="Shape 11"/>
           <p:cNvSpPr/>
           <p:nvPr/>
         </p:nvSpPr>
@@ -14399,14 +15575,14 @@
       </p:sp>
       <p:sp>
         <p:nvSpPr>
-          <p:cNvPr id="13" name="Text 11"/>
+          <p:cNvPr id="14" name="Text 12"/>
           <p:cNvSpPr/>
           <p:nvPr/>
         </p:nvSpPr>
         <p:spPr>
           <a:xfrm>
             <a:off x="8074152" y="3666744"/>
-            <a:ext cx="2825496" cy="201168"/>
+            <a:ext cx="2825496" cy="256032"/>
           </a:xfrm>
           <a:prstGeom prst="rect">
             <a:avLst/>
@@ -14422,7 +15598,7 @@
               <a:buNone/>
             </a:pPr>
             <a:r>
-              <a:rPr lang="en-US" sz="950" b="1" dirty="0">
+              <a:rPr lang="en-US" sz="1300" b="1" dirty="0">
                 <a:solidFill>
                   <a:srgbClr val="0068B7"/>
                 </a:solidFill>
@@ -14432,20 +15608,20 @@
               </a:rPr>
               <a:t>Use this for</a:t>
             </a:r>
-            <a:endParaRPr lang="en-US" sz="950" dirty="0"/>
-          </a:p>
-        </p:txBody>
-      </p:sp>
-      <p:sp>
-        <p:nvSpPr>
-          <p:cNvPr id="14" name="Text 12"/>
-          <p:cNvSpPr/>
-          <p:nvPr/>
-        </p:nvSpPr>
-        <p:spPr>
-          <a:xfrm>
-            <a:off x="8074152" y="3959352"/>
-            <a:ext cx="2825496" cy="1170432"/>
+            <a:endParaRPr lang="en-US" sz="1300" dirty="0"/>
+          </a:p>
+        </p:txBody>
+      </p:sp>
+      <p:sp>
+        <p:nvSpPr>
+          <p:cNvPr id="15" name="Text 13"/>
+          <p:cNvSpPr/>
+          <p:nvPr/>
+        </p:nvSpPr>
+        <p:spPr>
+          <a:xfrm>
+            <a:off x="8074152" y="4023360"/>
+            <a:ext cx="2825496" cy="1097280"/>
           </a:xfrm>
           <a:prstGeom prst="rect">
             <a:avLst/>
@@ -14463,7 +15639,7 @@
               <a:buNone/>
             </a:pPr>
             <a:r>
-              <a:rPr lang="en-US" sz="1250" dirty="0">
+              <a:rPr lang="en-US" sz="1550" dirty="0">
                 <a:solidFill>
                   <a:srgbClr val="17364A"/>
                 </a:solidFill>
@@ -14473,7 +15649,7 @@
               </a:rPr>
               <a:t>Connect the concept to public health decisions, safeguards, documentation, or implementation work.</a:t>
             </a:r>
-            <a:endParaRPr lang="en-US" sz="1250" dirty="0"/>
+            <a:endParaRPr lang="en-US" sz="1550" dirty="0"/>
           </a:p>
         </p:txBody>
       </p:sp>
@@ -14670,7 +15846,7 @@
                 <a:ea typeface="Aptos" pitchFamily="34" charset="-122"/>
                 <a:cs typeface="Aptos" pitchFamily="34" charset="-120"/>
               </a:rPr>
-              <a:t>© Paula Soper</a:t>
+              <a:t>Â© Paula Soper</a:t>
             </a:r>
             <a:endParaRPr lang="en-US" sz="800" dirty="0"/>
           </a:p>
@@ -14678,7 +15854,46 @@
       </p:sp>
       <p:sp>
         <p:nvSpPr>
-          <p:cNvPr id="7" name="Shape 5"/>
+          <p:cNvPr id="7" name="Text 5"/>
+          <p:cNvSpPr/>
+          <p:nvPr/>
+        </p:nvSpPr>
+        <p:spPr>
+          <a:xfrm>
+            <a:off x="11137392" y="6510528"/>
+            <a:ext cx="411480" cy="201168"/>
+          </a:xfrm>
+          <a:prstGeom prst="rect">
+            <a:avLst/>
+          </a:prstGeom>
+          <a:noFill/>
+          <a:ln/>
+        </p:spPr>
+        <p:txBody>
+          <a:bodyPr wrap="square" lIns="0" tIns="0" rIns="0" bIns="0" rtlCol="0" anchor="ctr"/>
+          <a:lstStyle/>
+          <a:p>
+            <a:pPr algn="r" indent="0" marL="0">
+              <a:buNone/>
+            </a:pPr>
+            <a:r>
+              <a:rPr lang="en-US" sz="900" dirty="0">
+                <a:solidFill>
+                  <a:srgbClr val="5F7181"/>
+                </a:solidFill>
+                <a:latin typeface="Aptos" pitchFamily="34" charset="0"/>
+                <a:ea typeface="Aptos" pitchFamily="34" charset="-122"/>
+                <a:cs typeface="Aptos" pitchFamily="34" charset="-120"/>
+              </a:rPr>
+              <a:t>7</a:t>
+            </a:r>
+            <a:endParaRPr lang="en-US" sz="900" dirty="0"/>
+          </a:p>
+        </p:txBody>
+      </p:sp>
+      <p:sp>
+        <p:nvSpPr>
+          <p:cNvPr id="8" name="Shape 6"/>
           <p:cNvSpPr/>
           <p:nvPr/>
         </p:nvSpPr>
@@ -14703,7 +15918,7 @@
       </p:sp>
       <p:sp>
         <p:nvSpPr>
-          <p:cNvPr id="8" name="Text 6"/>
+          <p:cNvPr id="9" name="Text 7"/>
           <p:cNvSpPr/>
           <p:nvPr/>
         </p:nvSpPr>
@@ -14742,14 +15957,14 @@
       </p:sp>
       <p:sp>
         <p:nvSpPr>
-          <p:cNvPr id="9" name="Text 7"/>
+          <p:cNvPr id="10" name="Text 8"/>
           <p:cNvSpPr/>
           <p:nvPr/>
         </p:nvSpPr>
         <p:spPr>
           <a:xfrm>
             <a:off x="640080" y="621792"/>
-            <a:ext cx="10881360" cy="566928"/>
+            <a:ext cx="10881360" cy="713232"/>
           </a:xfrm>
           <a:prstGeom prst="rect">
             <a:avLst/>
@@ -14767,7 +15982,7 @@
               <a:buNone/>
             </a:pPr>
             <a:r>
-              <a:rPr lang="en-US" sz="2700" b="1" dirty="0">
+              <a:rPr lang="en-US" sz="3400" b="1" dirty="0">
                 <a:solidFill>
                   <a:srgbClr val="003A63"/>
                 </a:solidFill>
@@ -14777,20 +15992,20 @@
               </a:rPr>
               <a:t>Module Overview</a:t>
             </a:r>
-            <a:endParaRPr lang="en-US" sz="2700" dirty="0"/>
-          </a:p>
-        </p:txBody>
-      </p:sp>
-      <p:sp>
-        <p:nvSpPr>
-          <p:cNvPr id="10" name="Text 8"/>
-          <p:cNvSpPr/>
-          <p:nvPr/>
-        </p:nvSpPr>
-        <p:spPr>
-          <a:xfrm>
-            <a:off x="868680" y="1417320"/>
-            <a:ext cx="6675120" cy="4434840"/>
+            <a:endParaRPr lang="en-US" sz="3400" dirty="0"/>
+          </a:p>
+        </p:txBody>
+      </p:sp>
+      <p:sp>
+        <p:nvSpPr>
+          <p:cNvPr id="11" name="Text 9"/>
+          <p:cNvSpPr/>
+          <p:nvPr/>
+        </p:nvSpPr>
+        <p:spPr>
+          <a:xfrm>
+            <a:off x="868680" y="1508760"/>
+            <a:ext cx="6537960" cy="4160520"/>
           </a:xfrm>
           <a:prstGeom prst="rect">
             <a:avLst/>
@@ -14805,7 +16020,7 @@
           <a:lstStyle/>
           <a:p>
             <a:r>
-              <a:rPr lang="en-US" sz="1700" dirty="0">
+              <a:rPr lang="en-US" sz="2100" dirty="0">
                 <a:solidFill>
                   <a:srgbClr val="17364A"/>
                 </a:solidFill>
@@ -14813,13 +16028,13 @@
                 <a:ea typeface="Aptos" pitchFamily="34" charset="-122"/>
                 <a:cs typeface="Aptos" pitchFamily="34" charset="-120"/>
               </a:rPr>
-              <a:t>Privacy-preserving AI is the set of technical, policy, and workflow practices that allow public health agencies to use data.</a:t>
-            </a:r>
-            <a:endParaRPr lang="en-US" sz="1700" dirty="0"/>
-          </a:p>
-          <a:p>
-            <a:r>
-              <a:rPr lang="en-US" sz="1700" dirty="0">
+              <a:t>Privacy-preserving AI is the set of technical, policy, and workflow practices that allow public health.</a:t>
+            </a:r>
+            <a:endParaRPr lang="en-US" sz="2100" dirty="0"/>
+          </a:p>
+          <a:p>
+            <a:r>
+              <a:rPr lang="en-US" sz="2100" dirty="0">
                 <a:solidFill>
                   <a:srgbClr val="17364A"/>
                 </a:solidFill>
@@ -14827,13 +16042,13 @@
                 <a:ea typeface="Aptos" pitchFamily="34" charset="-122"/>
                 <a:cs typeface="Aptos" pitchFamily="34" charset="-120"/>
               </a:rPr>
-              <a:t>This module focuses on how privacy protections must be built into AI planning before data are extracted, shared, used for.</a:t>
-            </a:r>
-            <a:endParaRPr lang="en-US" sz="1700" dirty="0"/>
-          </a:p>
-          <a:p>
-            <a:r>
-              <a:rPr lang="en-US" sz="1700" dirty="0">
+              <a:t>This module focuses on how privacy protections must be built into AI planning before data are.</a:t>
+            </a:r>
+            <a:endParaRPr lang="en-US" sz="2100" dirty="0"/>
+          </a:p>
+          <a:p>
+            <a:r>
+              <a:rPr lang="en-US" sz="2100" dirty="0">
                 <a:solidFill>
                   <a:srgbClr val="17364A"/>
                 </a:solidFill>
@@ -14841,29 +16056,15 @@
                 <a:ea typeface="Aptos" pitchFamily="34" charset="-122"/>
                 <a:cs typeface="Aptos" pitchFamily="34" charset="-120"/>
               </a:rPr>
-              <a:t>Public health agencies often have legal authority to collect and use sensitive data, but authority to use data does not.</a:t>
-            </a:r>
-            <a:endParaRPr lang="en-US" sz="1700" dirty="0"/>
-          </a:p>
-          <a:p>
-            <a:r>
-              <a:rPr lang="en-US" sz="1700" dirty="0">
-                <a:solidFill>
-                  <a:srgbClr val="17364A"/>
-                </a:solidFill>
-                <a:latin typeface="Aptos" pitchFamily="34" charset="0"/>
-                <a:ea typeface="Aptos" pitchFamily="34" charset="-122"/>
-                <a:cs typeface="Aptos" pitchFamily="34" charset="-120"/>
-              </a:rPr>
-              <a:t>AI can increase privacy risk because it may combine data sources, infer sensitive attributes, generate outputs that reveal.</a:t>
-            </a:r>
-            <a:endParaRPr lang="en-US" sz="1700" dirty="0"/>
-          </a:p>
-        </p:txBody>
-      </p:sp>
-      <p:sp>
-        <p:nvSpPr>
-          <p:cNvPr id="11" name="Shape 9"/>
+              <a:t>Public health agencies often have legal authority to collect and use sensitive data, but authority to.</a:t>
+            </a:r>
+            <a:endParaRPr lang="en-US" sz="2100" dirty="0"/>
+          </a:p>
+        </p:txBody>
+      </p:sp>
+      <p:sp>
+        <p:nvSpPr>
+          <p:cNvPr id="12" name="Shape 10"/>
           <p:cNvSpPr/>
           <p:nvPr/>
         </p:nvSpPr>
@@ -14890,14 +16091,14 @@
       </p:sp>
       <p:sp>
         <p:nvSpPr>
-          <p:cNvPr id="12" name="Text 10"/>
+          <p:cNvPr id="13" name="Text 11"/>
           <p:cNvSpPr/>
           <p:nvPr/>
         </p:nvSpPr>
         <p:spPr>
           <a:xfrm>
             <a:off x="8074152" y="1563624"/>
-            <a:ext cx="2825496" cy="201168"/>
+            <a:ext cx="2825496" cy="256032"/>
           </a:xfrm>
           <a:prstGeom prst="rect">
             <a:avLst/>
@@ -14913,7 +16114,7 @@
               <a:buNone/>
             </a:pPr>
             <a:r>
-              <a:rPr lang="en-US" sz="950" b="1" dirty="0">
+              <a:rPr lang="en-US" sz="1300" b="1" dirty="0">
                 <a:solidFill>
                   <a:srgbClr val="0068B7"/>
                 </a:solidFill>
@@ -14923,20 +16124,20 @@
               </a:rPr>
               <a:t>Key idea</a:t>
             </a:r>
-            <a:endParaRPr lang="en-US" sz="950" dirty="0"/>
-          </a:p>
-        </p:txBody>
-      </p:sp>
-      <p:sp>
-        <p:nvSpPr>
-          <p:cNvPr id="13" name="Text 11"/>
-          <p:cNvSpPr/>
-          <p:nvPr/>
-        </p:nvSpPr>
-        <p:spPr>
-          <a:xfrm>
-            <a:off x="8074152" y="1856232"/>
-            <a:ext cx="2825496" cy="1261872"/>
+            <a:endParaRPr lang="en-US" sz="1300" dirty="0"/>
+          </a:p>
+        </p:txBody>
+      </p:sp>
+      <p:sp>
+        <p:nvSpPr>
+          <p:cNvPr id="14" name="Text 12"/>
+          <p:cNvSpPr/>
+          <p:nvPr/>
+        </p:nvSpPr>
+        <p:spPr>
+          <a:xfrm>
+            <a:off x="8074152" y="1920240"/>
+            <a:ext cx="2825496" cy="1188720"/>
           </a:xfrm>
           <a:prstGeom prst="rect">
             <a:avLst/>
@@ -14954,7 +16155,7 @@
               <a:buNone/>
             </a:pPr>
             <a:r>
-              <a:rPr lang="en-US" sz="1250" dirty="0">
+              <a:rPr lang="en-US" sz="1550" dirty="0">
                 <a:solidFill>
                   <a:srgbClr val="17364A"/>
                 </a:solidFill>
@@ -14962,15 +16163,15 @@
                 <a:ea typeface="Aptos" pitchFamily="34" charset="-122"/>
                 <a:cs typeface="Aptos" pitchFamily="34" charset="-120"/>
               </a:rPr>
-              <a:t>Privacy-preserving AI is the set of technical, policy, and workflow practices that allow public health agencies to use data.</a:t>
-            </a:r>
-            <a:endParaRPr lang="en-US" sz="1250" dirty="0"/>
-          </a:p>
-        </p:txBody>
-      </p:sp>
-      <p:sp>
-        <p:nvSpPr>
-          <p:cNvPr id="14" name="Shape 12"/>
+              <a:t>Privacy-preserving AI is the set of technical, policy, and workflow practices that allow public health.</a:t>
+            </a:r>
+            <a:endParaRPr lang="en-US" sz="1550" dirty="0"/>
+          </a:p>
+        </p:txBody>
+      </p:sp>
+      <p:sp>
+        <p:nvSpPr>
+          <p:cNvPr id="15" name="Shape 13"/>
           <p:cNvSpPr/>
           <p:nvPr/>
         </p:nvSpPr>
@@ -14997,14 +16198,14 @@
       </p:sp>
       <p:sp>
         <p:nvSpPr>
-          <p:cNvPr id="15" name="Text 13"/>
+          <p:cNvPr id="16" name="Text 14"/>
           <p:cNvSpPr/>
           <p:nvPr/>
         </p:nvSpPr>
         <p:spPr>
           <a:xfrm>
             <a:off x="8074152" y="3666744"/>
-            <a:ext cx="2825496" cy="201168"/>
+            <a:ext cx="2825496" cy="256032"/>
           </a:xfrm>
           <a:prstGeom prst="rect">
             <a:avLst/>
@@ -15020,7 +16221,7 @@
               <a:buNone/>
             </a:pPr>
             <a:r>
-              <a:rPr lang="en-US" sz="950" b="1" dirty="0">
+              <a:rPr lang="en-US" sz="1300" b="1" dirty="0">
                 <a:solidFill>
                   <a:srgbClr val="0068B7"/>
                 </a:solidFill>
@@ -15030,20 +16231,20 @@
               </a:rPr>
               <a:t>Use this for</a:t>
             </a:r>
-            <a:endParaRPr lang="en-US" sz="950" dirty="0"/>
-          </a:p>
-        </p:txBody>
-      </p:sp>
-      <p:sp>
-        <p:nvSpPr>
-          <p:cNvPr id="16" name="Text 14"/>
-          <p:cNvSpPr/>
-          <p:nvPr/>
-        </p:nvSpPr>
-        <p:spPr>
-          <a:xfrm>
-            <a:off x="8074152" y="3959352"/>
-            <a:ext cx="2825496" cy="1170432"/>
+            <a:endParaRPr lang="en-US" sz="1300" dirty="0"/>
+          </a:p>
+        </p:txBody>
+      </p:sp>
+      <p:sp>
+        <p:nvSpPr>
+          <p:cNvPr id="17" name="Text 15"/>
+          <p:cNvSpPr/>
+          <p:nvPr/>
+        </p:nvSpPr>
+        <p:spPr>
+          <a:xfrm>
+            <a:off x="8074152" y="4023360"/>
+            <a:ext cx="2825496" cy="1097280"/>
           </a:xfrm>
           <a:prstGeom prst="rect">
             <a:avLst/>
@@ -15061,7 +16262,7 @@
               <a:buNone/>
             </a:pPr>
             <a:r>
-              <a:rPr lang="en-US" sz="1250" dirty="0">
+              <a:rPr lang="en-US" sz="1550" dirty="0">
                 <a:solidFill>
                   <a:srgbClr val="17364A"/>
                 </a:solidFill>
@@ -15071,7 +16272,7 @@
               </a:rPr>
               <a:t>Connect the concept to public health decisions, safeguards, documentation, or implementation work.</a:t>
             </a:r>
-            <a:endParaRPr lang="en-US" sz="1250" dirty="0"/>
+            <a:endParaRPr lang="en-US" sz="1550" dirty="0"/>
           </a:p>
         </p:txBody>
       </p:sp>
@@ -15268,7 +16469,7 @@
                 <a:ea typeface="Aptos" pitchFamily="34" charset="-122"/>
                 <a:cs typeface="Aptos" pitchFamily="34" charset="-120"/>
               </a:rPr>
-              <a:t>© Paula Soper</a:t>
+              <a:t>Â© Paula Soper</a:t>
             </a:r>
             <a:endParaRPr lang="en-US" sz="800" dirty="0"/>
           </a:p>
@@ -15276,7 +16477,46 @@
       </p:sp>
       <p:sp>
         <p:nvSpPr>
-          <p:cNvPr id="7" name="Shape 5"/>
+          <p:cNvPr id="7" name="Text 5"/>
+          <p:cNvSpPr/>
+          <p:nvPr/>
+        </p:nvSpPr>
+        <p:spPr>
+          <a:xfrm>
+            <a:off x="11137392" y="6510528"/>
+            <a:ext cx="411480" cy="201168"/>
+          </a:xfrm>
+          <a:prstGeom prst="rect">
+            <a:avLst/>
+          </a:prstGeom>
+          <a:noFill/>
+          <a:ln/>
+        </p:spPr>
+        <p:txBody>
+          <a:bodyPr wrap="square" lIns="0" tIns="0" rIns="0" bIns="0" rtlCol="0" anchor="ctr"/>
+          <a:lstStyle/>
+          <a:p>
+            <a:pPr algn="r" indent="0" marL="0">
+              <a:buNone/>
+            </a:pPr>
+            <a:r>
+              <a:rPr lang="en-US" sz="900" dirty="0">
+                <a:solidFill>
+                  <a:srgbClr val="5F7181"/>
+                </a:solidFill>
+                <a:latin typeface="Aptos" pitchFamily="34" charset="0"/>
+                <a:ea typeface="Aptos" pitchFamily="34" charset="-122"/>
+                <a:cs typeface="Aptos" pitchFamily="34" charset="-120"/>
+              </a:rPr>
+              <a:t>8</a:t>
+            </a:r>
+            <a:endParaRPr lang="en-US" sz="900" dirty="0"/>
+          </a:p>
+        </p:txBody>
+      </p:sp>
+      <p:sp>
+        <p:nvSpPr>
+          <p:cNvPr id="8" name="Shape 6"/>
           <p:cNvSpPr/>
           <p:nvPr/>
         </p:nvSpPr>
@@ -15301,7 +16541,7 @@
       </p:sp>
       <p:sp>
         <p:nvSpPr>
-          <p:cNvPr id="8" name="Text 6"/>
+          <p:cNvPr id="9" name="Text 7"/>
           <p:cNvSpPr/>
           <p:nvPr/>
         </p:nvSpPr>
@@ -15340,14 +16580,14 @@
       </p:sp>
       <p:sp>
         <p:nvSpPr>
-          <p:cNvPr id="9" name="Text 7"/>
+          <p:cNvPr id="10" name="Text 8"/>
           <p:cNvSpPr/>
           <p:nvPr/>
         </p:nvSpPr>
         <p:spPr>
           <a:xfrm>
             <a:off x="640080" y="621792"/>
-            <a:ext cx="10881360" cy="566928"/>
+            <a:ext cx="10881360" cy="713232"/>
           </a:xfrm>
           <a:prstGeom prst="rect">
             <a:avLst/>
@@ -15365,7 +16605,7 @@
               <a:buNone/>
             </a:pPr>
             <a:r>
-              <a:rPr lang="en-US" sz="2700" b="1" dirty="0">
+              <a:rPr lang="en-US" sz="3400" b="1" dirty="0">
                 <a:solidFill>
                   <a:srgbClr val="003A63"/>
                 </a:solidFill>
@@ -15375,20 +16615,20 @@
               </a:rPr>
               <a:t>Jurisdiction and Agency Policy Note</a:t>
             </a:r>
-            <a:endParaRPr lang="en-US" sz="2700" dirty="0"/>
-          </a:p>
-        </p:txBody>
-      </p:sp>
-      <p:sp>
-        <p:nvSpPr>
-          <p:cNvPr id="10" name="Text 8"/>
-          <p:cNvSpPr/>
-          <p:nvPr/>
-        </p:nvSpPr>
-        <p:spPr>
-          <a:xfrm>
-            <a:off x="868680" y="1417320"/>
-            <a:ext cx="6675120" cy="4434840"/>
+            <a:endParaRPr lang="en-US" sz="3400" dirty="0"/>
+          </a:p>
+        </p:txBody>
+      </p:sp>
+      <p:sp>
+        <p:nvSpPr>
+          <p:cNvPr id="11" name="Text 9"/>
+          <p:cNvSpPr/>
+          <p:nvPr/>
+        </p:nvSpPr>
+        <p:spPr>
+          <a:xfrm>
+            <a:off x="868680" y="1508760"/>
+            <a:ext cx="6537960" cy="4160520"/>
           </a:xfrm>
           <a:prstGeom prst="rect">
             <a:avLst/>
@@ -15403,7 +16643,7 @@
           <a:lstStyle/>
           <a:p>
             <a:r>
-              <a:rPr lang="en-US" sz="1700" dirty="0">
+              <a:rPr lang="en-US" sz="2100" dirty="0">
                 <a:solidFill>
                   <a:srgbClr val="17364A"/>
                 </a:solidFill>
@@ -15413,11 +16653,11 @@
               </a:rPr>
               <a:t>This module provides national-level training guidance for public health agencies and partners.</a:t>
             </a:r>
-            <a:endParaRPr lang="en-US" sz="1700" dirty="0"/>
-          </a:p>
-          <a:p>
-            <a:r>
-              <a:rPr lang="en-US" sz="1700" dirty="0">
+            <a:endParaRPr lang="en-US" sz="2100" dirty="0"/>
+          </a:p>
+          <a:p>
+            <a:r>
+              <a:rPr lang="en-US" sz="2100" dirty="0">
                 <a:solidFill>
                   <a:srgbClr val="17364A"/>
                 </a:solidFill>
@@ -15425,13 +16665,13 @@
                 <a:ea typeface="Aptos" pitchFamily="34" charset="-122"/>
                 <a:cs typeface="Aptos" pitchFamily="34" charset="-120"/>
               </a:rPr>
-              <a:t>It is not legal advice and does not replace review by agency legal counsel, privacy officers, procurement officials, civil.</a:t>
-            </a:r>
-            <a:endParaRPr lang="en-US" sz="1700" dirty="0"/>
-          </a:p>
-          <a:p>
-            <a:r>
-              <a:rPr lang="en-US" sz="1700" dirty="0">
+              <a:t>It is not legal advice and does not replace review by agency legal counsel, privacy officers,.</a:t>
+            </a:r>
+            <a:endParaRPr lang="en-US" sz="2100" dirty="0"/>
+          </a:p>
+          <a:p>
+            <a:r>
+              <a:rPr lang="en-US" sz="2100" dirty="0">
                 <a:solidFill>
                   <a:srgbClr val="17364A"/>
                 </a:solidFill>
@@ -15439,29 +16679,15 @@
                 <a:ea typeface="Aptos" pitchFamily="34" charset="-122"/>
                 <a:cs typeface="Aptos" pitchFamily="34" charset="-120"/>
               </a:rPr>
-              <a:t>Requirements may vary by state, locality, territory, Tribe, agency, funding source, data-sharing agreement, emergency.</a:t>
-            </a:r>
-            <a:endParaRPr lang="en-US" sz="1700" dirty="0"/>
-          </a:p>
-          <a:p>
-            <a:r>
-              <a:rPr lang="en-US" sz="1700" dirty="0">
-                <a:solidFill>
-                  <a:srgbClr val="17364A"/>
-                </a:solidFill>
-                <a:latin typeface="Aptos" pitchFamily="34" charset="0"/>
-                <a:ea typeface="Aptos" pitchFamily="34" charset="-122"/>
-                <a:cs typeface="Aptos" pitchFamily="34" charset="-120"/>
-              </a:rPr>
-              <a:t>Learners should use this module to identify the issues that require review and should confirm applicable requirements.</a:t>
-            </a:r>
-            <a:endParaRPr lang="en-US" sz="1700" dirty="0"/>
-          </a:p>
-        </p:txBody>
-      </p:sp>
-      <p:sp>
-        <p:nvSpPr>
-          <p:cNvPr id="11" name="Shape 9"/>
+              <a:t>Requirements may vary by state, locality, territory, Tribe, agency, funding source, data-sharing.</a:t>
+            </a:r>
+            <a:endParaRPr lang="en-US" sz="2100" dirty="0"/>
+          </a:p>
+        </p:txBody>
+      </p:sp>
+      <p:sp>
+        <p:nvSpPr>
+          <p:cNvPr id="12" name="Shape 10"/>
           <p:cNvSpPr/>
           <p:nvPr/>
         </p:nvSpPr>
@@ -15488,14 +16714,14 @@
       </p:sp>
       <p:sp>
         <p:nvSpPr>
-          <p:cNvPr id="12" name="Text 10"/>
+          <p:cNvPr id="13" name="Text 11"/>
           <p:cNvSpPr/>
           <p:nvPr/>
         </p:nvSpPr>
         <p:spPr>
           <a:xfrm>
             <a:off x="8074152" y="1563624"/>
-            <a:ext cx="2825496" cy="201168"/>
+            <a:ext cx="2825496" cy="256032"/>
           </a:xfrm>
           <a:prstGeom prst="rect">
             <a:avLst/>
@@ -15511,7 +16737,7 @@
               <a:buNone/>
             </a:pPr>
             <a:r>
-              <a:rPr lang="en-US" sz="950" b="1" dirty="0">
+              <a:rPr lang="en-US" sz="1300" b="1" dirty="0">
                 <a:solidFill>
                   <a:srgbClr val="0068B7"/>
                 </a:solidFill>
@@ -15521,20 +16747,20 @@
               </a:rPr>
               <a:t>Key idea</a:t>
             </a:r>
-            <a:endParaRPr lang="en-US" sz="950" dirty="0"/>
-          </a:p>
-        </p:txBody>
-      </p:sp>
-      <p:sp>
-        <p:nvSpPr>
-          <p:cNvPr id="13" name="Text 11"/>
-          <p:cNvSpPr/>
-          <p:nvPr/>
-        </p:nvSpPr>
-        <p:spPr>
-          <a:xfrm>
-            <a:off x="8074152" y="1856232"/>
-            <a:ext cx="2825496" cy="1261872"/>
+            <a:endParaRPr lang="en-US" sz="1300" dirty="0"/>
+          </a:p>
+        </p:txBody>
+      </p:sp>
+      <p:sp>
+        <p:nvSpPr>
+          <p:cNvPr id="14" name="Text 12"/>
+          <p:cNvSpPr/>
+          <p:nvPr/>
+        </p:nvSpPr>
+        <p:spPr>
+          <a:xfrm>
+            <a:off x="8074152" y="1920240"/>
+            <a:ext cx="2825496" cy="1188720"/>
           </a:xfrm>
           <a:prstGeom prst="rect">
             <a:avLst/>
@@ -15552,7 +16778,7 @@
               <a:buNone/>
             </a:pPr>
             <a:r>
-              <a:rPr lang="en-US" sz="1250" dirty="0">
+              <a:rPr lang="en-US" sz="1550" dirty="0">
                 <a:solidFill>
                   <a:srgbClr val="17364A"/>
                 </a:solidFill>
@@ -15562,13 +16788,13 @@
               </a:rPr>
               <a:t>This module provides national-level training guidance for public health agencies and partners.</a:t>
             </a:r>
-            <a:endParaRPr lang="en-US" sz="1250" dirty="0"/>
-          </a:p>
-        </p:txBody>
-      </p:sp>
-      <p:sp>
-        <p:nvSpPr>
-          <p:cNvPr id="14" name="Shape 12"/>
+            <a:endParaRPr lang="en-US" sz="1550" dirty="0"/>
+          </a:p>
+        </p:txBody>
+      </p:sp>
+      <p:sp>
+        <p:nvSpPr>
+          <p:cNvPr id="15" name="Shape 13"/>
           <p:cNvSpPr/>
           <p:nvPr/>
         </p:nvSpPr>
@@ -15595,14 +16821,14 @@
       </p:sp>
       <p:sp>
         <p:nvSpPr>
-          <p:cNvPr id="15" name="Text 13"/>
+          <p:cNvPr id="16" name="Text 14"/>
           <p:cNvSpPr/>
           <p:nvPr/>
         </p:nvSpPr>
         <p:spPr>
           <a:xfrm>
             <a:off x="8074152" y="3666744"/>
-            <a:ext cx="2825496" cy="201168"/>
+            <a:ext cx="2825496" cy="256032"/>
           </a:xfrm>
           <a:prstGeom prst="rect">
             <a:avLst/>
@@ -15618,7 +16844,7 @@
               <a:buNone/>
             </a:pPr>
             <a:r>
-              <a:rPr lang="en-US" sz="950" b="1" dirty="0">
+              <a:rPr lang="en-US" sz="1300" b="1" dirty="0">
                 <a:solidFill>
                   <a:srgbClr val="0068B7"/>
                 </a:solidFill>
@@ -15628,20 +16854,20 @@
               </a:rPr>
               <a:t>Use this for</a:t>
             </a:r>
-            <a:endParaRPr lang="en-US" sz="950" dirty="0"/>
-          </a:p>
-        </p:txBody>
-      </p:sp>
-      <p:sp>
-        <p:nvSpPr>
-          <p:cNvPr id="16" name="Text 14"/>
-          <p:cNvSpPr/>
-          <p:nvPr/>
-        </p:nvSpPr>
-        <p:spPr>
-          <a:xfrm>
-            <a:off x="8074152" y="3959352"/>
-            <a:ext cx="2825496" cy="1170432"/>
+            <a:endParaRPr lang="en-US" sz="1300" dirty="0"/>
+          </a:p>
+        </p:txBody>
+      </p:sp>
+      <p:sp>
+        <p:nvSpPr>
+          <p:cNvPr id="17" name="Text 15"/>
+          <p:cNvSpPr/>
+          <p:nvPr/>
+        </p:nvSpPr>
+        <p:spPr>
+          <a:xfrm>
+            <a:off x="8074152" y="4023360"/>
+            <a:ext cx="2825496" cy="1097280"/>
           </a:xfrm>
           <a:prstGeom prst="rect">
             <a:avLst/>
@@ -15659,7 +16885,7 @@
               <a:buNone/>
             </a:pPr>
             <a:r>
-              <a:rPr lang="en-US" sz="1250" dirty="0">
+              <a:rPr lang="en-US" sz="1550" dirty="0">
                 <a:solidFill>
                   <a:srgbClr val="17364A"/>
                 </a:solidFill>
@@ -15669,7 +16895,7 @@
               </a:rPr>
               <a:t>Connect the concept to public health decisions, safeguards, documentation, or implementation work.</a:t>
             </a:r>
-            <a:endParaRPr lang="en-US" sz="1250" dirty="0"/>
+            <a:endParaRPr lang="en-US" sz="1550" dirty="0"/>
           </a:p>
         </p:txBody>
       </p:sp>
@@ -15866,7 +17092,7 @@
                 <a:ea typeface="Aptos" pitchFamily="34" charset="-122"/>
                 <a:cs typeface="Aptos" pitchFamily="34" charset="-120"/>
               </a:rPr>
-              <a:t>© Paula Soper</a:t>
+              <a:t>Â© Paula Soper</a:t>
             </a:r>
             <a:endParaRPr lang="en-US" sz="800" dirty="0"/>
           </a:p>
@@ -15874,7 +17100,46 @@
       </p:sp>
       <p:sp>
         <p:nvSpPr>
-          <p:cNvPr id="7" name="Shape 5"/>
+          <p:cNvPr id="7" name="Text 5"/>
+          <p:cNvSpPr/>
+          <p:nvPr/>
+        </p:nvSpPr>
+        <p:spPr>
+          <a:xfrm>
+            <a:off x="11137392" y="6510528"/>
+            <a:ext cx="411480" cy="201168"/>
+          </a:xfrm>
+          <a:prstGeom prst="rect">
+            <a:avLst/>
+          </a:prstGeom>
+          <a:noFill/>
+          <a:ln/>
+        </p:spPr>
+        <p:txBody>
+          <a:bodyPr wrap="square" lIns="0" tIns="0" rIns="0" bIns="0" rtlCol="0" anchor="ctr"/>
+          <a:lstStyle/>
+          <a:p>
+            <a:pPr algn="r" indent="0" marL="0">
+              <a:buNone/>
+            </a:pPr>
+            <a:r>
+              <a:rPr lang="en-US" sz="900" dirty="0">
+                <a:solidFill>
+                  <a:srgbClr val="5F7181"/>
+                </a:solidFill>
+                <a:latin typeface="Aptos" pitchFamily="34" charset="0"/>
+                <a:ea typeface="Aptos" pitchFamily="34" charset="-122"/>
+                <a:cs typeface="Aptos" pitchFamily="34" charset="-120"/>
+              </a:rPr>
+              <a:t>9</a:t>
+            </a:r>
+            <a:endParaRPr lang="en-US" sz="900" dirty="0"/>
+          </a:p>
+        </p:txBody>
+      </p:sp>
+      <p:sp>
+        <p:nvSpPr>
+          <p:cNvPr id="8" name="Shape 6"/>
           <p:cNvSpPr/>
           <p:nvPr/>
         </p:nvSpPr>
@@ -15899,7 +17164,7 @@
       </p:sp>
       <p:sp>
         <p:nvSpPr>
-          <p:cNvPr id="8" name="Text 6"/>
+          <p:cNvPr id="9" name="Text 7"/>
           <p:cNvSpPr/>
           <p:nvPr/>
         </p:nvSpPr>
@@ -15938,14 +17203,14 @@
       </p:sp>
       <p:sp>
         <p:nvSpPr>
-          <p:cNvPr id="9" name="Text 7"/>
+          <p:cNvPr id="10" name="Text 8"/>
           <p:cNvSpPr/>
           <p:nvPr/>
         </p:nvSpPr>
         <p:spPr>
           <a:xfrm>
             <a:off x="640080" y="621792"/>
-            <a:ext cx="10881360" cy="566928"/>
+            <a:ext cx="10881360" cy="713232"/>
           </a:xfrm>
           <a:prstGeom prst="rect">
             <a:avLst/>
@@ -15963,7 +17228,7 @@
               <a:buNone/>
             </a:pPr>
             <a:r>
-              <a:rPr lang="en-US" sz="2700" b="1" dirty="0">
+              <a:rPr lang="en-US" sz="3400" b="1" dirty="0">
                 <a:solidFill>
                   <a:srgbClr val="003A63"/>
                 </a:solidFill>
@@ -15973,20 +17238,20 @@
               </a:rPr>
               <a:t>Why This Topic Matters for Public Health AI</a:t>
             </a:r>
-            <a:endParaRPr lang="en-US" sz="2700" dirty="0"/>
-          </a:p>
-        </p:txBody>
-      </p:sp>
-      <p:sp>
-        <p:nvSpPr>
-          <p:cNvPr id="10" name="Text 8"/>
-          <p:cNvSpPr/>
-          <p:nvPr/>
-        </p:nvSpPr>
-        <p:spPr>
-          <a:xfrm>
-            <a:off x="868680" y="1417320"/>
-            <a:ext cx="6675120" cy="4434840"/>
+            <a:endParaRPr lang="en-US" sz="3400" dirty="0"/>
+          </a:p>
+        </p:txBody>
+      </p:sp>
+      <p:sp>
+        <p:nvSpPr>
+          <p:cNvPr id="11" name="Text 9"/>
+          <p:cNvSpPr/>
+          <p:nvPr/>
+        </p:nvSpPr>
+        <p:spPr>
+          <a:xfrm>
+            <a:off x="868680" y="1508760"/>
+            <a:ext cx="6537960" cy="4160520"/>
           </a:xfrm>
           <a:prstGeom prst="rect">
             <a:avLst/>
@@ -16001,7 +17266,7 @@
           <a:lstStyle/>
           <a:p>
             <a:r>
-              <a:rPr lang="en-US" sz="1700" dirty="0">
+              <a:rPr lang="en-US" sz="2100" dirty="0">
                 <a:solidFill>
                   <a:srgbClr val="17364A"/>
                 </a:solidFill>
@@ -16009,13 +17274,13 @@
                 <a:ea typeface="Aptos" pitchFamily="34" charset="-122"/>
                 <a:cs typeface="Aptos" pitchFamily="34" charset="-120"/>
               </a:rPr>
-              <a:t>AI can change the privacy risk profile of a public health dataset even when the source data were already collected lawfully.</a:t>
-            </a:r>
-            <a:endParaRPr lang="en-US" sz="1700" dirty="0"/>
-          </a:p>
-          <a:p>
-            <a:r>
-              <a:rPr lang="en-US" sz="1700" dirty="0">
+              <a:t>AI can change the privacy risk profile of a public health dataset even when the source data were.</a:t>
+            </a:r>
+            <a:endParaRPr lang="en-US" sz="2100" dirty="0"/>
+          </a:p>
+          <a:p>
+            <a:r>
+              <a:rPr lang="en-US" sz="2100" dirty="0">
                 <a:solidFill>
                   <a:srgbClr val="17364A"/>
                 </a:solidFill>
@@ -16023,13 +17288,13 @@
                 <a:ea typeface="Aptos" pitchFamily="34" charset="-122"/>
                 <a:cs typeface="Aptos" pitchFamily="34" charset="-120"/>
               </a:rPr>
-              <a:t>A dataset that seems low risk in one context may become more sensitive when linked to geospatial information, clinical.</a:t>
-            </a:r>
-            <a:endParaRPr lang="en-US" sz="1700" dirty="0"/>
-          </a:p>
-          <a:p>
-            <a:r>
-              <a:rPr lang="en-US" sz="1700" dirty="0">
+              <a:t>A dataset that seems low risk in one context may become more sensitive when linked to geospatial.</a:t>
+            </a:r>
+            <a:endParaRPr lang="en-US" sz="2100" dirty="0"/>
+          </a:p>
+          <a:p>
+            <a:r>
+              <a:rPr lang="en-US" sz="2100" dirty="0">
                 <a:solidFill>
                   <a:srgbClr val="17364A"/>
                 </a:solidFill>
@@ -16037,29 +17302,15 @@
                 <a:ea typeface="Aptos" pitchFamily="34" charset="-122"/>
                 <a:cs typeface="Aptos" pitchFamily="34" charset="-120"/>
               </a:rPr>
-              <a:t>Generative AI and retrieval systems can also reveal sensitive details through summaries, citations, or unexpected responses.</a:t>
-            </a:r>
-            <a:endParaRPr lang="en-US" sz="1700" dirty="0"/>
-          </a:p>
-          <a:p>
-            <a:r>
-              <a:rPr lang="en-US" sz="1700" dirty="0">
-                <a:solidFill>
-                  <a:srgbClr val="17364A"/>
-                </a:solidFill>
-                <a:latin typeface="Aptos" pitchFamily="34" charset="0"/>
-                <a:ea typeface="Aptos" pitchFamily="34" charset="-122"/>
-                <a:cs typeface="Aptos" pitchFamily="34" charset="-120"/>
-              </a:rPr>
-              <a:t>Privacy review must therefore consider not only the dataset itself, but also how the AI system accesses, transforms,.</a:t>
-            </a:r>
-            <a:endParaRPr lang="en-US" sz="1700" dirty="0"/>
-          </a:p>
-        </p:txBody>
-      </p:sp>
-      <p:sp>
-        <p:nvSpPr>
-          <p:cNvPr id="11" name="Shape 9"/>
+              <a:t>Generative AI and retrieval systems can also reveal sensitive details through summaries, citations, or.</a:t>
+            </a:r>
+            <a:endParaRPr lang="en-US" sz="2100" dirty="0"/>
+          </a:p>
+        </p:txBody>
+      </p:sp>
+      <p:sp>
+        <p:nvSpPr>
+          <p:cNvPr id="12" name="Shape 10"/>
           <p:cNvSpPr/>
           <p:nvPr/>
         </p:nvSpPr>
@@ -16086,14 +17337,14 @@
       </p:sp>
       <p:sp>
         <p:nvSpPr>
-          <p:cNvPr id="12" name="Text 10"/>
+          <p:cNvPr id="13" name="Text 11"/>
           <p:cNvSpPr/>
           <p:nvPr/>
         </p:nvSpPr>
         <p:spPr>
           <a:xfrm>
             <a:off x="8074152" y="1563624"/>
-            <a:ext cx="2825496" cy="201168"/>
+            <a:ext cx="2825496" cy="256032"/>
           </a:xfrm>
           <a:prstGeom prst="rect">
             <a:avLst/>
@@ -16109,7 +17360,7 @@
               <a:buNone/>
             </a:pPr>
             <a:r>
-              <a:rPr lang="en-US" sz="950" b="1" dirty="0">
+              <a:rPr lang="en-US" sz="1300" b="1" dirty="0">
                 <a:solidFill>
                   <a:srgbClr val="0068B7"/>
                 </a:solidFill>
@@ -16119,20 +17370,20 @@
               </a:rPr>
               <a:t>Key idea</a:t>
             </a:r>
-            <a:endParaRPr lang="en-US" sz="950" dirty="0"/>
-          </a:p>
-        </p:txBody>
-      </p:sp>
-      <p:sp>
-        <p:nvSpPr>
-          <p:cNvPr id="13" name="Text 11"/>
-          <p:cNvSpPr/>
-          <p:nvPr/>
-        </p:nvSpPr>
-        <p:spPr>
-          <a:xfrm>
-            <a:off x="8074152" y="1856232"/>
-            <a:ext cx="2825496" cy="1261872"/>
+            <a:endParaRPr lang="en-US" sz="1300" dirty="0"/>
+          </a:p>
+        </p:txBody>
+      </p:sp>
+      <p:sp>
+        <p:nvSpPr>
+          <p:cNvPr id="14" name="Text 12"/>
+          <p:cNvSpPr/>
+          <p:nvPr/>
+        </p:nvSpPr>
+        <p:spPr>
+          <a:xfrm>
+            <a:off x="8074152" y="1920240"/>
+            <a:ext cx="2825496" cy="1188720"/>
           </a:xfrm>
           <a:prstGeom prst="rect">
             <a:avLst/>
@@ -16150,7 +17401,7 @@
               <a:buNone/>
             </a:pPr>
             <a:r>
-              <a:rPr lang="en-US" sz="1250" dirty="0">
+              <a:rPr lang="en-US" sz="1550" dirty="0">
                 <a:solidFill>
                   <a:srgbClr val="17364A"/>
                 </a:solidFill>
@@ -16158,15 +17409,15 @@
                 <a:ea typeface="Aptos" pitchFamily="34" charset="-122"/>
                 <a:cs typeface="Aptos" pitchFamily="34" charset="-120"/>
               </a:rPr>
-              <a:t>AI can change the privacy risk profile of a public health dataset even when the source data were already collected lawfully.</a:t>
-            </a:r>
-            <a:endParaRPr lang="en-US" sz="1250" dirty="0"/>
-          </a:p>
-        </p:txBody>
-      </p:sp>
-      <p:sp>
-        <p:nvSpPr>
-          <p:cNvPr id="14" name="Shape 12"/>
+              <a:t>AI can change the privacy risk profile of a public health dataset even when the source data were.</a:t>
+            </a:r>
+            <a:endParaRPr lang="en-US" sz="1550" dirty="0"/>
+          </a:p>
+        </p:txBody>
+      </p:sp>
+      <p:sp>
+        <p:nvSpPr>
+          <p:cNvPr id="15" name="Shape 13"/>
           <p:cNvSpPr/>
           <p:nvPr/>
         </p:nvSpPr>
@@ -16193,14 +17444,14 @@
       </p:sp>
       <p:sp>
         <p:nvSpPr>
-          <p:cNvPr id="15" name="Text 13"/>
+          <p:cNvPr id="16" name="Text 14"/>
           <p:cNvSpPr/>
           <p:nvPr/>
         </p:nvSpPr>
         <p:spPr>
           <a:xfrm>
             <a:off x="8074152" y="3666744"/>
-            <a:ext cx="2825496" cy="201168"/>
+            <a:ext cx="2825496" cy="256032"/>
           </a:xfrm>
           <a:prstGeom prst="rect">
             <a:avLst/>
@@ -16216,7 +17467,7 @@
               <a:buNone/>
             </a:pPr>
             <a:r>
-              <a:rPr lang="en-US" sz="950" b="1" dirty="0">
+              <a:rPr lang="en-US" sz="1300" b="1" dirty="0">
                 <a:solidFill>
                   <a:srgbClr val="0068B7"/>
                 </a:solidFill>
@@ -16226,20 +17477,20 @@
               </a:rPr>
               <a:t>Use this for</a:t>
             </a:r>
-            <a:endParaRPr lang="en-US" sz="950" dirty="0"/>
-          </a:p>
-        </p:txBody>
-      </p:sp>
-      <p:sp>
-        <p:nvSpPr>
-          <p:cNvPr id="16" name="Text 14"/>
-          <p:cNvSpPr/>
-          <p:nvPr/>
-        </p:nvSpPr>
-        <p:spPr>
-          <a:xfrm>
-            <a:off x="8074152" y="3959352"/>
-            <a:ext cx="2825496" cy="1170432"/>
+            <a:endParaRPr lang="en-US" sz="1300" dirty="0"/>
+          </a:p>
+        </p:txBody>
+      </p:sp>
+      <p:sp>
+        <p:nvSpPr>
+          <p:cNvPr id="17" name="Text 15"/>
+          <p:cNvSpPr/>
+          <p:nvPr/>
+        </p:nvSpPr>
+        <p:spPr>
+          <a:xfrm>
+            <a:off x="8074152" y="4023360"/>
+            <a:ext cx="2825496" cy="1097280"/>
           </a:xfrm>
           <a:prstGeom prst="rect">
             <a:avLst/>
@@ -16257,7 +17508,7 @@
               <a:buNone/>
             </a:pPr>
             <a:r>
-              <a:rPr lang="en-US" sz="1250" dirty="0">
+              <a:rPr lang="en-US" sz="1550" dirty="0">
                 <a:solidFill>
                   <a:srgbClr val="17364A"/>
                 </a:solidFill>
@@ -16267,7 +17518,7 @@
               </a:rPr>
               <a:t>Connect the concept to public health decisions, safeguards, documentation, or implementation work.</a:t>
             </a:r>
-            <a:endParaRPr lang="en-US" sz="1250" dirty="0"/>
+            <a:endParaRPr lang="en-US" sz="1550" dirty="0"/>
           </a:p>
         </p:txBody>
       </p:sp>
